--- a/presentation/verify/HWSW project — nbody & pyflate.pptx
+++ b/presentation/verify/HWSW project — nbody & pyflate.pptx
@@ -13,16 +13,24 @@
     <p:sldId id="258" r:id="rId9"/>
     <p:sldId id="259" r:id="rId10"/>
     <p:sldId id="260" r:id="rId11"/>
+    <p:sldId id="261" r:id="rId12"/>
+    <p:sldId id="262" r:id="rId13"/>
+    <p:sldId id="263" r:id="rId14"/>
+    <p:sldId id="264" r:id="rId15"/>
+    <p:sldId id="265" r:id="rId16"/>
+    <p:sldId id="266" r:id="rId17"/>
+    <p:sldId id="267" r:id="rId18"/>
+    <p:sldId id="268" r:id="rId19"/>
   </p:sldIdLst>
   <p:sldSz cy="5143500" cx="9144000"/>
   <p:notesSz cx="6858000" cy="9144000"/>
   <p:embeddedFontLst>
     <p:embeddedFont>
       <p:font typeface="Roboto"/>
-      <p:regular r:id="rId12"/>
-      <p:bold r:id="rId13"/>
-      <p:italic r:id="rId14"/>
-      <p:boldItalic r:id="rId15"/>
+      <p:regular r:id="rId20"/>
+      <p:bold r:id="rId21"/>
+      <p:italic r:id="rId22"/>
+      <p:boldItalic r:id="rId23"/>
     </p:embeddedFont>
   </p:embeddedFontLst>
   <p:defaultTextStyle>
@@ -799,6 +807,419 @@
 </p:notes>
 </file>
 
+<file path=ppt/notesSlides/notesSlide10.xml><?xml version="1.0" encoding="utf-8"?>
+<p:notes xmlns:a="http://schemas.openxmlformats.org/drawingml/2006/main" xmlns:r="http://schemas.openxmlformats.org/officeDocument/2006/relationships" xmlns:mc="http://schemas.openxmlformats.org/markup-compatibility/2006" xmlns:mv="urn:schemas-microsoft-com:mac:vml" xmlns:p="http://schemas.openxmlformats.org/presentationml/2006/main" xmlns:c="http://schemas.openxmlformats.org/drawingml/2006/chart" xmlns:dgm="http://schemas.openxmlformats.org/drawingml/2006/diagram" xmlns:o="urn:schemas-microsoft-com:office:office" xmlns:v="urn:schemas-microsoft-com:vml" xmlns:pvml="urn:schemas-microsoft-com:office:powerpoint" xmlns:com="http://schemas.openxmlformats.org/drawingml/2006/compatibility" xmlns:p14="http://schemas.microsoft.com/office/powerpoint/2010/main" xmlns:p15="http://schemas.microsoft.com/office/powerpoint/2012/main" xmlns:ahyp="http://schemas.microsoft.com/office/drawing/2018/hyperlinkcolor" showMasterPhAnim="0" showMasterSp="0">
+  <p:cSld>
+    <p:spTree>
+      <p:nvGrpSpPr>
+        <p:cNvPr id="107" name="Shape 107"/>
+        <p:cNvGrpSpPr/>
+        <p:nvPr/>
+      </p:nvGrpSpPr>
+      <p:grpSpPr>
+        <a:xfrm>
+          <a:off x="0" y="0"/>
+          <a:ext cx="0" cy="0"/>
+          <a:chOff x="0" y="0"/>
+          <a:chExt cx="0" cy="0"/>
+        </a:xfrm>
+      </p:grpSpPr>
+      <p:sp>
+        <p:nvSpPr>
+          <p:cNvPr id="108" name="Google Shape;108;h2935f64077afe61a_19_34:notes"/>
+          <p:cNvSpPr/>
+          <p:nvPr>
+            <p:ph idx="2" type="sldImg"/>
+          </p:nvPr>
+        </p:nvSpPr>
+        <p:spPr>
+          <a:xfrm>
+            <a:off x="381300" y="685800"/>
+            <a:ext cx="6096000" cy="3429000"/>
+          </a:xfrm>
+          <a:custGeom>
+            <a:rect b="b" l="l" r="r" t="t"/>
+            <a:pathLst>
+              <a:path extrusionOk="0" h="120000" w="120000">
+                <a:moveTo>
+                  <a:pt x="0" y="0"/>
+                </a:moveTo>
+                <a:lnTo>
+                  <a:pt x="120000" y="0"/>
+                </a:lnTo>
+                <a:lnTo>
+                  <a:pt x="120000" y="120000"/>
+                </a:lnTo>
+                <a:lnTo>
+                  <a:pt x="0" y="120000"/>
+                </a:lnTo>
+                <a:close/>
+              </a:path>
+            </a:pathLst>
+          </a:custGeom>
+        </p:spPr>
+      </p:sp>
+      <p:sp>
+        <p:nvSpPr>
+          <p:cNvPr id="109" name="Google Shape;109;h2935f64077afe61a_19_34:notes"/>
+          <p:cNvSpPr txBox="1"/>
+          <p:nvPr>
+            <p:ph idx="1" type="body"/>
+          </p:nvPr>
+        </p:nvSpPr>
+        <p:spPr>
+          <a:xfrm>
+            <a:off x="685800" y="4343400"/>
+            <a:ext cx="5486400" cy="4114800"/>
+          </a:xfrm>
+          <a:prstGeom prst="rect">
+            <a:avLst/>
+          </a:prstGeom>
+        </p:spPr>
+        <p:txBody>
+          <a:bodyPr anchorCtr="0" anchor="t" bIns="91425" lIns="91425" spcFirstLastPara="1" rIns="91425" wrap="square" tIns="91425">
+            <a:noAutofit/>
+          </a:bodyPr>
+          <a:lstStyle/>
+          <a:p>
+            <a:pPr indent="0" lvl="0" marL="0" rtl="0" algn="l">
+              <a:spcBef>
+                <a:spcPts val="0"/>
+              </a:spcBef>
+              <a:spcAft>
+                <a:spcPts val="0"/>
+              </a:spcAft>
+              <a:buNone/>
+            </a:pPr>
+            <a:r>
+              <a:rPr lang="en"/>
+              <a:t>The uArch model predicted 123 cycles per step, and the bring-up smoke test measured 126, so every gate was green until sign-off. The sign-off test runs the real workload, all ten pairs for 20,000 steps, and there K1 was 162: the smoke test used only two pairs, a shape in which the static schedule hides the accumulate phase, and the RTL had implemented the ordered velocity accumulate as single-issue. Widening it to three ops per cycle, with a per-lane integrate and a 3-port body register file, brought K1 to 124, inside the model's 123 to 127 window. Both design points are fully synthesized, so the trade-off is measured: 38.7% more area for 23.5% fewer cycles. Renegotiating K1 to 162 was offered and declined at the sign-off checkpoint.</a:t>
+            </a:r>
+            <a:endParaRPr/>
+          </a:p>
+        </p:txBody>
+      </p:sp>
+    </p:spTree>
+  </p:cSld>
+  <p:clrMapOvr>
+    <a:masterClrMapping/>
+  </p:clrMapOvr>
+</p:notes>
+</file>
+
+<file path=ppt/notesSlides/notesSlide11.xml><?xml version="1.0" encoding="utf-8"?>
+<p:notes xmlns:a="http://schemas.openxmlformats.org/drawingml/2006/main" xmlns:r="http://schemas.openxmlformats.org/officeDocument/2006/relationships" xmlns:mc="http://schemas.openxmlformats.org/markup-compatibility/2006" xmlns:mv="urn:schemas-microsoft-com:mac:vml" xmlns:p="http://schemas.openxmlformats.org/presentationml/2006/main" xmlns:c="http://schemas.openxmlformats.org/drawingml/2006/chart" xmlns:dgm="http://schemas.openxmlformats.org/drawingml/2006/diagram" xmlns:o="urn:schemas-microsoft-com:office:office" xmlns:v="urn:schemas-microsoft-com:vml" xmlns:pvml="urn:schemas-microsoft-com:office:powerpoint" xmlns:com="http://schemas.openxmlformats.org/drawingml/2006/compatibility" xmlns:p14="http://schemas.microsoft.com/office/powerpoint/2010/main" xmlns:p15="http://schemas.microsoft.com/office/powerpoint/2012/main" xmlns:ahyp="http://schemas.microsoft.com/office/drawing/2018/hyperlinkcolor" showMasterPhAnim="0" showMasterSp="0">
+  <p:cSld>
+    <p:spTree>
+      <p:nvGrpSpPr>
+        <p:cNvPr id="114" name="Shape 114"/>
+        <p:cNvGrpSpPr/>
+        <p:nvPr/>
+      </p:nvGrpSpPr>
+      <p:grpSpPr>
+        <a:xfrm>
+          <a:off x="0" y="0"/>
+          <a:ext cx="0" cy="0"/>
+          <a:chOff x="0" y="0"/>
+          <a:chExt cx="0" cy="0"/>
+        </a:xfrm>
+      </p:grpSpPr>
+      <p:sp>
+        <p:nvSpPr>
+          <p:cNvPr id="115" name="Google Shape;115;h2935f64077afe61a_19_42:notes"/>
+          <p:cNvSpPr/>
+          <p:nvPr>
+            <p:ph idx="2" type="sldImg"/>
+          </p:nvPr>
+        </p:nvSpPr>
+        <p:spPr>
+          <a:xfrm>
+            <a:off x="381300" y="685800"/>
+            <a:ext cx="6096000" cy="3429000"/>
+          </a:xfrm>
+          <a:custGeom>
+            <a:rect b="b" l="l" r="r" t="t"/>
+            <a:pathLst>
+              <a:path extrusionOk="0" h="120000" w="120000">
+                <a:moveTo>
+                  <a:pt x="0" y="0"/>
+                </a:moveTo>
+                <a:lnTo>
+                  <a:pt x="120000" y="0"/>
+                </a:lnTo>
+                <a:lnTo>
+                  <a:pt x="120000" y="120000"/>
+                </a:lnTo>
+                <a:lnTo>
+                  <a:pt x="0" y="120000"/>
+                </a:lnTo>
+                <a:close/>
+              </a:path>
+            </a:pathLst>
+          </a:custGeom>
+        </p:spPr>
+      </p:sp>
+      <p:sp>
+        <p:nvSpPr>
+          <p:cNvPr id="116" name="Google Shape;116;h2935f64077afe61a_19_42:notes"/>
+          <p:cNvSpPr txBox="1"/>
+          <p:nvPr>
+            <p:ph idx="1" type="body"/>
+          </p:nvPr>
+        </p:nvSpPr>
+        <p:spPr>
+          <a:xfrm>
+            <a:off x="685800" y="4343400"/>
+            <a:ext cx="5486400" cy="4114800"/>
+          </a:xfrm>
+          <a:prstGeom prst="rect">
+            <a:avLst/>
+          </a:prstGeom>
+        </p:spPr>
+        <p:txBody>
+          <a:bodyPr anchorCtr="0" anchor="t" bIns="91425" lIns="91425" spcFirstLastPara="1" rIns="91425" wrap="square" tIns="91425">
+            <a:noAutofit/>
+          </a:bodyPr>
+          <a:lstStyle/>
+          <a:p>
+            <a:pPr indent="0" lvl="0" marL="0" rtl="0" algn="l">
+              <a:spcBef>
+                <a:spcPts val="0"/>
+              </a:spcBef>
+              <a:spcAft>
+                <a:spcPts val="0"/>
+              </a:spcAft>
+              <a:buNone/>
+            </a:pPr>
+            <a:r>
+              <a:rPr lang="en"/>
+              <a:t>The area figures come from two synthesis recipes: plain Yosys on the netlist before the final rewrite, and OpenLane's own synthesis of the final RTL; they are not comparable with each other. The clock story is the interesting one. The first post-CTS run gave 11.15 MHz, and the critical path was the 3-wide accumulate issue picker, a 60-deep combinational scan. Rewriting the two prefix operations as balanced trees removed that path without adding a cycle: 19.46 MHz, 1.75x, K1 still 124, every output bit-exact. That number is an extrapolation: the run was constrained at 150 ns and back-computes 51.38 ns from 98.6 ns of slack, and unlike the other two modules grape has no confirmation run near the result. The 50 MHz target is missed 2.6x; the new limiter is the integrate-multiplier operand path.</a:t>
+            </a:r>
+            <a:endParaRPr/>
+          </a:p>
+        </p:txBody>
+      </p:sp>
+    </p:spTree>
+  </p:cSld>
+  <p:clrMapOvr>
+    <a:masterClrMapping/>
+  </p:clrMapOvr>
+</p:notes>
+</file>
+
+<file path=ppt/notesSlides/notesSlide12.xml><?xml version="1.0" encoding="utf-8"?>
+<p:notes xmlns:a="http://schemas.openxmlformats.org/drawingml/2006/main" xmlns:r="http://schemas.openxmlformats.org/officeDocument/2006/relationships" xmlns:mc="http://schemas.openxmlformats.org/markup-compatibility/2006" xmlns:mv="urn:schemas-microsoft-com:mac:vml" xmlns:p="http://schemas.openxmlformats.org/presentationml/2006/main" xmlns:c="http://schemas.openxmlformats.org/drawingml/2006/chart" xmlns:dgm="http://schemas.openxmlformats.org/drawingml/2006/diagram" xmlns:o="urn:schemas-microsoft-com:office:office" xmlns:v="urn:schemas-microsoft-com:vml" xmlns:pvml="urn:schemas-microsoft-com:office:powerpoint" xmlns:com="http://schemas.openxmlformats.org/drawingml/2006/compatibility" xmlns:p14="http://schemas.microsoft.com/office/powerpoint/2010/main" xmlns:p15="http://schemas.microsoft.com/office/powerpoint/2012/main" xmlns:ahyp="http://schemas.microsoft.com/office/drawing/2018/hyperlinkcolor" showMasterPhAnim="0" showMasterSp="0">
+  <p:cSld>
+    <p:spTree>
+      <p:nvGrpSpPr>
+        <p:cNvPr id="121" name="Shape 121"/>
+        <p:cNvGrpSpPr/>
+        <p:nvPr/>
+      </p:nvGrpSpPr>
+      <p:grpSpPr>
+        <a:xfrm>
+          <a:off x="0" y="0"/>
+          <a:ext cx="0" cy="0"/>
+          <a:chOff x="0" y="0"/>
+          <a:chExt cx="0" cy="0"/>
+        </a:xfrm>
+      </p:grpSpPr>
+      <p:sp>
+        <p:nvSpPr>
+          <p:cNvPr id="122" name="Google Shape;122;h2935f64077afe61a_19_52:notes"/>
+          <p:cNvSpPr/>
+          <p:nvPr>
+            <p:ph idx="2" type="sldImg"/>
+          </p:nvPr>
+        </p:nvSpPr>
+        <p:spPr>
+          <a:xfrm>
+            <a:off x="381300" y="685800"/>
+            <a:ext cx="6096000" cy="3429000"/>
+          </a:xfrm>
+          <a:custGeom>
+            <a:rect b="b" l="l" r="r" t="t"/>
+            <a:pathLst>
+              <a:path extrusionOk="0" h="120000" w="120000">
+                <a:moveTo>
+                  <a:pt x="0" y="0"/>
+                </a:moveTo>
+                <a:lnTo>
+                  <a:pt x="120000" y="0"/>
+                </a:lnTo>
+                <a:lnTo>
+                  <a:pt x="120000" y="120000"/>
+                </a:lnTo>
+                <a:lnTo>
+                  <a:pt x="0" y="120000"/>
+                </a:lnTo>
+                <a:close/>
+              </a:path>
+            </a:pathLst>
+          </a:custGeom>
+        </p:spPr>
+      </p:sp>
+      <p:sp>
+        <p:nvSpPr>
+          <p:cNvPr id="123" name="Google Shape;123;h2935f64077afe61a_19_52:notes"/>
+          <p:cNvSpPr txBox="1"/>
+          <p:nvPr>
+            <p:ph idx="1" type="body"/>
+          </p:nvPr>
+        </p:nvSpPr>
+        <p:spPr>
+          <a:xfrm>
+            <a:off x="685800" y="4343400"/>
+            <a:ext cx="5486400" cy="4114800"/>
+          </a:xfrm>
+          <a:prstGeom prst="rect">
+            <a:avLst/>
+          </a:prstGeom>
+        </p:spPr>
+        <p:txBody>
+          <a:bodyPr anchorCtr="0" anchor="t" bIns="91425" lIns="91425" spcFirstLastPara="1" rIns="91425" wrap="square" tIns="91425">
+            <a:noAutofit/>
+          </a:bodyPr>
+          <a:lstStyle/>
+          <a:p>
+            <a:pPr indent="0" lvl="0" marL="0" rtl="0" algn="l">
+              <a:spcBef>
+                <a:spcPts val="0"/>
+              </a:spcBef>
+              <a:spcAft>
+                <a:spcPts val="0"/>
+              </a:spcAft>
+              <a:buNone/>
+            </a:pPr>
+            <a:r>
+              <a:rPr lang="en"/>
+              <a:t>This is the honest result. Compute is 2.48 million measured RTL cycles divided by the 19.46 MHz post-CTS clock, 127.4 ms. We add an assumed 5% Python residual for the harness and the two energy evaluations, 11.6 ms; nobody has measured that residual, and no software has ever called this hardware, so the interface time is unmeasured and can only make the row slower. The projection lands at about 139 ms: 1.66x over the original, a tie with optimized Python at 1.03x, and about 15x slower than the 9.53 ms Rust tier. Per step that is 124 cycles or 6.4 µs against 0.48 µs natively. The cause is the clock, not the interface; the residual alone already exceeds the whole Rust run.</a:t>
+            </a:r>
+            <a:endParaRPr/>
+          </a:p>
+        </p:txBody>
+      </p:sp>
+    </p:spTree>
+  </p:cSld>
+  <p:clrMapOvr>
+    <a:masterClrMapping/>
+  </p:clrMapOvr>
+</p:notes>
+</file>
+
+<file path=ppt/notesSlides/notesSlide13.xml><?xml version="1.0" encoding="utf-8"?>
+<p:notes xmlns:a="http://schemas.openxmlformats.org/drawingml/2006/main" xmlns:r="http://schemas.openxmlformats.org/officeDocument/2006/relationships" xmlns:mc="http://schemas.openxmlformats.org/markup-compatibility/2006" xmlns:mv="urn:schemas-microsoft-com:mac:vml" xmlns:p="http://schemas.openxmlformats.org/presentationml/2006/main" xmlns:c="http://schemas.openxmlformats.org/drawingml/2006/chart" xmlns:dgm="http://schemas.openxmlformats.org/drawingml/2006/diagram" xmlns:o="urn:schemas-microsoft-com:office:office" xmlns:v="urn:schemas-microsoft-com:vml" xmlns:pvml="urn:schemas-microsoft-com:office:powerpoint" xmlns:com="http://schemas.openxmlformats.org/drawingml/2006/compatibility" xmlns:p14="http://schemas.microsoft.com/office/powerpoint/2010/main" xmlns:p15="http://schemas.microsoft.com/office/powerpoint/2012/main" xmlns:ahyp="http://schemas.microsoft.com/office/drawing/2018/hyperlinkcolor" showMasterPhAnim="0" showMasterSp="0">
+  <p:cSld>
+    <p:spTree>
+      <p:nvGrpSpPr>
+        <p:cNvPr id="128" name="Shape 128"/>
+        <p:cNvGrpSpPr/>
+        <p:nvPr/>
+      </p:nvGrpSpPr>
+      <p:grpSpPr>
+        <a:xfrm>
+          <a:off x="0" y="0"/>
+          <a:ext cx="0" cy="0"/>
+          <a:chOff x="0" y="0"/>
+          <a:chExt cx="0" cy="0"/>
+        </a:xfrm>
+      </p:grpSpPr>
+      <p:sp>
+        <p:nvSpPr>
+          <p:cNvPr id="129" name="Google Shape;129;h2935f64077afe61a_19_62:notes"/>
+          <p:cNvSpPr/>
+          <p:nvPr>
+            <p:ph idx="2" type="sldImg"/>
+          </p:nvPr>
+        </p:nvSpPr>
+        <p:spPr>
+          <a:xfrm>
+            <a:off x="381300" y="685800"/>
+            <a:ext cx="6096000" cy="3429000"/>
+          </a:xfrm>
+          <a:custGeom>
+            <a:rect b="b" l="l" r="r" t="t"/>
+            <a:pathLst>
+              <a:path extrusionOk="0" h="120000" w="120000">
+                <a:moveTo>
+                  <a:pt x="0" y="0"/>
+                </a:moveTo>
+                <a:lnTo>
+                  <a:pt x="120000" y="0"/>
+                </a:lnTo>
+                <a:lnTo>
+                  <a:pt x="120000" y="120000"/>
+                </a:lnTo>
+                <a:lnTo>
+                  <a:pt x="0" y="120000"/>
+                </a:lnTo>
+                <a:close/>
+              </a:path>
+            </a:pathLst>
+          </a:custGeom>
+        </p:spPr>
+      </p:sp>
+      <p:sp>
+        <p:nvSpPr>
+          <p:cNvPr id="130" name="Google Shape;130;h2935f64077afe61a_19_62:notes"/>
+          <p:cNvSpPr txBox="1"/>
+          <p:nvPr>
+            <p:ph idx="1" type="body"/>
+          </p:nvPr>
+        </p:nvSpPr>
+        <p:spPr>
+          <a:xfrm>
+            <a:off x="685800" y="4343400"/>
+            <a:ext cx="5486400" cy="4114800"/>
+          </a:xfrm>
+          <a:prstGeom prst="rect">
+            <a:avLst/>
+          </a:prstGeom>
+        </p:spPr>
+        <p:txBody>
+          <a:bodyPr anchorCtr="0" anchor="t" bIns="91425" lIns="91425" spcFirstLastPara="1" rIns="91425" wrap="square" tIns="91425">
+            <a:noAutofit/>
+          </a:bodyPr>
+          <a:lstStyle/>
+          <a:p>
+            <a:pPr indent="0" lvl="0" marL="0" rtl="0" algn="l">
+              <a:spcBef>
+                <a:spcPts val="0"/>
+              </a:spcBef>
+              <a:spcAft>
+                <a:spcPts val="0"/>
+              </a:spcAft>
+              <a:buNone/>
+            </a:pPr>
+            <a:r>
+              <a:rPr lang="en"/>
+              <a:t>Everything on this slide is a projection from the schedule model and the report's numbers; </a:t>
+            </a:r>
+            <a:r>
+              <a:rPr lang="en" u="sng">
+                <a:solidFill>
+                  <a:schemeClr val="hlink"/>
+                </a:solidFill>
+                <a:hlinkClick r:id="rId2"/>
+              </a:rPr>
+              <a:t>derivations.md</a:t>
+            </a:r>
+            <a:r>
+              <a:rPr lang="en"/>
+              <a:t> holds the arithmetic. Clock: the datapath alone matches Rust at about 260 MHz, 13.4 times what post-CTS timing supports; at the 50 MHz target the system would still be 6.42x slower. Width: a fourth multiplier saves 6 cycles per step in the model, 123 to 117, because at N = 5 one pair's 80-cycle chain bounds the step. Host: swapping Python for Rust around the same device trims the residual from 11.6 ms to about 0.48 ms, an 8% change. Only more bodies change the verdict: at N = 100 the model needs 24 adders and 24 multipliers to run 1.6x faster than native, assuming the clock survives the wider issue logic, which our own 1-wide versus 3-wide data says it does not.</a:t>
+            </a:r>
+            <a:endParaRPr/>
+          </a:p>
+        </p:txBody>
+      </p:sp>
+    </p:spTree>
+  </p:cSld>
+  <p:clrMapOvr>
+    <a:masterClrMapping/>
+  </p:clrMapOvr>
+</p:notes>
+</file>
+
 <file path=ppt/notesSlides/notesSlide2.xml><?xml version="1.0" encoding="utf-8"?>
 <p:notes xmlns:a="http://schemas.openxmlformats.org/drawingml/2006/main" xmlns:r="http://schemas.openxmlformats.org/officeDocument/2006/relationships" xmlns:mc="http://schemas.openxmlformats.org/markup-compatibility/2006" xmlns:mv="urn:schemas-microsoft-com:mac:vml" xmlns:p="http://schemas.openxmlformats.org/presentationml/2006/main" xmlns:c="http://schemas.openxmlformats.org/drawingml/2006/chart" xmlns:dgm="http://schemas.openxmlformats.org/drawingml/2006/diagram" xmlns:o="urn:schemas-microsoft-com:office:office" xmlns:v="urn:schemas-microsoft-com:vml" xmlns:pvml="urn:schemas-microsoft-com:office:powerpoint" xmlns:com="http://schemas.openxmlformats.org/drawingml/2006/compatibility" xmlns:p14="http://schemas.microsoft.com/office/powerpoint/2010/main" xmlns:p15="http://schemas.microsoft.com/office/powerpoint/2012/main" xmlns:ahyp="http://schemas.microsoft.com/office/drawing/2018/hyperlinkcolor" showMasterPhAnim="0" showMasterSp="0">
   <p:cSld>
@@ -1199,6 +1620,406 @@
 </p:notes>
 </file>
 
+<file path=ppt/notesSlides/notesSlide6.xml><?xml version="1.0" encoding="utf-8"?>
+<p:notes xmlns:a="http://schemas.openxmlformats.org/drawingml/2006/main" xmlns:r="http://schemas.openxmlformats.org/officeDocument/2006/relationships" xmlns:mc="http://schemas.openxmlformats.org/markup-compatibility/2006" xmlns:mv="urn:schemas-microsoft-com:mac:vml" xmlns:p="http://schemas.openxmlformats.org/presentationml/2006/main" xmlns:c="http://schemas.openxmlformats.org/drawingml/2006/chart" xmlns:dgm="http://schemas.openxmlformats.org/drawingml/2006/diagram" xmlns:o="urn:schemas-microsoft-com:office:office" xmlns:v="urn:schemas-microsoft-com:vml" xmlns:pvml="urn:schemas-microsoft-com:office:powerpoint" xmlns:com="http://schemas.openxmlformats.org/drawingml/2006/compatibility" xmlns:p14="http://schemas.microsoft.com/office/powerpoint/2010/main" xmlns:p15="http://schemas.microsoft.com/office/powerpoint/2012/main" xmlns:ahyp="http://schemas.microsoft.com/office/drawing/2018/hyperlinkcolor" showMasterPhAnim="0" showMasterSp="0">
+  <p:cSld>
+    <p:spTree>
+      <p:nvGrpSpPr>
+        <p:cNvPr id="79" name="Shape 79"/>
+        <p:cNvGrpSpPr/>
+        <p:nvPr/>
+      </p:nvGrpSpPr>
+      <p:grpSpPr>
+        <a:xfrm>
+          <a:off x="0" y="0"/>
+          <a:ext cx="0" cy="0"/>
+          <a:chOff x="0" y="0"/>
+          <a:chExt cx="0" cy="0"/>
+        </a:xfrm>
+      </p:grpSpPr>
+      <p:sp>
+        <p:nvSpPr>
+          <p:cNvPr id="80" name="Google Shape;80;h2935f64077afe61a_19_0:notes"/>
+          <p:cNvSpPr/>
+          <p:nvPr>
+            <p:ph idx="2" type="sldImg"/>
+          </p:nvPr>
+        </p:nvSpPr>
+        <p:spPr>
+          <a:xfrm>
+            <a:off x="381300" y="685800"/>
+            <a:ext cx="6096000" cy="3429000"/>
+          </a:xfrm>
+          <a:custGeom>
+            <a:rect b="b" l="l" r="r" t="t"/>
+            <a:pathLst>
+              <a:path extrusionOk="0" h="120000" w="120000">
+                <a:moveTo>
+                  <a:pt x="0" y="0"/>
+                </a:moveTo>
+                <a:lnTo>
+                  <a:pt x="120000" y="0"/>
+                </a:lnTo>
+                <a:lnTo>
+                  <a:pt x="120000" y="120000"/>
+                </a:lnTo>
+                <a:lnTo>
+                  <a:pt x="0" y="120000"/>
+                </a:lnTo>
+                <a:close/>
+              </a:path>
+            </a:pathLst>
+          </a:custGeom>
+        </p:spPr>
+      </p:sp>
+      <p:sp>
+        <p:nvSpPr>
+          <p:cNvPr id="81" name="Google Shape;81;h2935f64077afe61a_19_0:notes"/>
+          <p:cNvSpPr txBox="1"/>
+          <p:nvPr>
+            <p:ph idx="1" type="body"/>
+          </p:nvPr>
+        </p:nvSpPr>
+        <p:spPr>
+          <a:xfrm>
+            <a:off x="685800" y="4343400"/>
+            <a:ext cx="5486400" cy="4114800"/>
+          </a:xfrm>
+          <a:prstGeom prst="rect">
+            <a:avLst/>
+          </a:prstGeom>
+        </p:spPr>
+        <p:txBody>
+          <a:bodyPr anchorCtr="0" anchor="t" bIns="91425" lIns="91425" spcFirstLastPara="1" rIns="91425" wrap="square" tIns="91425">
+            <a:noAutofit/>
+          </a:bodyPr>
+          <a:lstStyle/>
+          <a:p>
+            <a:pPr indent="0" lvl="0" marL="0" rtl="0" algn="l">
+              <a:spcBef>
+                <a:spcPts val="0"/>
+              </a:spcBef>
+              <a:spcAft>
+                <a:spcPts val="0"/>
+              </a:spcAft>
+              <a:buNone/>
+            </a:pPr>
+            <a:r>
+              <a:rPr lang="en"/>
+              <a:t>Before leaving Python we tried the obvious alternatives, and at ten pairs they lose. A struct-of-arrays layout runs at 0.88x of the original's speed and NumPy at 0.35–0.46x: array setup and per-call overhead exceed the work. Barnes-Hut is 3.92x slower at N = 5 in the VM force sweep, 0.077 against 0.020 ms; it only crosses over near N = 300, which is a backup slide. What wins is leaving the interpreter. The Rust/PyO3 System runs all 20,000 steps and both energy evaluations in one call, 9.530 ± 0.050 ms, bit-identical in state and energy at 5, 10 and 31 bodies. Watch the denominators: 15.25x is against the same file's Python back end under direct pyperf, 145.30 ms; against the pyperformance original of 231.20 ms it is 24.26x. The two ratios must not be multiplied.</a:t>
+            </a:r>
+            <a:endParaRPr/>
+          </a:p>
+        </p:txBody>
+      </p:sp>
+    </p:spTree>
+  </p:cSld>
+  <p:clrMapOvr>
+    <a:masterClrMapping/>
+  </p:clrMapOvr>
+</p:notes>
+</file>
+
+<file path=ppt/notesSlides/notesSlide7.xml><?xml version="1.0" encoding="utf-8"?>
+<p:notes xmlns:a="http://schemas.openxmlformats.org/drawingml/2006/main" xmlns:r="http://schemas.openxmlformats.org/officeDocument/2006/relationships" xmlns:mc="http://schemas.openxmlformats.org/markup-compatibility/2006" xmlns:mv="urn:schemas-microsoft-com:mac:vml" xmlns:p="http://schemas.openxmlformats.org/presentationml/2006/main" xmlns:c="http://schemas.openxmlformats.org/drawingml/2006/chart" xmlns:dgm="http://schemas.openxmlformats.org/drawingml/2006/diagram" xmlns:o="urn:schemas-microsoft-com:office:office" xmlns:v="urn:schemas-microsoft-com:vml" xmlns:pvml="urn:schemas-microsoft-com:office:powerpoint" xmlns:com="http://schemas.openxmlformats.org/drawingml/2006/compatibility" xmlns:p14="http://schemas.microsoft.com/office/powerpoint/2010/main" xmlns:p15="http://schemas.microsoft.com/office/powerpoint/2012/main" xmlns:ahyp="http://schemas.microsoft.com/office/drawing/2018/hyperlinkcolor" showMasterPhAnim="0" showMasterSp="0">
+  <p:cSld>
+    <p:spTree>
+      <p:nvGrpSpPr>
+        <p:cNvPr id="86" name="Shape 86"/>
+        <p:cNvGrpSpPr/>
+        <p:nvPr/>
+      </p:nvGrpSpPr>
+      <p:grpSpPr>
+        <a:xfrm>
+          <a:off x="0" y="0"/>
+          <a:ext cx="0" cy="0"/>
+          <a:chOff x="0" y="0"/>
+          <a:chExt cx="0" cy="0"/>
+        </a:xfrm>
+      </p:grpSpPr>
+      <p:sp>
+        <p:nvSpPr>
+          <p:cNvPr id="87" name="Google Shape;87;h2935f64077afe61a_19_12:notes"/>
+          <p:cNvSpPr/>
+          <p:nvPr>
+            <p:ph idx="2" type="sldImg"/>
+          </p:nvPr>
+        </p:nvSpPr>
+        <p:spPr>
+          <a:xfrm>
+            <a:off x="381300" y="685800"/>
+            <a:ext cx="6096000" cy="3429000"/>
+          </a:xfrm>
+          <a:custGeom>
+            <a:rect b="b" l="l" r="r" t="t"/>
+            <a:pathLst>
+              <a:path extrusionOk="0" h="120000" w="120000">
+                <a:moveTo>
+                  <a:pt x="0" y="0"/>
+                </a:moveTo>
+                <a:lnTo>
+                  <a:pt x="120000" y="0"/>
+                </a:lnTo>
+                <a:lnTo>
+                  <a:pt x="120000" y="120000"/>
+                </a:lnTo>
+                <a:lnTo>
+                  <a:pt x="0" y="120000"/>
+                </a:lnTo>
+                <a:close/>
+              </a:path>
+            </a:pathLst>
+          </a:custGeom>
+        </p:spPr>
+      </p:sp>
+      <p:sp>
+        <p:nvSpPr>
+          <p:cNvPr id="88" name="Google Shape;88;h2935f64077afe61a_19_12:notes"/>
+          <p:cNvSpPr txBox="1"/>
+          <p:nvPr>
+            <p:ph idx="1" type="body"/>
+          </p:nvPr>
+        </p:nvSpPr>
+        <p:spPr>
+          <a:xfrm>
+            <a:off x="685800" y="4343400"/>
+            <a:ext cx="5486400" cy="4114800"/>
+          </a:xfrm>
+          <a:prstGeom prst="rect">
+            <a:avLst/>
+          </a:prstGeom>
+        </p:spPr>
+        <p:txBody>
+          <a:bodyPr anchorCtr="0" anchor="t" bIns="91425" lIns="91425" spcFirstLastPara="1" rIns="91425" wrap="square" tIns="91425">
+            <a:noAutofit/>
+          </a:bodyPr>
+          <a:lstStyle/>
+          <a:p>
+            <a:pPr indent="0" lvl="0" marL="0" rtl="0" algn="l">
+              <a:spcBef>
+                <a:spcPts val="0"/>
+              </a:spcBef>
+              <a:spcAft>
+                <a:spcPts val="0"/>
+              </a:spcAft>
+              <a:buNone/>
+            </a:pPr>
+            <a:r>
+              <a:rPr lang="en"/>
+              <a:t>This is a separate pinned warm-loop experiment, 64 iterations per run, medians of three runs, user-mode counters only. Native retires 26.7x fewer instructions and 14.9x fewer cycles, yet its IPC falls from 3.28 to 1.83. That is not a contradiction: runtime is cycles over clock, and IPC counts retired instructions, not useful force updates. Interpreter bookkeeping pipelines beautifully and is still work. Cache misses are 59.6 against 2.5 per iteration, far too few to matter. So nbody's cost was instruction count from the interpreter, not the memory system and not the pipeline, which is the fact the hardware half has to live with: there is no memory stall for an accelerator to hide.</a:t>
+            </a:r>
+            <a:endParaRPr/>
+          </a:p>
+        </p:txBody>
+      </p:sp>
+    </p:spTree>
+  </p:cSld>
+  <p:clrMapOvr>
+    <a:masterClrMapping/>
+  </p:clrMapOvr>
+</p:notes>
+</file>
+
+<file path=ppt/notesSlides/notesSlide8.xml><?xml version="1.0" encoding="utf-8"?>
+<p:notes xmlns:a="http://schemas.openxmlformats.org/drawingml/2006/main" xmlns:r="http://schemas.openxmlformats.org/officeDocument/2006/relationships" xmlns:mc="http://schemas.openxmlformats.org/markup-compatibility/2006" xmlns:mv="urn:schemas-microsoft-com:mac:vml" xmlns:p="http://schemas.openxmlformats.org/presentationml/2006/main" xmlns:c="http://schemas.openxmlformats.org/drawingml/2006/chart" xmlns:dgm="http://schemas.openxmlformats.org/drawingml/2006/diagram" xmlns:o="urn:schemas-microsoft-com:office:office" xmlns:v="urn:schemas-microsoft-com:vml" xmlns:pvml="urn:schemas-microsoft-com:office:powerpoint" xmlns:com="http://schemas.openxmlformats.org/drawingml/2006/compatibility" xmlns:p14="http://schemas.microsoft.com/office/powerpoint/2010/main" xmlns:p15="http://schemas.microsoft.com/office/powerpoint/2012/main" xmlns:ahyp="http://schemas.microsoft.com/office/drawing/2018/hyperlinkcolor" showMasterPhAnim="0" showMasterSp="0">
+  <p:cSld>
+    <p:spTree>
+      <p:nvGrpSpPr>
+        <p:cNvPr id="93" name="Shape 93"/>
+        <p:cNvGrpSpPr/>
+        <p:nvPr/>
+      </p:nvGrpSpPr>
+      <p:grpSpPr>
+        <a:xfrm>
+          <a:off x="0" y="0"/>
+          <a:ext cx="0" cy="0"/>
+          <a:chOff x="0" y="0"/>
+          <a:chExt cx="0" cy="0"/>
+        </a:xfrm>
+      </p:grpSpPr>
+      <p:sp>
+        <p:nvSpPr>
+          <p:cNvPr id="94" name="Google Shape;94;h2935f64077afe61a_19_20:notes"/>
+          <p:cNvSpPr/>
+          <p:nvPr>
+            <p:ph idx="2" type="sldImg"/>
+          </p:nvPr>
+        </p:nvSpPr>
+        <p:spPr>
+          <a:xfrm>
+            <a:off x="381300" y="685800"/>
+            <a:ext cx="6096000" cy="3429000"/>
+          </a:xfrm>
+          <a:custGeom>
+            <a:rect b="b" l="l" r="r" t="t"/>
+            <a:pathLst>
+              <a:path extrusionOk="0" h="120000" w="120000">
+                <a:moveTo>
+                  <a:pt x="0" y="0"/>
+                </a:moveTo>
+                <a:lnTo>
+                  <a:pt x="120000" y="0"/>
+                </a:lnTo>
+                <a:lnTo>
+                  <a:pt x="120000" y="120000"/>
+                </a:lnTo>
+                <a:lnTo>
+                  <a:pt x="0" y="120000"/>
+                </a:lnTo>
+                <a:close/>
+              </a:path>
+            </a:pathLst>
+          </a:custGeom>
+        </p:spPr>
+      </p:sp>
+      <p:sp>
+        <p:nvSpPr>
+          <p:cNvPr id="95" name="Google Shape;95;h2935f64077afe61a_19_20:notes"/>
+          <p:cNvSpPr txBox="1"/>
+          <p:nvPr>
+            <p:ph idx="1" type="body"/>
+          </p:nvPr>
+        </p:nvSpPr>
+        <p:spPr>
+          <a:xfrm>
+            <a:off x="685800" y="4343400"/>
+            <a:ext cx="5486400" cy="4114800"/>
+          </a:xfrm>
+          <a:prstGeom prst="rect">
+            <a:avLst/>
+          </a:prstGeom>
+        </p:spPr>
+        <p:txBody>
+          <a:bodyPr anchorCtr="0" anchor="t" bIns="91425" lIns="91425" spcFirstLastPara="1" rIns="91425" wrap="square" tIns="91425">
+            <a:noAutofit/>
+          </a:bodyPr>
+          <a:lstStyle/>
+          <a:p>
+            <a:pPr indent="0" lvl="0" marL="0" rtl="0" algn="l">
+              <a:spcBef>
+                <a:spcPts val="0"/>
+              </a:spcBef>
+              <a:spcAft>
+                <a:spcPts val="0"/>
+              </a:spcAft>
+              <a:buNone/>
+            </a:pPr>
+            <a:r>
+              <a:rPr lang="en"/>
+              <a:t>Amdahl first, hardware second. The profile says 95% of the original run is inside advance(), so f = 0.95 and the ceiling for any accelerator is 20x; at the 50 MHz design target the model gives 3.78x, which is why the PRD asked for at least 4x. The boundary follows from the loop shape: 20,000 serial steps over five bodies and ten pairs. If the host called the device once per step, the register traffic would dwarf the arithmetic, so software loads the body state and the pair list, rings one doorbell, and reads the state back after all 20,000 steps. That costs about 150 AXI-Lite transactions per run, under 0.03% of the compute. ADR-0001 therefore chose MMIO only: no DMA, no stream ports, because a few hundred bytes per invocation do not justify a DMA engine and its verification.</a:t>
+            </a:r>
+            <a:endParaRPr/>
+          </a:p>
+        </p:txBody>
+      </p:sp>
+    </p:spTree>
+  </p:cSld>
+  <p:clrMapOvr>
+    <a:masterClrMapping/>
+  </p:clrMapOvr>
+</p:notes>
+</file>
+
+<file path=ppt/notesSlides/notesSlide9.xml><?xml version="1.0" encoding="utf-8"?>
+<p:notes xmlns:a="http://schemas.openxmlformats.org/drawingml/2006/main" xmlns:r="http://schemas.openxmlformats.org/officeDocument/2006/relationships" xmlns:mc="http://schemas.openxmlformats.org/markup-compatibility/2006" xmlns:mv="urn:schemas-microsoft-com:mac:vml" xmlns:p="http://schemas.openxmlformats.org/presentationml/2006/main" xmlns:c="http://schemas.openxmlformats.org/drawingml/2006/chart" xmlns:dgm="http://schemas.openxmlformats.org/drawingml/2006/diagram" xmlns:o="urn:schemas-microsoft-com:office:office" xmlns:v="urn:schemas-microsoft-com:vml" xmlns:pvml="urn:schemas-microsoft-com:office:powerpoint" xmlns:com="http://schemas.openxmlformats.org/drawingml/2006/compatibility" xmlns:p14="http://schemas.microsoft.com/office/powerpoint/2010/main" xmlns:p15="http://schemas.microsoft.com/office/powerpoint/2012/main" xmlns:ahyp="http://schemas.microsoft.com/office/drawing/2018/hyperlinkcolor" showMasterPhAnim="0" showMasterSp="0">
+  <p:cSld>
+    <p:spTree>
+      <p:nvGrpSpPr>
+        <p:cNvPr id="100" name="Shape 100"/>
+        <p:cNvGrpSpPr/>
+        <p:nvPr/>
+      </p:nvGrpSpPr>
+      <p:grpSpPr>
+        <a:xfrm>
+          <a:off x="0" y="0"/>
+          <a:ext cx="0" cy="0"/>
+          <a:chOff x="0" y="0"/>
+          <a:chExt cx="0" cy="0"/>
+        </a:xfrm>
+      </p:grpSpPr>
+      <p:sp>
+        <p:nvSpPr>
+          <p:cNvPr id="101" name="Google Shape;101;h2935f64077afe61a_19_27:notes"/>
+          <p:cNvSpPr/>
+          <p:nvPr>
+            <p:ph idx="2" type="sldImg"/>
+          </p:nvPr>
+        </p:nvSpPr>
+        <p:spPr>
+          <a:xfrm>
+            <a:off x="381300" y="685800"/>
+            <a:ext cx="6096000" cy="3429000"/>
+          </a:xfrm>
+          <a:custGeom>
+            <a:rect b="b" l="l" r="r" t="t"/>
+            <a:pathLst>
+              <a:path extrusionOk="0" h="120000" w="120000">
+                <a:moveTo>
+                  <a:pt x="0" y="0"/>
+                </a:moveTo>
+                <a:lnTo>
+                  <a:pt x="120000" y="0"/>
+                </a:lnTo>
+                <a:lnTo>
+                  <a:pt x="120000" y="120000"/>
+                </a:lnTo>
+                <a:lnTo>
+                  <a:pt x="0" y="120000"/>
+                </a:lnTo>
+                <a:close/>
+              </a:path>
+            </a:pathLst>
+          </a:custGeom>
+        </p:spPr>
+      </p:sp>
+      <p:sp>
+        <p:nvSpPr>
+          <p:cNvPr id="102" name="Google Shape;102;h2935f64077afe61a_19_27:notes"/>
+          <p:cNvSpPr txBox="1"/>
+          <p:nvPr>
+            <p:ph idx="1" type="body"/>
+          </p:nvPr>
+        </p:nvSpPr>
+        <p:spPr>
+          <a:xfrm>
+            <a:off x="685800" y="4343400"/>
+            <a:ext cx="5486400" cy="4114800"/>
+          </a:xfrm>
+          <a:prstGeom prst="rect">
+            <a:avLst/>
+          </a:prstGeom>
+        </p:spPr>
+        <p:txBody>
+          <a:bodyPr anchorCtr="0" anchor="t" bIns="91425" lIns="91425" spcFirstLastPara="1" rIns="91425" wrap="square" tIns="91425">
+            <a:noAutofit/>
+          </a:bodyPr>
+          <a:lstStyle/>
+          <a:p>
+            <a:pPr indent="0" lvl="0" marL="0" rtl="0" algn="l">
+              <a:spcBef>
+                <a:spcPts val="0"/>
+              </a:spcBef>
+              <a:spcAft>
+                <a:spcPts val="0"/>
+              </a:spcAft>
+              <a:buNone/>
+            </a:pPr>
+            <a:r>
+              <a:rPr lang="en"/>
+              <a:t>Inputs and outputs: a 32-bit AXI4-Lite slave with a 12-bit address inside a 4 KB window, plus one interrupt. Through that window software writes FP64 body state as word pairs, DT, a 32-bit NSTEPS, and the pair list; it reads back state, counters and status. The register map is 15 rows. Inside, the datapath is our own FP64 units: three 3-stage adders, three 3-stage multipliers, one radix-4 SRT square root of about 30 cycles and one Newton reciprocal of about 22 cycles. Deliberately no FMA: the Python trajectory rounds after every multiply and every add, and fusing them would break bit-exactness against the emulation model. A step is a fixed 290-operation graph; the cycle model list-scheduled it onto candidate unit mixes and 3 add plus 3 mul was the smallest mix under the 128-cycle budget. Clock target 50 MHz.</a:t>
+            </a:r>
+            <a:endParaRPr/>
+          </a:p>
+        </p:txBody>
+      </p:sp>
+    </p:spTree>
+  </p:cSld>
+  <p:clrMapOvr>
+    <a:masterClrMapping/>
+  </p:clrMapOvr>
+</p:notes>
+</file>
+
 <file path=ppt/slideLayouts/slideLayout1.xml><?xml version="1.0" encoding="utf-8"?>
 <p:sldLayout xmlns:a="http://schemas.openxmlformats.org/drawingml/2006/main" xmlns:r="http://schemas.openxmlformats.org/officeDocument/2006/relationships" xmlns:mc="http://schemas.openxmlformats.org/markup-compatibility/2006" xmlns:mv="urn:schemas-microsoft-com:mac:vml" xmlns:p="http://schemas.openxmlformats.org/presentationml/2006/main" xmlns:c="http://schemas.openxmlformats.org/drawingml/2006/chart" xmlns:dgm="http://schemas.openxmlformats.org/drawingml/2006/diagram" xmlns:o="urn:schemas-microsoft-com:office:office" xmlns:v="urn:schemas-microsoft-com:vml" xmlns:pvml="urn:schemas-microsoft-com:office:powerpoint" xmlns:com="http://schemas.openxmlformats.org/drawingml/2006/compatibility" xmlns:p14="http://schemas.microsoft.com/office/powerpoint/2010/main" xmlns:p15="http://schemas.microsoft.com/office/powerpoint/2012/main" xmlns:ahyp="http://schemas.microsoft.com/office/drawing/2018/hyperlinkcolor" matchingName="Title slide" type="title">
   <p:cSld name="TITLE">
@@ -1606,7 +2427,7 @@
         <p:spPr>
           <a:xfrm>
             <a:off x="365760" y="228600"/>
-            <a:ext cx="8412600" cy="1005900"/>
+            <a:ext cx="8412600" cy="1097400"/>
           </a:xfrm>
           <a:prstGeom prst="rect">
             <a:avLst/>
@@ -1627,9 +2448,9 @@
               <a:buClr>
                 <a:srgbClr val="222222"/>
               </a:buClr>
-              <a:buSzPts val="2600"/>
-              <a:buNone/>
-              <a:defRPr sz="2600">
+              <a:buSzPts val="2200"/>
+              <a:buNone/>
+              <a:defRPr sz="2200">
                 <a:solidFill>
                   <a:srgbClr val="222222"/>
                 </a:solidFill>
@@ -1954,7 +2775,7 @@
         <p:spPr>
           <a:xfrm>
             <a:off x="365760" y="228600"/>
-            <a:ext cx="8412600" cy="1005900"/>
+            <a:ext cx="8412600" cy="1097400"/>
           </a:xfrm>
           <a:prstGeom prst="rect">
             <a:avLst/>
@@ -1975,9 +2796,9 @@
               <a:buClr>
                 <a:srgbClr val="222222"/>
               </a:buClr>
-              <a:buSzPts val="2600"/>
-              <a:buNone/>
-              <a:defRPr sz="2600">
+              <a:buSzPts val="2200"/>
+              <a:buNone/>
+              <a:defRPr sz="2200">
                 <a:solidFill>
                   <a:srgbClr val="222222"/>
                 </a:solidFill>
@@ -2141,8 +2962,8 @@
         </p:nvSpPr>
         <p:spPr>
           <a:xfrm>
-            <a:off x="365760" y="1371600"/>
-            <a:ext cx="8412600" cy="3200400"/>
+            <a:off x="365760" y="1463040"/>
+            <a:ext cx="8412600" cy="3108900"/>
           </a:xfrm>
           <a:prstGeom prst="rect">
             <a:avLst/>
@@ -2439,7 +3260,7 @@
         <p:spPr>
           <a:xfrm>
             <a:off x="365760" y="228600"/>
-            <a:ext cx="8412600" cy="1005900"/>
+            <a:ext cx="8412600" cy="1097400"/>
           </a:xfrm>
           <a:prstGeom prst="rect">
             <a:avLst/>
@@ -2460,9 +3281,9 @@
               <a:buClr>
                 <a:srgbClr val="222222"/>
               </a:buClr>
-              <a:buSzPts val="2600"/>
-              <a:buNone/>
-              <a:defRPr sz="2600">
+              <a:buSzPts val="2200"/>
+              <a:buNone/>
+              <a:defRPr sz="2200">
                 <a:solidFill>
                   <a:srgbClr val="222222"/>
                 </a:solidFill>
@@ -2626,8 +3447,8 @@
         </p:nvSpPr>
         <p:spPr>
           <a:xfrm>
-            <a:off x="365760" y="1371600"/>
-            <a:ext cx="8412600" cy="3200400"/>
+            <a:off x="365760" y="1463040"/>
+            <a:ext cx="8412600" cy="3108900"/>
           </a:xfrm>
           <a:prstGeom prst="rect">
             <a:avLst/>
@@ -2936,7 +3757,7 @@
         <p:spPr>
           <a:xfrm>
             <a:off x="365760" y="228600"/>
-            <a:ext cx="8412600" cy="1005900"/>
+            <a:ext cx="8412600" cy="1097400"/>
           </a:xfrm>
           <a:prstGeom prst="rect">
             <a:avLst/>
@@ -2957,9 +3778,9 @@
               <a:buClr>
                 <a:srgbClr val="222222"/>
               </a:buClr>
-              <a:buSzPts val="2600"/>
-              <a:buNone/>
-              <a:defRPr sz="2600">
+              <a:buSzPts val="2200"/>
+              <a:buNone/>
+              <a:defRPr sz="2200">
                 <a:solidFill>
                   <a:srgbClr val="222222"/>
                 </a:solidFill>
@@ -3123,8 +3944,8 @@
         </p:nvSpPr>
         <p:spPr>
           <a:xfrm>
-            <a:off x="365760" y="1371600"/>
-            <a:ext cx="8412600" cy="3200400"/>
+            <a:off x="365760" y="1463040"/>
+            <a:ext cx="8412600" cy="3108900"/>
           </a:xfrm>
           <a:prstGeom prst="rect">
             <a:avLst/>
@@ -3433,7 +4254,7 @@
         <p:spPr>
           <a:xfrm>
             <a:off x="365760" y="228600"/>
-            <a:ext cx="8412600" cy="1005900"/>
+            <a:ext cx="8412600" cy="1097400"/>
           </a:xfrm>
           <a:prstGeom prst="rect">
             <a:avLst/>
@@ -3454,9 +4275,9 @@
               <a:buClr>
                 <a:srgbClr val="222222"/>
               </a:buClr>
-              <a:buSzPts val="2600"/>
-              <a:buNone/>
-              <a:defRPr sz="2600">
+              <a:buSzPts val="2200"/>
+              <a:buNone/>
+              <a:defRPr sz="2200">
                 <a:solidFill>
                   <a:srgbClr val="222222"/>
                 </a:solidFill>
@@ -3620,8 +4441,8 @@
         </p:nvSpPr>
         <p:spPr>
           <a:xfrm>
-            <a:off x="365760" y="1371600"/>
-            <a:ext cx="8412600" cy="3200400"/>
+            <a:off x="365760" y="1463040"/>
+            <a:ext cx="8412600" cy="3108900"/>
           </a:xfrm>
           <a:prstGeom prst="rect">
             <a:avLst/>
@@ -3930,7 +4751,7 @@
         <p:spPr>
           <a:xfrm>
             <a:off x="365760" y="228600"/>
-            <a:ext cx="8412600" cy="1005900"/>
+            <a:ext cx="8412600" cy="1097400"/>
           </a:xfrm>
           <a:prstGeom prst="rect">
             <a:avLst/>
@@ -3951,9 +4772,9 @@
               <a:buClr>
                 <a:srgbClr val="222222"/>
               </a:buClr>
-              <a:buSzPts val="2600"/>
-              <a:buNone/>
-              <a:defRPr sz="2600">
+              <a:buSzPts val="2200"/>
+              <a:buNone/>
+              <a:defRPr sz="2200">
                 <a:solidFill>
                   <a:srgbClr val="222222"/>
                 </a:solidFill>
@@ -4117,8 +4938,8 @@
         </p:nvSpPr>
         <p:spPr>
           <a:xfrm>
-            <a:off x="365760" y="1371600"/>
-            <a:ext cx="8412600" cy="3200400"/>
+            <a:off x="365760" y="1463040"/>
+            <a:ext cx="8412600" cy="3108900"/>
           </a:xfrm>
           <a:prstGeom prst="rect">
             <a:avLst/>
@@ -6082,6 +6903,3275 @@
 </p:sld>
 </file>
 
+<file path=ppt/slides/slide10.xml><?xml version="1.0" encoding="utf-8"?>
+<p:sld xmlns:a="http://schemas.openxmlformats.org/drawingml/2006/main" xmlns:r="http://schemas.openxmlformats.org/officeDocument/2006/relationships" xmlns:mc="http://schemas.openxmlformats.org/markup-compatibility/2006" xmlns:mv="urn:schemas-microsoft-com:mac:vml" xmlns:p="http://schemas.openxmlformats.org/presentationml/2006/main" xmlns:c="http://schemas.openxmlformats.org/drawingml/2006/chart" xmlns:dgm="http://schemas.openxmlformats.org/drawingml/2006/diagram" xmlns:o="urn:schemas-microsoft-com:office:office" xmlns:v="urn:schemas-microsoft-com:vml" xmlns:pvml="urn:schemas-microsoft-com:office:powerpoint" xmlns:com="http://schemas.openxmlformats.org/drawingml/2006/compatibility" xmlns:p14="http://schemas.microsoft.com/office/powerpoint/2010/main" xmlns:p15="http://schemas.microsoft.com/office/powerpoint/2012/main" xmlns:ahyp="http://schemas.microsoft.com/office/drawing/2018/hyperlinkcolor">
+  <p:cSld>
+    <p:spTree>
+      <p:nvGrpSpPr>
+        <p:cNvPr id="110" name="Shape 110"/>
+        <p:cNvGrpSpPr/>
+        <p:nvPr/>
+      </p:nvGrpSpPr>
+      <p:grpSpPr>
+        <a:xfrm>
+          <a:off x="0" y="0"/>
+          <a:ext cx="0" cy="0"/>
+          <a:chOff x="0" y="0"/>
+          <a:chExt cx="0" cy="0"/>
+        </a:xfrm>
+      </p:grpSpPr>
+      <p:sp>
+        <p:nvSpPr>
+          <p:cNvPr id="111" name="Google Shape;111;p19"/>
+          <p:cNvSpPr txBox="1"/>
+          <p:nvPr>
+            <p:ph type="title"/>
+          </p:nvPr>
+        </p:nvSpPr>
+        <p:spPr>
+          <a:xfrm>
+            <a:off x="365760" y="228600"/>
+            <a:ext cx="8412600" cy="1097400"/>
+          </a:xfrm>
+          <a:prstGeom prst="rect">
+            <a:avLst/>
+          </a:prstGeom>
+        </p:spPr>
+        <p:txBody>
+          <a:bodyPr anchorCtr="0" anchor="t" bIns="91425" lIns="91425" spcFirstLastPara="1" rIns="91425" wrap="square" tIns="91425">
+            <a:noAutofit/>
+          </a:bodyPr>
+          <a:lstStyle/>
+          <a:p>
+            <a:pPr indent="0" lvl="0" marL="0" rtl="0" algn="l">
+              <a:spcBef>
+                <a:spcPts val="0"/>
+              </a:spcBef>
+              <a:spcAft>
+                <a:spcPts val="0"/>
+              </a:spcAft>
+              <a:buNone/>
+            </a:pPr>
+            <a:r>
+              <a:rPr lang="en"/>
+              <a:t>K1 is 124 cycles per step against a budget of 128, found only after the full-shape test exposed 162</a:t>
+            </a:r>
+            <a:endParaRPr/>
+          </a:p>
+        </p:txBody>
+      </p:sp>
+      <p:sp>
+        <p:nvSpPr>
+          <p:cNvPr id="112" name="Google Shape;112;p19"/>
+          <p:cNvSpPr txBox="1"/>
+          <p:nvPr>
+            <p:ph idx="12" type="sldNum"/>
+          </p:nvPr>
+        </p:nvSpPr>
+        <p:spPr>
+          <a:xfrm>
+            <a:off x="7863840" y="4773168"/>
+            <a:ext cx="914400" cy="365700"/>
+          </a:xfrm>
+          <a:prstGeom prst="rect">
+            <a:avLst/>
+          </a:prstGeom>
+        </p:spPr>
+        <p:txBody>
+          <a:bodyPr anchorCtr="0" anchor="ctr" bIns="91425" lIns="91425" spcFirstLastPara="1" rIns="91425" wrap="square" tIns="91425">
+            <a:normAutofit/>
+          </a:bodyPr>
+          <a:lstStyle/>
+          <a:p>
+            <a:pPr indent="0" lvl="0" marL="0" rtl="0" algn="r">
+              <a:spcBef>
+                <a:spcPts val="0"/>
+              </a:spcBef>
+              <a:spcAft>
+                <a:spcPts val="0"/>
+              </a:spcAft>
+              <a:buNone/>
+            </a:pPr>
+            <a:fld id="{00000000-1234-1234-1234-123412341234}" type="slidenum">
+              <a:rPr lang="en"/>
+              <a:t>‹#›</a:t>
+            </a:fld>
+            <a:endParaRPr/>
+          </a:p>
+        </p:txBody>
+      </p:sp>
+      <p:graphicFrame>
+        <p:nvGraphicFramePr>
+          <p:cNvPr id="113" name="Google Shape;113;p19"/>
+          <p:cNvGraphicFramePr/>
+          <p:nvPr/>
+        </p:nvGraphicFramePr>
+        <p:xfrm>
+          <a:off x="365760" y="1463040"/>
+          <a:ext cx="3000000" cy="3000000"/>
+        </p:xfrm>
+        <a:graphic>
+          <a:graphicData uri="http://schemas.openxmlformats.org/drawingml/2006/table">
+            <a:tbl>
+              <a:tblPr>
+                <a:noFill/>
+                <a:tableStyleId>{82F3850C-69AE-44F1-A2F3-003B56526B79}</a:tableStyleId>
+              </a:tblPr>
+              <a:tblGrid>
+                <a:gridCol w="2362200"/>
+                <a:gridCol w="1085850"/>
+                <a:gridCol w="876300"/>
+                <a:gridCol w="1219200"/>
+                <a:gridCol w="2867025"/>
+              </a:tblGrid>
+              <a:tr h="485775">
+                <a:tc>
+                  <a:txBody>
+                    <a:bodyPr/>
+                    <a:lstStyle/>
+                    <a:p>
+                      <a:pPr indent="0" lvl="0" marL="0" rtl="0" algn="l">
+                        <a:spcBef>
+                          <a:spcPts val="0"/>
+                        </a:spcBef>
+                        <a:spcAft>
+                          <a:spcPts val="0"/>
+                        </a:spcAft>
+                        <a:buNone/>
+                      </a:pPr>
+                      <a:r>
+                        <a:rPr b="1" lang="en" sz="1600">
+                          <a:solidFill>
+                            <a:srgbClr val="FFFFFF"/>
+                          </a:solidFill>
+                          <a:latin typeface="Roboto"/>
+                          <a:ea typeface="Roboto"/>
+                          <a:cs typeface="Roboto"/>
+                          <a:sym typeface="Roboto"/>
+                        </a:rPr>
+                        <a:t>Design point</a:t>
+                      </a:r>
+                      <a:endParaRPr b="1" sz="1600">
+                        <a:solidFill>
+                          <a:srgbClr val="FFFFFF"/>
+                        </a:solidFill>
+                        <a:latin typeface="Roboto"/>
+                        <a:ea typeface="Roboto"/>
+                        <a:cs typeface="Roboto"/>
+                        <a:sym typeface="Roboto"/>
+                      </a:endParaRPr>
+                    </a:p>
+                  </a:txBody>
+                  <a:tcPr marT="91425" marB="91425" marR="91425" marL="91425">
+                    <a:solidFill>
+                      <a:srgbClr val="1F4E79"/>
+                    </a:solidFill>
+                  </a:tcPr>
+                </a:tc>
+                <a:tc>
+                  <a:txBody>
+                    <a:bodyPr/>
+                    <a:lstStyle/>
+                    <a:p>
+                      <a:pPr indent="0" lvl="0" marL="0" rtl="0" algn="l">
+                        <a:spcBef>
+                          <a:spcPts val="0"/>
+                        </a:spcBef>
+                        <a:spcAft>
+                          <a:spcPts val="0"/>
+                        </a:spcAft>
+                        <a:buNone/>
+                      </a:pPr>
+                      <a:r>
+                        <a:rPr b="1" lang="en" sz="1600">
+                          <a:solidFill>
+                            <a:srgbClr val="FFFFFF"/>
+                          </a:solidFill>
+                          <a:latin typeface="Roboto"/>
+                          <a:ea typeface="Roboto"/>
+                          <a:cs typeface="Roboto"/>
+                          <a:sym typeface="Roboto"/>
+                        </a:rPr>
+                        <a:t>Cells (Yosys)</a:t>
+                      </a:r>
+                      <a:endParaRPr b="1" sz="1600">
+                        <a:solidFill>
+                          <a:srgbClr val="FFFFFF"/>
+                        </a:solidFill>
+                        <a:latin typeface="Roboto"/>
+                        <a:ea typeface="Roboto"/>
+                        <a:cs typeface="Roboto"/>
+                        <a:sym typeface="Roboto"/>
+                      </a:endParaRPr>
+                    </a:p>
+                  </a:txBody>
+                  <a:tcPr marT="91425" marB="91425" marR="91425" marL="91425">
+                    <a:solidFill>
+                      <a:srgbClr val="1F4E79"/>
+                    </a:solidFill>
+                  </a:tcPr>
+                </a:tc>
+                <a:tc>
+                  <a:txBody>
+                    <a:bodyPr/>
+                    <a:lstStyle/>
+                    <a:p>
+                      <a:pPr indent="0" lvl="0" marL="0" rtl="0" algn="l">
+                        <a:spcBef>
+                          <a:spcPts val="0"/>
+                        </a:spcBef>
+                        <a:spcAft>
+                          <a:spcPts val="0"/>
+                        </a:spcAft>
+                        <a:buNone/>
+                      </a:pPr>
+                      <a:r>
+                        <a:rPr b="1" lang="en" sz="1600">
+                          <a:solidFill>
+                            <a:srgbClr val="FFFFFF"/>
+                          </a:solidFill>
+                          <a:latin typeface="Roboto"/>
+                          <a:ea typeface="Roboto"/>
+                          <a:cs typeface="Roboto"/>
+                          <a:sym typeface="Roboto"/>
+                        </a:rPr>
+                        <a:t>Area</a:t>
+                      </a:r>
+                      <a:endParaRPr b="1" sz="1600">
+                        <a:solidFill>
+                          <a:srgbClr val="FFFFFF"/>
+                        </a:solidFill>
+                        <a:latin typeface="Roboto"/>
+                        <a:ea typeface="Roboto"/>
+                        <a:cs typeface="Roboto"/>
+                        <a:sym typeface="Roboto"/>
+                      </a:endParaRPr>
+                    </a:p>
+                  </a:txBody>
+                  <a:tcPr marT="91425" marB="91425" marR="91425" marL="91425">
+                    <a:solidFill>
+                      <a:srgbClr val="1F4E79"/>
+                    </a:solidFill>
+                  </a:tcPr>
+                </a:tc>
+                <a:tc>
+                  <a:txBody>
+                    <a:bodyPr/>
+                    <a:lstStyle/>
+                    <a:p>
+                      <a:pPr indent="0" lvl="0" marL="0" rtl="0" algn="l">
+                        <a:spcBef>
+                          <a:spcPts val="0"/>
+                        </a:spcBef>
+                        <a:spcAft>
+                          <a:spcPts val="0"/>
+                        </a:spcAft>
+                        <a:buNone/>
+                      </a:pPr>
+                      <a:r>
+                        <a:rPr b="1" lang="en" sz="1600">
+                          <a:solidFill>
+                            <a:srgbClr val="FFFFFF"/>
+                          </a:solidFill>
+                          <a:latin typeface="Roboto"/>
+                          <a:ea typeface="Roboto"/>
+                          <a:cs typeface="Roboto"/>
+                          <a:sym typeface="Roboto"/>
+                        </a:rPr>
+                        <a:t>K1 cycles/step</a:t>
+                      </a:r>
+                      <a:endParaRPr b="1" sz="1600">
+                        <a:solidFill>
+                          <a:srgbClr val="FFFFFF"/>
+                        </a:solidFill>
+                        <a:latin typeface="Roboto"/>
+                        <a:ea typeface="Roboto"/>
+                        <a:cs typeface="Roboto"/>
+                        <a:sym typeface="Roboto"/>
+                      </a:endParaRPr>
+                    </a:p>
+                  </a:txBody>
+                  <a:tcPr marT="91425" marB="91425" marR="91425" marL="91425">
+                    <a:solidFill>
+                      <a:srgbClr val="1F4E79"/>
+                    </a:solidFill>
+                  </a:tcPr>
+                </a:tc>
+                <a:tc>
+                  <a:txBody>
+                    <a:bodyPr/>
+                    <a:lstStyle/>
+                    <a:p>
+                      <a:pPr indent="0" lvl="0" marL="0" rtl="0" algn="l">
+                        <a:spcBef>
+                          <a:spcPts val="0"/>
+                        </a:spcBef>
+                        <a:spcAft>
+                          <a:spcPts val="0"/>
+                        </a:spcAft>
+                        <a:buNone/>
+                      </a:pPr>
+                      <a:r>
+                        <a:rPr b="1" lang="en" sz="1600">
+                          <a:solidFill>
+                            <a:srgbClr val="FFFFFF"/>
+                          </a:solidFill>
+                          <a:latin typeface="Roboto"/>
+                          <a:ea typeface="Roboto"/>
+                          <a:cs typeface="Roboto"/>
+                          <a:sym typeface="Roboto"/>
+                        </a:rPr>
+                        <a:t>Verdict</a:t>
+                      </a:r>
+                      <a:endParaRPr b="1" sz="1600">
+                        <a:solidFill>
+                          <a:srgbClr val="FFFFFF"/>
+                        </a:solidFill>
+                        <a:latin typeface="Roboto"/>
+                        <a:ea typeface="Roboto"/>
+                        <a:cs typeface="Roboto"/>
+                        <a:sym typeface="Roboto"/>
+                      </a:endParaRPr>
+                    </a:p>
+                  </a:txBody>
+                  <a:tcPr marT="91425" marB="91425" marR="91425" marL="91425">
+                    <a:solidFill>
+                      <a:srgbClr val="1F4E79"/>
+                    </a:solidFill>
+                  </a:tcPr>
+                </a:tc>
+              </a:tr>
+              <a:tr h="485775">
+                <a:tc>
+                  <a:txBody>
+                    <a:bodyPr/>
+                    <a:lstStyle/>
+                    <a:p>
+                      <a:pPr indent="0" lvl="0" marL="0" rtl="0" algn="l">
+                        <a:spcBef>
+                          <a:spcPts val="0"/>
+                        </a:spcBef>
+                        <a:spcAft>
+                          <a:spcPts val="0"/>
+                        </a:spcAft>
+                        <a:buNone/>
+                      </a:pPr>
+                      <a:r>
+                        <a:rPr lang="en" sz="1600">
+                          <a:latin typeface="Roboto"/>
+                          <a:ea typeface="Roboto"/>
+                          <a:cs typeface="Roboto"/>
+                          <a:sym typeface="Roboto"/>
+                        </a:rPr>
+                        <a:t>1-wide accumulate, 1-port RF</a:t>
+                      </a:r>
+                      <a:endParaRPr sz="1600">
+                        <a:latin typeface="Roboto"/>
+                        <a:ea typeface="Roboto"/>
+                        <a:cs typeface="Roboto"/>
+                        <a:sym typeface="Roboto"/>
+                      </a:endParaRPr>
+                    </a:p>
+                  </a:txBody>
+                  <a:tcPr marT="91425" marB="91425" marR="91425" marL="91425"/>
+                </a:tc>
+                <a:tc>
+                  <a:txBody>
+                    <a:bodyPr/>
+                    <a:lstStyle/>
+                    <a:p>
+                      <a:pPr indent="0" lvl="0" marL="0" rtl="0" algn="l">
+                        <a:spcBef>
+                          <a:spcPts val="0"/>
+                        </a:spcBef>
+                        <a:spcAft>
+                          <a:spcPts val="0"/>
+                        </a:spcAft>
+                        <a:buNone/>
+                      </a:pPr>
+                      <a:r>
+                        <a:rPr lang="en" sz="1600">
+                          <a:latin typeface="Roboto"/>
+                          <a:ea typeface="Roboto"/>
+                          <a:cs typeface="Roboto"/>
+                          <a:sym typeface="Roboto"/>
+                        </a:rPr>
+                        <a:t>393,367</a:t>
+                      </a:r>
+                      <a:endParaRPr sz="1600">
+                        <a:latin typeface="Roboto"/>
+                        <a:ea typeface="Roboto"/>
+                        <a:cs typeface="Roboto"/>
+                        <a:sym typeface="Roboto"/>
+                      </a:endParaRPr>
+                    </a:p>
+                  </a:txBody>
+                  <a:tcPr marT="91425" marB="91425" marR="91425" marL="91425"/>
+                </a:tc>
+                <a:tc>
+                  <a:txBody>
+                    <a:bodyPr/>
+                    <a:lstStyle/>
+                    <a:p>
+                      <a:pPr indent="0" lvl="0" marL="0" rtl="0" algn="l">
+                        <a:spcBef>
+                          <a:spcPts val="0"/>
+                        </a:spcBef>
+                        <a:spcAft>
+                          <a:spcPts val="0"/>
+                        </a:spcAft>
+                        <a:buNone/>
+                      </a:pPr>
+                      <a:r>
+                        <a:rPr lang="en" sz="1600">
+                          <a:latin typeface="Roboto"/>
+                          <a:ea typeface="Roboto"/>
+                          <a:cs typeface="Roboto"/>
+                          <a:sym typeface="Roboto"/>
+                        </a:rPr>
+                        <a:t>2.938 mm²</a:t>
+                      </a:r>
+                      <a:endParaRPr sz="1600">
+                        <a:latin typeface="Roboto"/>
+                        <a:ea typeface="Roboto"/>
+                        <a:cs typeface="Roboto"/>
+                        <a:sym typeface="Roboto"/>
+                      </a:endParaRPr>
+                    </a:p>
+                  </a:txBody>
+                  <a:tcPr marT="91425" marB="91425" marR="91425" marL="91425"/>
+                </a:tc>
+                <a:tc>
+                  <a:txBody>
+                    <a:bodyPr/>
+                    <a:lstStyle/>
+                    <a:p>
+                      <a:pPr indent="0" lvl="0" marL="0" rtl="0" algn="l">
+                        <a:spcBef>
+                          <a:spcPts val="0"/>
+                        </a:spcBef>
+                        <a:spcAft>
+                          <a:spcPts val="0"/>
+                        </a:spcAft>
+                        <a:buNone/>
+                      </a:pPr>
+                      <a:r>
+                        <a:rPr lang="en" sz="1600">
+                          <a:latin typeface="Roboto"/>
+                          <a:ea typeface="Roboto"/>
+                          <a:cs typeface="Roboto"/>
+                          <a:sym typeface="Roboto"/>
+                        </a:rPr>
+                        <a:t>162</a:t>
+                      </a:r>
+                      <a:endParaRPr sz="1600">
+                        <a:latin typeface="Roboto"/>
+                        <a:ea typeface="Roboto"/>
+                        <a:cs typeface="Roboto"/>
+                        <a:sym typeface="Roboto"/>
+                      </a:endParaRPr>
+                    </a:p>
+                  </a:txBody>
+                  <a:tcPr marT="91425" marB="91425" marR="91425" marL="91425"/>
+                </a:tc>
+                <a:tc>
+                  <a:txBody>
+                    <a:bodyPr/>
+                    <a:lstStyle/>
+                    <a:p>
+                      <a:pPr indent="0" lvl="0" marL="0" rtl="0" algn="l">
+                        <a:spcBef>
+                          <a:spcPts val="0"/>
+                        </a:spcBef>
+                        <a:spcAft>
+                          <a:spcPts val="0"/>
+                        </a:spcAft>
+                        <a:buNone/>
+                      </a:pPr>
+                      <a:r>
+                        <a:rPr lang="en" sz="1600">
+                          <a:latin typeface="Roboto"/>
+                          <a:ea typeface="Roboto"/>
+                          <a:cs typeface="Roboto"/>
+                          <a:sym typeface="Roboto"/>
+                        </a:rPr>
+                        <a:t>fails K1 ≤ 128</a:t>
+                      </a:r>
+                      <a:endParaRPr sz="1600">
+                        <a:latin typeface="Roboto"/>
+                        <a:ea typeface="Roboto"/>
+                        <a:cs typeface="Roboto"/>
+                        <a:sym typeface="Roboto"/>
+                      </a:endParaRPr>
+                    </a:p>
+                  </a:txBody>
+                  <a:tcPr marT="91425" marB="91425" marR="91425" marL="91425"/>
+                </a:tc>
+              </a:tr>
+              <a:tr h="485775">
+                <a:tc>
+                  <a:txBody>
+                    <a:bodyPr/>
+                    <a:lstStyle/>
+                    <a:p>
+                      <a:pPr indent="0" lvl="0" marL="0" rtl="0" algn="l">
+                        <a:spcBef>
+                          <a:spcPts val="0"/>
+                        </a:spcBef>
+                        <a:spcAft>
+                          <a:spcPts val="0"/>
+                        </a:spcAft>
+                        <a:buNone/>
+                      </a:pPr>
+                      <a:r>
+                        <a:rPr lang="en" sz="1600">
+                          <a:latin typeface="Roboto"/>
+                          <a:ea typeface="Roboto"/>
+                          <a:cs typeface="Roboto"/>
+                          <a:sym typeface="Roboto"/>
+                        </a:rPr>
+                        <a:t>3-wide accumulate, 3-port RF</a:t>
+                      </a:r>
+                      <a:endParaRPr sz="1600">
+                        <a:latin typeface="Roboto"/>
+                        <a:ea typeface="Roboto"/>
+                        <a:cs typeface="Roboto"/>
+                        <a:sym typeface="Roboto"/>
+                      </a:endParaRPr>
+                    </a:p>
+                  </a:txBody>
+                  <a:tcPr marT="91425" marB="91425" marR="91425" marL="91425"/>
+                </a:tc>
+                <a:tc>
+                  <a:txBody>
+                    <a:bodyPr/>
+                    <a:lstStyle/>
+                    <a:p>
+                      <a:pPr indent="0" lvl="0" marL="0" rtl="0" algn="l">
+                        <a:spcBef>
+                          <a:spcPts val="0"/>
+                        </a:spcBef>
+                        <a:spcAft>
+                          <a:spcPts val="0"/>
+                        </a:spcAft>
+                        <a:buNone/>
+                      </a:pPr>
+                      <a:r>
+                        <a:rPr lang="en" sz="1600">
+                          <a:latin typeface="Roboto"/>
+                          <a:ea typeface="Roboto"/>
+                          <a:cs typeface="Roboto"/>
+                          <a:sym typeface="Roboto"/>
+                        </a:rPr>
+                        <a:t>584,454</a:t>
+                      </a:r>
+                      <a:endParaRPr sz="1600">
+                        <a:latin typeface="Roboto"/>
+                        <a:ea typeface="Roboto"/>
+                        <a:cs typeface="Roboto"/>
+                        <a:sym typeface="Roboto"/>
+                      </a:endParaRPr>
+                    </a:p>
+                  </a:txBody>
+                  <a:tcPr marT="91425" marB="91425" marR="91425" marL="91425"/>
+                </a:tc>
+                <a:tc>
+                  <a:txBody>
+                    <a:bodyPr/>
+                    <a:lstStyle/>
+                    <a:p>
+                      <a:pPr indent="0" lvl="0" marL="0" rtl="0" algn="l">
+                        <a:spcBef>
+                          <a:spcPts val="0"/>
+                        </a:spcBef>
+                        <a:spcAft>
+                          <a:spcPts val="0"/>
+                        </a:spcAft>
+                        <a:buNone/>
+                      </a:pPr>
+                      <a:r>
+                        <a:rPr lang="en" sz="1600">
+                          <a:latin typeface="Roboto"/>
+                          <a:ea typeface="Roboto"/>
+                          <a:cs typeface="Roboto"/>
+                          <a:sym typeface="Roboto"/>
+                        </a:rPr>
+                        <a:t>4.075 mm²</a:t>
+                      </a:r>
+                      <a:endParaRPr sz="1600">
+                        <a:latin typeface="Roboto"/>
+                        <a:ea typeface="Roboto"/>
+                        <a:cs typeface="Roboto"/>
+                        <a:sym typeface="Roboto"/>
+                      </a:endParaRPr>
+                    </a:p>
+                  </a:txBody>
+                  <a:tcPr marT="91425" marB="91425" marR="91425" marL="91425"/>
+                </a:tc>
+                <a:tc>
+                  <a:txBody>
+                    <a:bodyPr/>
+                    <a:lstStyle/>
+                    <a:p>
+                      <a:pPr indent="0" lvl="0" marL="0" rtl="0" algn="l">
+                        <a:spcBef>
+                          <a:spcPts val="0"/>
+                        </a:spcBef>
+                        <a:spcAft>
+                          <a:spcPts val="0"/>
+                        </a:spcAft>
+                        <a:buNone/>
+                      </a:pPr>
+                      <a:r>
+                        <a:rPr lang="en" sz="1600">
+                          <a:latin typeface="Roboto"/>
+                          <a:ea typeface="Roboto"/>
+                          <a:cs typeface="Roboto"/>
+                          <a:sym typeface="Roboto"/>
+                        </a:rPr>
+                        <a:t>124</a:t>
+                      </a:r>
+                      <a:endParaRPr sz="1600">
+                        <a:latin typeface="Roboto"/>
+                        <a:ea typeface="Roboto"/>
+                        <a:cs typeface="Roboto"/>
+                        <a:sym typeface="Roboto"/>
+                      </a:endParaRPr>
+                    </a:p>
+                  </a:txBody>
+                  <a:tcPr marT="91425" marB="91425" marR="91425" marL="91425"/>
+                </a:tc>
+                <a:tc>
+                  <a:txBody>
+                    <a:bodyPr/>
+                    <a:lstStyle/>
+                    <a:p>
+                      <a:pPr indent="0" lvl="0" marL="0" rtl="0" algn="l">
+                        <a:spcBef>
+                          <a:spcPts val="0"/>
+                        </a:spcBef>
+                        <a:spcAft>
+                          <a:spcPts val="0"/>
+                        </a:spcAft>
+                        <a:buNone/>
+                      </a:pPr>
+                      <a:r>
+                        <a:rPr lang="en" sz="1600">
+                          <a:latin typeface="Roboto"/>
+                          <a:ea typeface="Roboto"/>
+                          <a:cs typeface="Roboto"/>
+                          <a:sym typeface="Roboto"/>
+                        </a:rPr>
+                        <a:t>chosen: +38.7% area, −23.5% cycles</a:t>
+                      </a:r>
+                      <a:endParaRPr sz="1600">
+                        <a:latin typeface="Roboto"/>
+                        <a:ea typeface="Roboto"/>
+                        <a:cs typeface="Roboto"/>
+                        <a:sym typeface="Roboto"/>
+                      </a:endParaRPr>
+                    </a:p>
+                  </a:txBody>
+                  <a:tcPr marT="91425" marB="91425" marR="91425" marL="91425"/>
+                </a:tc>
+              </a:tr>
+            </a:tbl>
+          </a:graphicData>
+        </a:graphic>
+      </p:graphicFrame>
+    </p:spTree>
+  </p:cSld>
+  <p:clrMapOvr>
+    <a:masterClrMapping/>
+  </p:clrMapOvr>
+</p:sld>
+</file>
+
+<file path=ppt/slides/slide11.xml><?xml version="1.0" encoding="utf-8"?>
+<p:sld xmlns:a="http://schemas.openxmlformats.org/drawingml/2006/main" xmlns:r="http://schemas.openxmlformats.org/officeDocument/2006/relationships" xmlns:mc="http://schemas.openxmlformats.org/markup-compatibility/2006" xmlns:mv="urn:schemas-microsoft-com:mac:vml" xmlns:p="http://schemas.openxmlformats.org/presentationml/2006/main" xmlns:c="http://schemas.openxmlformats.org/drawingml/2006/chart" xmlns:dgm="http://schemas.openxmlformats.org/drawingml/2006/diagram" xmlns:o="urn:schemas-microsoft-com:office:office" xmlns:v="urn:schemas-microsoft-com:vml" xmlns:pvml="urn:schemas-microsoft-com:office:powerpoint" xmlns:com="http://schemas.openxmlformats.org/drawingml/2006/compatibility" xmlns:p14="http://schemas.microsoft.com/office/powerpoint/2010/main" xmlns:p15="http://schemas.microsoft.com/office/powerpoint/2012/main" xmlns:ahyp="http://schemas.microsoft.com/office/drawing/2018/hyperlinkcolor">
+  <p:cSld>
+    <p:spTree>
+      <p:nvGrpSpPr>
+        <p:cNvPr id="117" name="Shape 117"/>
+        <p:cNvGrpSpPr/>
+        <p:nvPr/>
+      </p:nvGrpSpPr>
+      <p:grpSpPr>
+        <a:xfrm>
+          <a:off x="0" y="0"/>
+          <a:ext cx="0" cy="0"/>
+          <a:chOff x="0" y="0"/>
+          <a:chExt cx="0" cy="0"/>
+        </a:xfrm>
+      </p:grpSpPr>
+      <p:sp>
+        <p:nvSpPr>
+          <p:cNvPr id="118" name="Google Shape;118;p20"/>
+          <p:cNvSpPr txBox="1"/>
+          <p:nvPr>
+            <p:ph type="title"/>
+          </p:nvPr>
+        </p:nvSpPr>
+        <p:spPr>
+          <a:xfrm>
+            <a:off x="365760" y="228600"/>
+            <a:ext cx="8412600" cy="1097400"/>
+          </a:xfrm>
+          <a:prstGeom prst="rect">
+            <a:avLst/>
+          </a:prstGeom>
+        </p:spPr>
+        <p:txBody>
+          <a:bodyPr anchorCtr="0" anchor="t" bIns="91425" lIns="91425" spcFirstLastPara="1" rIns="91425" wrap="square" tIns="91425">
+            <a:noAutofit/>
+          </a:bodyPr>
+          <a:lstStyle/>
+          <a:p>
+            <a:pPr indent="0" lvl="0" marL="0" rtl="0" algn="l">
+              <a:spcBef>
+                <a:spcPts val="0"/>
+              </a:spcBef>
+              <a:spcAft>
+                <a:spcPts val="0"/>
+              </a:spcAft>
+              <a:buNone/>
+            </a:pPr>
+            <a:r>
+              <a:rPr lang="en"/>
+              <a:t>Post-CTS timing gives 19.46 MHz against a 50 MHz target; the accumulate picker set the clock and a parallel-prefix rewrite bought 1.75x</a:t>
+            </a:r>
+            <a:endParaRPr/>
+          </a:p>
+        </p:txBody>
+      </p:sp>
+      <p:sp>
+        <p:nvSpPr>
+          <p:cNvPr id="119" name="Google Shape;119;p20"/>
+          <p:cNvSpPr txBox="1"/>
+          <p:nvPr>
+            <p:ph idx="12" type="sldNum"/>
+          </p:nvPr>
+        </p:nvSpPr>
+        <p:spPr>
+          <a:xfrm>
+            <a:off x="7863840" y="4773168"/>
+            <a:ext cx="914400" cy="365700"/>
+          </a:xfrm>
+          <a:prstGeom prst="rect">
+            <a:avLst/>
+          </a:prstGeom>
+        </p:spPr>
+        <p:txBody>
+          <a:bodyPr anchorCtr="0" anchor="ctr" bIns="91425" lIns="91425" spcFirstLastPara="1" rIns="91425" wrap="square" tIns="91425">
+            <a:normAutofit/>
+          </a:bodyPr>
+          <a:lstStyle/>
+          <a:p>
+            <a:pPr indent="0" lvl="0" marL="0" rtl="0" algn="r">
+              <a:spcBef>
+                <a:spcPts val="0"/>
+              </a:spcBef>
+              <a:spcAft>
+                <a:spcPts val="0"/>
+              </a:spcAft>
+              <a:buNone/>
+            </a:pPr>
+            <a:fld id="{00000000-1234-1234-1234-123412341234}" type="slidenum">
+              <a:rPr lang="en"/>
+              <a:t>‹#›</a:t>
+            </a:fld>
+            <a:endParaRPr/>
+          </a:p>
+        </p:txBody>
+      </p:sp>
+      <p:graphicFrame>
+        <p:nvGraphicFramePr>
+          <p:cNvPr id="120" name="Google Shape;120;p20"/>
+          <p:cNvGraphicFramePr/>
+          <p:nvPr/>
+        </p:nvGraphicFramePr>
+        <p:xfrm>
+          <a:off x="365760" y="1463040"/>
+          <a:ext cx="3000000" cy="3000000"/>
+        </p:xfrm>
+        <a:graphic>
+          <a:graphicData uri="http://schemas.openxmlformats.org/drawingml/2006/table">
+            <a:tbl>
+              <a:tblPr>
+                <a:noFill/>
+                <a:tableStyleId>{82F3850C-69AE-44F1-A2F3-003B56526B79}</a:tableStyleId>
+              </a:tblPr>
+              <a:tblGrid>
+                <a:gridCol w="2619375"/>
+                <a:gridCol w="2466975"/>
+                <a:gridCol w="3324225"/>
+              </a:tblGrid>
+              <a:tr h="257175">
+                <a:tc>
+                  <a:txBody>
+                    <a:bodyPr/>
+                    <a:lstStyle/>
+                    <a:p>
+                      <a:pPr indent="0" lvl="0" marL="0" rtl="0" algn="l">
+                        <a:spcBef>
+                          <a:spcPts val="0"/>
+                        </a:spcBef>
+                        <a:spcAft>
+                          <a:spcPts val="0"/>
+                        </a:spcAft>
+                        <a:buNone/>
+                      </a:pPr>
+                      <a:r>
+                        <a:rPr b="1" lang="en" sz="1600">
+                          <a:solidFill>
+                            <a:srgbClr val="FFFFFF"/>
+                          </a:solidFill>
+                          <a:latin typeface="Roboto"/>
+                          <a:ea typeface="Roboto"/>
+                          <a:cs typeface="Roboto"/>
+                          <a:sym typeface="Roboto"/>
+                        </a:rPr>
+                        <a:t>Metric</a:t>
+                      </a:r>
+                      <a:endParaRPr b="1" sz="1600">
+                        <a:solidFill>
+                          <a:srgbClr val="FFFFFF"/>
+                        </a:solidFill>
+                        <a:latin typeface="Roboto"/>
+                        <a:ea typeface="Roboto"/>
+                        <a:cs typeface="Roboto"/>
+                        <a:sym typeface="Roboto"/>
+                      </a:endParaRPr>
+                    </a:p>
+                  </a:txBody>
+                  <a:tcPr marT="91425" marB="91425" marR="91425" marL="91425">
+                    <a:solidFill>
+                      <a:srgbClr val="1F4E79"/>
+                    </a:solidFill>
+                  </a:tcPr>
+                </a:tc>
+                <a:tc>
+                  <a:txBody>
+                    <a:bodyPr/>
+                    <a:lstStyle/>
+                    <a:p>
+                      <a:pPr indent="0" lvl="0" marL="0" rtl="0" algn="l">
+                        <a:spcBef>
+                          <a:spcPts val="0"/>
+                        </a:spcBef>
+                        <a:spcAft>
+                          <a:spcPts val="0"/>
+                        </a:spcAft>
+                        <a:buNone/>
+                      </a:pPr>
+                      <a:r>
+                        <a:rPr b="1" lang="en" sz="1600">
+                          <a:solidFill>
+                            <a:srgbClr val="FFFFFF"/>
+                          </a:solidFill>
+                          <a:latin typeface="Roboto"/>
+                          <a:ea typeface="Roboto"/>
+                          <a:cs typeface="Roboto"/>
+                          <a:sym typeface="Roboto"/>
+                        </a:rPr>
+                        <a:t>Value</a:t>
+                      </a:r>
+                      <a:endParaRPr b="1" sz="1600">
+                        <a:solidFill>
+                          <a:srgbClr val="FFFFFF"/>
+                        </a:solidFill>
+                        <a:latin typeface="Roboto"/>
+                        <a:ea typeface="Roboto"/>
+                        <a:cs typeface="Roboto"/>
+                        <a:sym typeface="Roboto"/>
+                      </a:endParaRPr>
+                    </a:p>
+                  </a:txBody>
+                  <a:tcPr marT="91425" marB="91425" marR="91425" marL="91425">
+                    <a:solidFill>
+                      <a:srgbClr val="1F4E79"/>
+                    </a:solidFill>
+                  </a:tcPr>
+                </a:tc>
+                <a:tc>
+                  <a:txBody>
+                    <a:bodyPr/>
+                    <a:lstStyle/>
+                    <a:p>
+                      <a:pPr indent="0" lvl="0" marL="0" rtl="0" algn="l">
+                        <a:spcBef>
+                          <a:spcPts val="0"/>
+                        </a:spcBef>
+                        <a:spcAft>
+                          <a:spcPts val="0"/>
+                        </a:spcAft>
+                        <a:buNone/>
+                      </a:pPr>
+                      <a:r>
+                        <a:rPr b="1" lang="en" sz="1600">
+                          <a:solidFill>
+                            <a:srgbClr val="FFFFFF"/>
+                          </a:solidFill>
+                          <a:latin typeface="Roboto"/>
+                          <a:ea typeface="Roboto"/>
+                          <a:cs typeface="Roboto"/>
+                          <a:sym typeface="Roboto"/>
+                        </a:rPr>
+                        <a:t>Evidence level</a:t>
+                      </a:r>
+                      <a:endParaRPr b="1" sz="1600">
+                        <a:solidFill>
+                          <a:srgbClr val="FFFFFF"/>
+                        </a:solidFill>
+                        <a:latin typeface="Roboto"/>
+                        <a:ea typeface="Roboto"/>
+                        <a:cs typeface="Roboto"/>
+                        <a:sym typeface="Roboto"/>
+                      </a:endParaRPr>
+                    </a:p>
+                  </a:txBody>
+                  <a:tcPr marT="91425" marB="91425" marR="91425" marL="91425">
+                    <a:solidFill>
+                      <a:srgbClr val="1F4E79"/>
+                    </a:solidFill>
+                  </a:tcPr>
+                </a:tc>
+              </a:tr>
+              <a:tr h="228600">
+                <a:tc>
+                  <a:txBody>
+                    <a:bodyPr/>
+                    <a:lstStyle/>
+                    <a:p>
+                      <a:pPr indent="0" lvl="0" marL="0" rtl="0" algn="l">
+                        <a:spcBef>
+                          <a:spcPts val="0"/>
+                        </a:spcBef>
+                        <a:spcAft>
+                          <a:spcPts val="0"/>
+                        </a:spcAft>
+                        <a:buNone/>
+                      </a:pPr>
+                      <a:r>
+                        <a:rPr lang="en">
+                          <a:latin typeface="Roboto"/>
+                          <a:ea typeface="Roboto"/>
+                          <a:cs typeface="Roboto"/>
+                          <a:sym typeface="Roboto"/>
+                        </a:rPr>
+                        <a:t>Cells / area, plain Yosys</a:t>
+                      </a:r>
+                      <a:endParaRPr>
+                        <a:latin typeface="Roboto"/>
+                        <a:ea typeface="Roboto"/>
+                        <a:cs typeface="Roboto"/>
+                        <a:sym typeface="Roboto"/>
+                      </a:endParaRPr>
+                    </a:p>
+                  </a:txBody>
+                  <a:tcPr marT="91425" marB="91425" marR="91425" marL="91425"/>
+                </a:tc>
+                <a:tc>
+                  <a:txBody>
+                    <a:bodyPr/>
+                    <a:lstStyle/>
+                    <a:p>
+                      <a:pPr indent="0" lvl="0" marL="0" rtl="0" algn="l">
+                        <a:spcBef>
+                          <a:spcPts val="0"/>
+                        </a:spcBef>
+                        <a:spcAft>
+                          <a:spcPts val="0"/>
+                        </a:spcAft>
+                        <a:buNone/>
+                      </a:pPr>
+                      <a:r>
+                        <a:rPr lang="en">
+                          <a:latin typeface="Roboto"/>
+                          <a:ea typeface="Roboto"/>
+                          <a:cs typeface="Roboto"/>
+                          <a:sym typeface="Roboto"/>
+                        </a:rPr>
+                        <a:t>584,454 / 4.075 mm²</a:t>
+                      </a:r>
+                      <a:endParaRPr>
+                        <a:latin typeface="Roboto"/>
+                        <a:ea typeface="Roboto"/>
+                        <a:cs typeface="Roboto"/>
+                        <a:sym typeface="Roboto"/>
+                      </a:endParaRPr>
+                    </a:p>
+                  </a:txBody>
+                  <a:tcPr marT="91425" marB="91425" marR="91425" marL="91425"/>
+                </a:tc>
+                <a:tc>
+                  <a:txBody>
+                    <a:bodyPr/>
+                    <a:lstStyle/>
+                    <a:p>
+                      <a:pPr indent="0" lvl="0" marL="0" rtl="0" algn="l">
+                        <a:spcBef>
+                          <a:spcPts val="0"/>
+                        </a:spcBef>
+                        <a:spcAft>
+                          <a:spcPts val="0"/>
+                        </a:spcAft>
+                        <a:buNone/>
+                      </a:pPr>
+                      <a:r>
+                        <a:rPr lang="en">
+                          <a:latin typeface="Roboto"/>
+                          <a:ea typeface="Roboto"/>
+                          <a:cs typeface="Roboto"/>
+                          <a:sym typeface="Roboto"/>
+                        </a:rPr>
+                        <a:t>synthesis before the final picker rewrite</a:t>
+                      </a:r>
+                      <a:endParaRPr>
+                        <a:latin typeface="Roboto"/>
+                        <a:ea typeface="Roboto"/>
+                        <a:cs typeface="Roboto"/>
+                        <a:sym typeface="Roboto"/>
+                      </a:endParaRPr>
+                    </a:p>
+                  </a:txBody>
+                  <a:tcPr marT="91425" marB="91425" marR="91425" marL="91425"/>
+                </a:tc>
+              </a:tr>
+              <a:tr h="428625">
+                <a:tc>
+                  <a:txBody>
+                    <a:bodyPr/>
+                    <a:lstStyle/>
+                    <a:p>
+                      <a:pPr indent="0" lvl="0" marL="0" rtl="0" algn="l">
+                        <a:spcBef>
+                          <a:spcPts val="0"/>
+                        </a:spcBef>
+                        <a:spcAft>
+                          <a:spcPts val="0"/>
+                        </a:spcAft>
+                        <a:buNone/>
+                      </a:pPr>
+                      <a:r>
+                        <a:rPr lang="en">
+                          <a:latin typeface="Roboto"/>
+                          <a:ea typeface="Roboto"/>
+                          <a:cs typeface="Roboto"/>
+                          <a:sym typeface="Roboto"/>
+                        </a:rPr>
+                        <a:t>Cells / area, OpenLane recipe, final RTL</a:t>
+                      </a:r>
+                      <a:endParaRPr>
+                        <a:latin typeface="Roboto"/>
+                        <a:ea typeface="Roboto"/>
+                        <a:cs typeface="Roboto"/>
+                        <a:sym typeface="Roboto"/>
+                      </a:endParaRPr>
+                    </a:p>
+                  </a:txBody>
+                  <a:tcPr marT="91425" marB="91425" marR="91425" marL="91425"/>
+                </a:tc>
+                <a:tc>
+                  <a:txBody>
+                    <a:bodyPr/>
+                    <a:lstStyle/>
+                    <a:p>
+                      <a:pPr indent="0" lvl="0" marL="0" rtl="0" algn="l">
+                        <a:spcBef>
+                          <a:spcPts val="0"/>
+                        </a:spcBef>
+                        <a:spcAft>
+                          <a:spcPts val="0"/>
+                        </a:spcAft>
+                        <a:buNone/>
+                      </a:pPr>
+                      <a:r>
+                        <a:rPr lang="en">
+                          <a:latin typeface="Roboto"/>
+                          <a:ea typeface="Roboto"/>
+                          <a:cs typeface="Roboto"/>
+                          <a:sym typeface="Roboto"/>
+                        </a:rPr>
+                        <a:t>446,932 / 4.66 mm²</a:t>
+                      </a:r>
+                      <a:endParaRPr>
+                        <a:latin typeface="Roboto"/>
+                        <a:ea typeface="Roboto"/>
+                        <a:cs typeface="Roboto"/>
+                        <a:sym typeface="Roboto"/>
+                      </a:endParaRPr>
+                    </a:p>
+                  </a:txBody>
+                  <a:tcPr marT="91425" marB="91425" marR="91425" marL="91425"/>
+                </a:tc>
+                <a:tc>
+                  <a:txBody>
+                    <a:bodyPr/>
+                    <a:lstStyle/>
+                    <a:p>
+                      <a:pPr indent="0" lvl="0" marL="0" rtl="0" algn="l">
+                        <a:spcBef>
+                          <a:spcPts val="0"/>
+                        </a:spcBef>
+                        <a:spcAft>
+                          <a:spcPts val="0"/>
+                        </a:spcAft>
+                        <a:buNone/>
+                      </a:pPr>
+                      <a:r>
+                        <a:rPr lang="en">
+                          <a:latin typeface="Roboto"/>
+                          <a:ea typeface="Roboto"/>
+                          <a:cs typeface="Roboto"/>
+                          <a:sym typeface="Roboto"/>
+                        </a:rPr>
+                        <a:t>different recipe, not comparable with the row above</a:t>
+                      </a:r>
+                      <a:endParaRPr>
+                        <a:latin typeface="Roboto"/>
+                        <a:ea typeface="Roboto"/>
+                        <a:cs typeface="Roboto"/>
+                        <a:sym typeface="Roboto"/>
+                      </a:endParaRPr>
+                    </a:p>
+                  </a:txBody>
+                  <a:tcPr marT="91425" marB="91425" marR="91425" marL="91425"/>
+                </a:tc>
+              </a:tr>
+              <a:tr h="428625">
+                <a:tc>
+                  <a:txBody>
+                    <a:bodyPr/>
+                    <a:lstStyle/>
+                    <a:p>
+                      <a:pPr indent="0" lvl="0" marL="0" rtl="0" algn="l">
+                        <a:spcBef>
+                          <a:spcPts val="0"/>
+                        </a:spcBef>
+                        <a:spcAft>
+                          <a:spcPts val="0"/>
+                        </a:spcAft>
+                        <a:buNone/>
+                      </a:pPr>
+                      <a:r>
+                        <a:rPr lang="en">
+                          <a:latin typeface="Roboto"/>
+                          <a:ea typeface="Roboto"/>
+                          <a:cs typeface="Roboto"/>
+                          <a:sym typeface="Roboto"/>
+                        </a:rPr>
+                        <a:t>Fmax, post-CTS STA</a:t>
+                      </a:r>
+                      <a:endParaRPr>
+                        <a:latin typeface="Roboto"/>
+                        <a:ea typeface="Roboto"/>
+                        <a:cs typeface="Roboto"/>
+                        <a:sym typeface="Roboto"/>
+                      </a:endParaRPr>
+                    </a:p>
+                  </a:txBody>
+                  <a:tcPr marT="91425" marB="91425" marR="91425" marL="91425"/>
+                </a:tc>
+                <a:tc>
+                  <a:txBody>
+                    <a:bodyPr/>
+                    <a:lstStyle/>
+                    <a:p>
+                      <a:pPr indent="0" lvl="0" marL="0" rtl="0" algn="l">
+                        <a:spcBef>
+                          <a:spcPts val="0"/>
+                        </a:spcBef>
+                        <a:spcAft>
+                          <a:spcPts val="0"/>
+                        </a:spcAft>
+                        <a:buNone/>
+                      </a:pPr>
+                      <a:r>
+                        <a:rPr lang="en">
+                          <a:latin typeface="Roboto"/>
+                          <a:ea typeface="Roboto"/>
+                          <a:cs typeface="Roboto"/>
+                          <a:sym typeface="Roboto"/>
+                        </a:rPr>
+                        <a:t>11.15 → 19.46 MHz (1.75x), bit-exact</a:t>
+                      </a:r>
+                      <a:endParaRPr>
+                        <a:latin typeface="Roboto"/>
+                        <a:ea typeface="Roboto"/>
+                        <a:cs typeface="Roboto"/>
+                        <a:sym typeface="Roboto"/>
+                      </a:endParaRPr>
+                    </a:p>
+                  </a:txBody>
+                  <a:tcPr marT="91425" marB="91425" marR="91425" marL="91425"/>
+                </a:tc>
+                <a:tc>
+                  <a:txBody>
+                    <a:bodyPr/>
+                    <a:lstStyle/>
+                    <a:p>
+                      <a:pPr indent="0" lvl="0" marL="0" rtl="0" algn="l">
+                        <a:spcBef>
+                          <a:spcPts val="0"/>
+                        </a:spcBef>
+                        <a:spcAft>
+                          <a:spcPts val="0"/>
+                        </a:spcAft>
+                        <a:buNone/>
+                      </a:pPr>
+                      <a:r>
+                        <a:rPr lang="en">
+                          <a:latin typeface="Roboto"/>
+                          <a:ea typeface="Roboto"/>
+                          <a:cs typeface="Roboto"/>
+                          <a:sym typeface="Roboto"/>
+                        </a:rPr>
+                        <a:t>extrapolated from a 150 ns run with 98.6 ns slack</a:t>
+                      </a:r>
+                      <a:endParaRPr>
+                        <a:latin typeface="Roboto"/>
+                        <a:ea typeface="Roboto"/>
+                        <a:cs typeface="Roboto"/>
+                        <a:sym typeface="Roboto"/>
+                      </a:endParaRPr>
+                    </a:p>
+                  </a:txBody>
+                  <a:tcPr marT="91425" marB="91425" marR="91425" marL="91425"/>
+                </a:tc>
+              </a:tr>
+              <a:tr h="228600">
+                <a:tc>
+                  <a:txBody>
+                    <a:bodyPr/>
+                    <a:lstStyle/>
+                    <a:p>
+                      <a:pPr indent="0" lvl="0" marL="0" rtl="0" algn="l">
+                        <a:spcBef>
+                          <a:spcPts val="0"/>
+                        </a:spcBef>
+                        <a:spcAft>
+                          <a:spcPts val="0"/>
+                        </a:spcAft>
+                        <a:buNone/>
+                      </a:pPr>
+                      <a:r>
+                        <a:rPr lang="en">
+                          <a:latin typeface="Roboto"/>
+                          <a:ea typeface="Roboto"/>
+                          <a:cs typeface="Roboto"/>
+                          <a:sym typeface="Roboto"/>
+                        </a:rPr>
+                        <a:t>Power</a:t>
+                      </a:r>
+                      <a:endParaRPr>
+                        <a:latin typeface="Roboto"/>
+                        <a:ea typeface="Roboto"/>
+                        <a:cs typeface="Roboto"/>
+                        <a:sym typeface="Roboto"/>
+                      </a:endParaRPr>
+                    </a:p>
+                  </a:txBody>
+                  <a:tcPr marT="91425" marB="91425" marR="91425" marL="91425"/>
+                </a:tc>
+                <a:tc>
+                  <a:txBody>
+                    <a:bodyPr/>
+                    <a:lstStyle/>
+                    <a:p>
+                      <a:pPr indent="0" lvl="0" marL="0" rtl="0" algn="l">
+                        <a:spcBef>
+                          <a:spcPts val="0"/>
+                        </a:spcBef>
+                        <a:spcAft>
+                          <a:spcPts val="0"/>
+                        </a:spcAft>
+                        <a:buNone/>
+                      </a:pPr>
+                      <a:r>
+                        <a:rPr lang="en">
+                          <a:latin typeface="Roboto"/>
+                          <a:ea typeface="Roboto"/>
+                          <a:cs typeface="Roboto"/>
+                          <a:sym typeface="Roboto"/>
+                        </a:rPr>
+                        <a:t>≈ 19.2 mW</a:t>
+                      </a:r>
+                      <a:endParaRPr>
+                        <a:latin typeface="Roboto"/>
+                        <a:ea typeface="Roboto"/>
+                        <a:cs typeface="Roboto"/>
+                        <a:sym typeface="Roboto"/>
+                      </a:endParaRPr>
+                    </a:p>
+                  </a:txBody>
+                  <a:tcPr marT="91425" marB="91425" marR="91425" marL="91425"/>
+                </a:tc>
+                <a:tc>
+                  <a:txBody>
+                    <a:bodyPr/>
+                    <a:lstStyle/>
+                    <a:p>
+                      <a:pPr indent="0" lvl="0" marL="0" rtl="0" algn="l">
+                        <a:spcBef>
+                          <a:spcPts val="0"/>
+                        </a:spcBef>
+                        <a:spcAft>
+                          <a:spcPts val="0"/>
+                        </a:spcAft>
+                        <a:buNone/>
+                      </a:pPr>
+                      <a:r>
+                        <a:rPr lang="en">
+                          <a:latin typeface="Roboto"/>
+                          <a:ea typeface="Roboto"/>
+                          <a:cs typeface="Roboto"/>
+                          <a:sym typeface="Roboto"/>
+                        </a:rPr>
+                        <a:t>tool estimate, default activity, indicative only</a:t>
+                      </a:r>
+                      <a:endParaRPr>
+                        <a:latin typeface="Roboto"/>
+                        <a:ea typeface="Roboto"/>
+                        <a:cs typeface="Roboto"/>
+                        <a:sym typeface="Roboto"/>
+                      </a:endParaRPr>
+                    </a:p>
+                  </a:txBody>
+                  <a:tcPr marT="91425" marB="91425" marR="91425" marL="91425"/>
+                </a:tc>
+              </a:tr>
+              <a:tr h="228600">
+                <a:tc>
+                  <a:txBody>
+                    <a:bodyPr/>
+                    <a:lstStyle/>
+                    <a:p>
+                      <a:pPr indent="0" lvl="0" marL="0" rtl="0" algn="l">
+                        <a:spcBef>
+                          <a:spcPts val="0"/>
+                        </a:spcBef>
+                        <a:spcAft>
+                          <a:spcPts val="0"/>
+                        </a:spcAft>
+                        <a:buNone/>
+                      </a:pPr>
+                      <a:r>
+                        <a:rPr lang="en">
+                          <a:latin typeface="Roboto"/>
+                          <a:ea typeface="Roboto"/>
+                          <a:cs typeface="Roboto"/>
+                          <a:sym typeface="Roboto"/>
+                        </a:rPr>
+                        <a:t>Clock target</a:t>
+                      </a:r>
+                      <a:endParaRPr>
+                        <a:latin typeface="Roboto"/>
+                        <a:ea typeface="Roboto"/>
+                        <a:cs typeface="Roboto"/>
+                        <a:sym typeface="Roboto"/>
+                      </a:endParaRPr>
+                    </a:p>
+                  </a:txBody>
+                  <a:tcPr marT="91425" marB="91425" marR="91425" marL="91425"/>
+                </a:tc>
+                <a:tc>
+                  <a:txBody>
+                    <a:bodyPr/>
+                    <a:lstStyle/>
+                    <a:p>
+                      <a:pPr indent="0" lvl="0" marL="0" rtl="0" algn="l">
+                        <a:spcBef>
+                          <a:spcPts val="0"/>
+                        </a:spcBef>
+                        <a:spcAft>
+                          <a:spcPts val="0"/>
+                        </a:spcAft>
+                        <a:buNone/>
+                      </a:pPr>
+                      <a:r>
+                        <a:rPr lang="en">
+                          <a:latin typeface="Roboto"/>
+                          <a:ea typeface="Roboto"/>
+                          <a:cs typeface="Roboto"/>
+                          <a:sym typeface="Roboto"/>
+                        </a:rPr>
+                        <a:t>50 MHz, missed 2.6x</a:t>
+                      </a:r>
+                      <a:endParaRPr>
+                        <a:latin typeface="Roboto"/>
+                        <a:ea typeface="Roboto"/>
+                        <a:cs typeface="Roboto"/>
+                        <a:sym typeface="Roboto"/>
+                      </a:endParaRPr>
+                    </a:p>
+                  </a:txBody>
+                  <a:tcPr marT="91425" marB="91425" marR="91425" marL="91425"/>
+                </a:tc>
+                <a:tc>
+                  <a:txBody>
+                    <a:bodyPr/>
+                    <a:lstStyle/>
+                    <a:p>
+                      <a:pPr indent="0" lvl="0" marL="0" rtl="0" algn="l">
+                        <a:spcBef>
+                          <a:spcPts val="0"/>
+                        </a:spcBef>
+                        <a:spcAft>
+                          <a:spcPts val="0"/>
+                        </a:spcAft>
+                        <a:buNone/>
+                      </a:pPr>
+                      <a:r>
+                        <a:rPr lang="en">
+                          <a:latin typeface="Roboto"/>
+                          <a:ea typeface="Roboto"/>
+                          <a:cs typeface="Roboto"/>
+                          <a:sym typeface="Roboto"/>
+                        </a:rPr>
+                        <a:t>next limiter: integrate-multiplier operand path</a:t>
+                      </a:r>
+                      <a:endParaRPr>
+                        <a:latin typeface="Roboto"/>
+                        <a:ea typeface="Roboto"/>
+                        <a:cs typeface="Roboto"/>
+                        <a:sym typeface="Roboto"/>
+                      </a:endParaRPr>
+                    </a:p>
+                  </a:txBody>
+                  <a:tcPr marT="91425" marB="91425" marR="91425" marL="91425"/>
+                </a:tc>
+              </a:tr>
+            </a:tbl>
+          </a:graphicData>
+        </a:graphic>
+      </p:graphicFrame>
+    </p:spTree>
+  </p:cSld>
+  <p:clrMapOvr>
+    <a:masterClrMapping/>
+  </p:clrMapOvr>
+</p:sld>
+</file>
+
+<file path=ppt/slides/slide12.xml><?xml version="1.0" encoding="utf-8"?>
+<p:sld xmlns:a="http://schemas.openxmlformats.org/drawingml/2006/main" xmlns:r="http://schemas.openxmlformats.org/officeDocument/2006/relationships" xmlns:mc="http://schemas.openxmlformats.org/markup-compatibility/2006" xmlns:mv="urn:schemas-microsoft-com:mac:vml" xmlns:p="http://schemas.openxmlformats.org/presentationml/2006/main" xmlns:c="http://schemas.openxmlformats.org/drawingml/2006/chart" xmlns:dgm="http://schemas.openxmlformats.org/drawingml/2006/diagram" xmlns:o="urn:schemas-microsoft-com:office:office" xmlns:v="urn:schemas-microsoft-com:vml" xmlns:pvml="urn:schemas-microsoft-com:office:powerpoint" xmlns:com="http://schemas.openxmlformats.org/drawingml/2006/compatibility" xmlns:p14="http://schemas.microsoft.com/office/powerpoint/2010/main" xmlns:p15="http://schemas.microsoft.com/office/powerpoint/2012/main" xmlns:ahyp="http://schemas.microsoft.com/office/drawing/2018/hyperlinkcolor">
+  <p:cSld>
+    <p:spTree>
+      <p:nvGrpSpPr>
+        <p:cNvPr id="124" name="Shape 124"/>
+        <p:cNvGrpSpPr/>
+        <p:nvPr/>
+      </p:nvGrpSpPr>
+      <p:grpSpPr>
+        <a:xfrm>
+          <a:off x="0" y="0"/>
+          <a:ext cx="0" cy="0"/>
+          <a:chOff x="0" y="0"/>
+          <a:chExt cx="0" cy="0"/>
+        </a:xfrm>
+      </p:grpSpPr>
+      <p:sp>
+        <p:nvSpPr>
+          <p:cNvPr id="125" name="Google Shape;125;p21"/>
+          <p:cNvSpPr txBox="1"/>
+          <p:nvPr>
+            <p:ph type="title"/>
+          </p:nvPr>
+        </p:nvSpPr>
+        <p:spPr>
+          <a:xfrm>
+            <a:off x="365760" y="228600"/>
+            <a:ext cx="8412600" cy="1097400"/>
+          </a:xfrm>
+          <a:prstGeom prst="rect">
+            <a:avLst/>
+          </a:prstGeom>
+        </p:spPr>
+        <p:txBody>
+          <a:bodyPr anchorCtr="0" anchor="t" bIns="91425" lIns="91425" spcFirstLastPara="1" rIns="91425" wrap="square" tIns="91425">
+            <a:noAutofit/>
+          </a:bodyPr>
+          <a:lstStyle/>
+          <a:p>
+            <a:pPr indent="0" lvl="0" marL="0" rtl="0" algn="l">
+              <a:spcBef>
+                <a:spcPts val="0"/>
+              </a:spcBef>
+              <a:spcAft>
+                <a:spcPts val="0"/>
+              </a:spcAft>
+              <a:buNone/>
+            </a:pPr>
+            <a:r>
+              <a:rPr lang="en"/>
+              <a:t>At 19.46 MHz grape ties optimized Python and is about 15x slower than Rust</a:t>
+            </a:r>
+            <a:endParaRPr/>
+          </a:p>
+        </p:txBody>
+      </p:sp>
+      <p:sp>
+        <p:nvSpPr>
+          <p:cNvPr id="126" name="Google Shape;126;p21"/>
+          <p:cNvSpPr txBox="1"/>
+          <p:nvPr>
+            <p:ph idx="12" type="sldNum"/>
+          </p:nvPr>
+        </p:nvSpPr>
+        <p:spPr>
+          <a:xfrm>
+            <a:off x="7863840" y="4773168"/>
+            <a:ext cx="914400" cy="365700"/>
+          </a:xfrm>
+          <a:prstGeom prst="rect">
+            <a:avLst/>
+          </a:prstGeom>
+        </p:spPr>
+        <p:txBody>
+          <a:bodyPr anchorCtr="0" anchor="ctr" bIns="91425" lIns="91425" spcFirstLastPara="1" rIns="91425" wrap="square" tIns="91425">
+            <a:normAutofit/>
+          </a:bodyPr>
+          <a:lstStyle/>
+          <a:p>
+            <a:pPr indent="0" lvl="0" marL="0" rtl="0" algn="r">
+              <a:spcBef>
+                <a:spcPts val="0"/>
+              </a:spcBef>
+              <a:spcAft>
+                <a:spcPts val="0"/>
+              </a:spcAft>
+              <a:buNone/>
+            </a:pPr>
+            <a:fld id="{00000000-1234-1234-1234-123412341234}" type="slidenum">
+              <a:rPr lang="en"/>
+              <a:t>‹#›</a:t>
+            </a:fld>
+            <a:endParaRPr/>
+          </a:p>
+        </p:txBody>
+      </p:sp>
+      <p:graphicFrame>
+        <p:nvGraphicFramePr>
+          <p:cNvPr id="127" name="Google Shape;127;p21"/>
+          <p:cNvGraphicFramePr/>
+          <p:nvPr/>
+        </p:nvGraphicFramePr>
+        <p:xfrm>
+          <a:off x="365760" y="1463040"/>
+          <a:ext cx="3000000" cy="3000000"/>
+        </p:xfrm>
+        <a:graphic>
+          <a:graphicData uri="http://schemas.openxmlformats.org/drawingml/2006/table">
+            <a:tbl>
+              <a:tblPr>
+                <a:noFill/>
+                <a:tableStyleId>{82F3850C-69AE-44F1-A2F3-003B56526B79}</a:tableStyleId>
+              </a:tblPr>
+              <a:tblGrid>
+                <a:gridCol w="1657350"/>
+                <a:gridCol w="3952875"/>
+                <a:gridCol w="1038225"/>
+                <a:gridCol w="1771650"/>
+              </a:tblGrid>
+              <a:tr h="257175">
+                <a:tc>
+                  <a:txBody>
+                    <a:bodyPr/>
+                    <a:lstStyle/>
+                    <a:p>
+                      <a:pPr indent="0" lvl="0" marL="0" rtl="0" algn="l">
+                        <a:spcBef>
+                          <a:spcPts val="0"/>
+                        </a:spcBef>
+                        <a:spcAft>
+                          <a:spcPts val="0"/>
+                        </a:spcAft>
+                        <a:buNone/>
+                      </a:pPr>
+                      <a:r>
+                        <a:rPr b="1" lang="en" sz="1600">
+                          <a:solidFill>
+                            <a:srgbClr val="FFFFFF"/>
+                          </a:solidFill>
+                          <a:latin typeface="Roboto"/>
+                          <a:ea typeface="Roboto"/>
+                          <a:cs typeface="Roboto"/>
+                          <a:sym typeface="Roboto"/>
+                        </a:rPr>
+                        <a:t>Tier</a:t>
+                      </a:r>
+                      <a:endParaRPr b="1" sz="1600">
+                        <a:solidFill>
+                          <a:srgbClr val="FFFFFF"/>
+                        </a:solidFill>
+                        <a:latin typeface="Roboto"/>
+                        <a:ea typeface="Roboto"/>
+                        <a:cs typeface="Roboto"/>
+                        <a:sym typeface="Roboto"/>
+                      </a:endParaRPr>
+                    </a:p>
+                  </a:txBody>
+                  <a:tcPr marT="91425" marB="91425" marR="91425" marL="91425">
+                    <a:solidFill>
+                      <a:srgbClr val="1F4E79"/>
+                    </a:solidFill>
+                  </a:tcPr>
+                </a:tc>
+                <a:tc>
+                  <a:txBody>
+                    <a:bodyPr/>
+                    <a:lstStyle/>
+                    <a:p>
+                      <a:pPr indent="0" lvl="0" marL="0" rtl="0" algn="l">
+                        <a:spcBef>
+                          <a:spcPts val="0"/>
+                        </a:spcBef>
+                        <a:spcAft>
+                          <a:spcPts val="0"/>
+                        </a:spcAft>
+                        <a:buNone/>
+                      </a:pPr>
+                      <a:r>
+                        <a:rPr b="1" lang="en" sz="1600">
+                          <a:solidFill>
+                            <a:srgbClr val="FFFFFF"/>
+                          </a:solidFill>
+                          <a:latin typeface="Roboto"/>
+                          <a:ea typeface="Roboto"/>
+                          <a:cs typeface="Roboto"/>
+                          <a:sym typeface="Roboto"/>
+                        </a:rPr>
+                        <a:t>Time / run</a:t>
+                      </a:r>
+                      <a:endParaRPr b="1" sz="1600">
+                        <a:solidFill>
+                          <a:srgbClr val="FFFFFF"/>
+                        </a:solidFill>
+                        <a:latin typeface="Roboto"/>
+                        <a:ea typeface="Roboto"/>
+                        <a:cs typeface="Roboto"/>
+                        <a:sym typeface="Roboto"/>
+                      </a:endParaRPr>
+                    </a:p>
+                  </a:txBody>
+                  <a:tcPr marT="91425" marB="91425" marR="91425" marL="91425">
+                    <a:solidFill>
+                      <a:srgbClr val="1F4E79"/>
+                    </a:solidFill>
+                  </a:tcPr>
+                </a:tc>
+                <a:tc>
+                  <a:txBody>
+                    <a:bodyPr/>
+                    <a:lstStyle/>
+                    <a:p>
+                      <a:pPr indent="0" lvl="0" marL="0" rtl="0" algn="l">
+                        <a:spcBef>
+                          <a:spcPts val="0"/>
+                        </a:spcBef>
+                        <a:spcAft>
+                          <a:spcPts val="0"/>
+                        </a:spcAft>
+                        <a:buNone/>
+                      </a:pPr>
+                      <a:r>
+                        <a:rPr b="1" lang="en" sz="1600">
+                          <a:solidFill>
+                            <a:srgbClr val="FFFFFF"/>
+                          </a:solidFill>
+                          <a:latin typeface="Roboto"/>
+                          <a:ea typeface="Roboto"/>
+                          <a:cs typeface="Roboto"/>
+                          <a:sym typeface="Roboto"/>
+                        </a:rPr>
+                        <a:t>vs original</a:t>
+                      </a:r>
+                      <a:endParaRPr b="1" sz="1600">
+                        <a:solidFill>
+                          <a:srgbClr val="FFFFFF"/>
+                        </a:solidFill>
+                        <a:latin typeface="Roboto"/>
+                        <a:ea typeface="Roboto"/>
+                        <a:cs typeface="Roboto"/>
+                        <a:sym typeface="Roboto"/>
+                      </a:endParaRPr>
+                    </a:p>
+                  </a:txBody>
+                  <a:tcPr marT="91425" marB="91425" marR="91425" marL="91425">
+                    <a:solidFill>
+                      <a:srgbClr val="1F4E79"/>
+                    </a:solidFill>
+                  </a:tcPr>
+                </a:tc>
+                <a:tc>
+                  <a:txBody>
+                    <a:bodyPr/>
+                    <a:lstStyle/>
+                    <a:p>
+                      <a:pPr indent="0" lvl="0" marL="0" rtl="0" algn="l">
+                        <a:spcBef>
+                          <a:spcPts val="0"/>
+                        </a:spcBef>
+                        <a:spcAft>
+                          <a:spcPts val="0"/>
+                        </a:spcAft>
+                        <a:buNone/>
+                      </a:pPr>
+                      <a:r>
+                        <a:rPr b="1" lang="en" sz="1600">
+                          <a:solidFill>
+                            <a:srgbClr val="FFFFFF"/>
+                          </a:solidFill>
+                          <a:latin typeface="Roboto"/>
+                          <a:ea typeface="Roboto"/>
+                          <a:cs typeface="Roboto"/>
+                          <a:sym typeface="Roboto"/>
+                        </a:rPr>
+                        <a:t>Evidence</a:t>
+                      </a:r>
+                      <a:endParaRPr b="1" sz="1600">
+                        <a:solidFill>
+                          <a:srgbClr val="FFFFFF"/>
+                        </a:solidFill>
+                        <a:latin typeface="Roboto"/>
+                        <a:ea typeface="Roboto"/>
+                        <a:cs typeface="Roboto"/>
+                        <a:sym typeface="Roboto"/>
+                      </a:endParaRPr>
+                    </a:p>
+                  </a:txBody>
+                  <a:tcPr marT="91425" marB="91425" marR="91425" marL="91425">
+                    <a:solidFill>
+                      <a:srgbClr val="1F4E79"/>
+                    </a:solidFill>
+                  </a:tcPr>
+                </a:tc>
+              </a:tr>
+              <a:tr h="228600">
+                <a:tc>
+                  <a:txBody>
+                    <a:bodyPr/>
+                    <a:lstStyle/>
+                    <a:p>
+                      <a:pPr indent="0" lvl="0" marL="0" rtl="0" algn="l">
+                        <a:spcBef>
+                          <a:spcPts val="0"/>
+                        </a:spcBef>
+                        <a:spcAft>
+                          <a:spcPts val="0"/>
+                        </a:spcAft>
+                        <a:buNone/>
+                      </a:pPr>
+                      <a:r>
+                        <a:rPr lang="en">
+                          <a:latin typeface="Roboto"/>
+                          <a:ea typeface="Roboto"/>
+                          <a:cs typeface="Roboto"/>
+                          <a:sym typeface="Roboto"/>
+                        </a:rPr>
+                        <a:t>Original Python</a:t>
+                      </a:r>
+                      <a:endParaRPr>
+                        <a:latin typeface="Roboto"/>
+                        <a:ea typeface="Roboto"/>
+                        <a:cs typeface="Roboto"/>
+                        <a:sym typeface="Roboto"/>
+                      </a:endParaRPr>
+                    </a:p>
+                  </a:txBody>
+                  <a:tcPr marT="91425" marB="91425" marR="91425" marL="91425"/>
+                </a:tc>
+                <a:tc>
+                  <a:txBody>
+                    <a:bodyPr/>
+                    <a:lstStyle/>
+                    <a:p>
+                      <a:pPr indent="0" lvl="0" marL="0" rtl="0" algn="l">
+                        <a:spcBef>
+                          <a:spcPts val="0"/>
+                        </a:spcBef>
+                        <a:spcAft>
+                          <a:spcPts val="0"/>
+                        </a:spcAft>
+                        <a:buNone/>
+                      </a:pPr>
+                      <a:r>
+                        <a:rPr lang="en">
+                          <a:latin typeface="Roboto"/>
+                          <a:ea typeface="Roboto"/>
+                          <a:cs typeface="Roboto"/>
+                          <a:sym typeface="Roboto"/>
+                        </a:rPr>
+                        <a:t>231.20 ms</a:t>
+                      </a:r>
+                      <a:endParaRPr>
+                        <a:latin typeface="Roboto"/>
+                        <a:ea typeface="Roboto"/>
+                        <a:cs typeface="Roboto"/>
+                        <a:sym typeface="Roboto"/>
+                      </a:endParaRPr>
+                    </a:p>
+                  </a:txBody>
+                  <a:tcPr marT="91425" marB="91425" marR="91425" marL="91425"/>
+                </a:tc>
+                <a:tc>
+                  <a:txBody>
+                    <a:bodyPr/>
+                    <a:lstStyle/>
+                    <a:p>
+                      <a:pPr indent="0" lvl="0" marL="0" rtl="0" algn="l">
+                        <a:spcBef>
+                          <a:spcPts val="0"/>
+                        </a:spcBef>
+                        <a:spcAft>
+                          <a:spcPts val="0"/>
+                        </a:spcAft>
+                        <a:buNone/>
+                      </a:pPr>
+                      <a:r>
+                        <a:rPr lang="en">
+                          <a:latin typeface="Roboto"/>
+                          <a:ea typeface="Roboto"/>
+                          <a:cs typeface="Roboto"/>
+                          <a:sym typeface="Roboto"/>
+                        </a:rPr>
+                        <a:t>1.00x</a:t>
+                      </a:r>
+                      <a:endParaRPr>
+                        <a:latin typeface="Roboto"/>
+                        <a:ea typeface="Roboto"/>
+                        <a:cs typeface="Roboto"/>
+                        <a:sym typeface="Roboto"/>
+                      </a:endParaRPr>
+                    </a:p>
+                  </a:txBody>
+                  <a:tcPr marT="91425" marB="91425" marR="91425" marL="91425"/>
+                </a:tc>
+                <a:tc>
+                  <a:txBody>
+                    <a:bodyPr/>
+                    <a:lstStyle/>
+                    <a:p>
+                      <a:pPr indent="0" lvl="0" marL="0" rtl="0" algn="l">
+                        <a:spcBef>
+                          <a:spcPts val="0"/>
+                        </a:spcBef>
+                        <a:spcAft>
+                          <a:spcPts val="0"/>
+                        </a:spcAft>
+                        <a:buNone/>
+                      </a:pPr>
+                      <a:r>
+                        <a:rPr lang="en">
+                          <a:latin typeface="Roboto"/>
+                          <a:ea typeface="Roboto"/>
+                          <a:cs typeface="Roboto"/>
+                          <a:sym typeface="Roboto"/>
+                        </a:rPr>
+                        <a:t>measured, course VM</a:t>
+                      </a:r>
+                      <a:endParaRPr>
+                        <a:latin typeface="Roboto"/>
+                        <a:ea typeface="Roboto"/>
+                        <a:cs typeface="Roboto"/>
+                        <a:sym typeface="Roboto"/>
+                      </a:endParaRPr>
+                    </a:p>
+                  </a:txBody>
+                  <a:tcPr marT="91425" marB="91425" marR="91425" marL="91425"/>
+                </a:tc>
+              </a:tr>
+              <a:tr h="228600">
+                <a:tc>
+                  <a:txBody>
+                    <a:bodyPr/>
+                    <a:lstStyle/>
+                    <a:p>
+                      <a:pPr indent="0" lvl="0" marL="0" rtl="0" algn="l">
+                        <a:spcBef>
+                          <a:spcPts val="0"/>
+                        </a:spcBef>
+                        <a:spcAft>
+                          <a:spcPts val="0"/>
+                        </a:spcAft>
+                        <a:buNone/>
+                      </a:pPr>
+                      <a:r>
+                        <a:rPr lang="en">
+                          <a:latin typeface="Roboto"/>
+                          <a:ea typeface="Roboto"/>
+                          <a:cs typeface="Roboto"/>
+                          <a:sym typeface="Roboto"/>
+                        </a:rPr>
+                        <a:t>Optimized Python</a:t>
+                      </a:r>
+                      <a:endParaRPr>
+                        <a:latin typeface="Roboto"/>
+                        <a:ea typeface="Roboto"/>
+                        <a:cs typeface="Roboto"/>
+                        <a:sym typeface="Roboto"/>
+                      </a:endParaRPr>
+                    </a:p>
+                  </a:txBody>
+                  <a:tcPr marT="91425" marB="91425" marR="91425" marL="91425"/>
+                </a:tc>
+                <a:tc>
+                  <a:txBody>
+                    <a:bodyPr/>
+                    <a:lstStyle/>
+                    <a:p>
+                      <a:pPr indent="0" lvl="0" marL="0" rtl="0" algn="l">
+                        <a:spcBef>
+                          <a:spcPts val="0"/>
+                        </a:spcBef>
+                        <a:spcAft>
+                          <a:spcPts val="0"/>
+                        </a:spcAft>
+                        <a:buNone/>
+                      </a:pPr>
+                      <a:r>
+                        <a:rPr lang="en">
+                          <a:latin typeface="Roboto"/>
+                          <a:ea typeface="Roboto"/>
+                          <a:cs typeface="Roboto"/>
+                          <a:sym typeface="Roboto"/>
+                        </a:rPr>
+                        <a:t>143.13 ms</a:t>
+                      </a:r>
+                      <a:endParaRPr>
+                        <a:latin typeface="Roboto"/>
+                        <a:ea typeface="Roboto"/>
+                        <a:cs typeface="Roboto"/>
+                        <a:sym typeface="Roboto"/>
+                      </a:endParaRPr>
+                    </a:p>
+                  </a:txBody>
+                  <a:tcPr marT="91425" marB="91425" marR="91425" marL="91425"/>
+                </a:tc>
+                <a:tc>
+                  <a:txBody>
+                    <a:bodyPr/>
+                    <a:lstStyle/>
+                    <a:p>
+                      <a:pPr indent="0" lvl="0" marL="0" rtl="0" algn="l">
+                        <a:spcBef>
+                          <a:spcPts val="0"/>
+                        </a:spcBef>
+                        <a:spcAft>
+                          <a:spcPts val="0"/>
+                        </a:spcAft>
+                        <a:buNone/>
+                      </a:pPr>
+                      <a:r>
+                        <a:rPr lang="en">
+                          <a:latin typeface="Roboto"/>
+                          <a:ea typeface="Roboto"/>
+                          <a:cs typeface="Roboto"/>
+                          <a:sym typeface="Roboto"/>
+                        </a:rPr>
+                        <a:t>1.62x</a:t>
+                      </a:r>
+                      <a:endParaRPr>
+                        <a:latin typeface="Roboto"/>
+                        <a:ea typeface="Roboto"/>
+                        <a:cs typeface="Roboto"/>
+                        <a:sym typeface="Roboto"/>
+                      </a:endParaRPr>
+                    </a:p>
+                  </a:txBody>
+                  <a:tcPr marT="91425" marB="91425" marR="91425" marL="91425"/>
+                </a:tc>
+                <a:tc>
+                  <a:txBody>
+                    <a:bodyPr/>
+                    <a:lstStyle/>
+                    <a:p>
+                      <a:pPr indent="0" lvl="0" marL="0" rtl="0" algn="l">
+                        <a:spcBef>
+                          <a:spcPts val="0"/>
+                        </a:spcBef>
+                        <a:spcAft>
+                          <a:spcPts val="0"/>
+                        </a:spcAft>
+                        <a:buNone/>
+                      </a:pPr>
+                      <a:r>
+                        <a:rPr lang="en">
+                          <a:latin typeface="Roboto"/>
+                          <a:ea typeface="Roboto"/>
+                          <a:cs typeface="Roboto"/>
+                          <a:sym typeface="Roboto"/>
+                        </a:rPr>
+                        <a:t>measured, course VM</a:t>
+                      </a:r>
+                      <a:endParaRPr>
+                        <a:latin typeface="Roboto"/>
+                        <a:ea typeface="Roboto"/>
+                        <a:cs typeface="Roboto"/>
+                        <a:sym typeface="Roboto"/>
+                      </a:endParaRPr>
+                    </a:p>
+                  </a:txBody>
+                  <a:tcPr marT="91425" marB="91425" marR="91425" marL="91425"/>
+                </a:tc>
+              </a:tr>
+              <a:tr h="228600">
+                <a:tc>
+                  <a:txBody>
+                    <a:bodyPr/>
+                    <a:lstStyle/>
+                    <a:p>
+                      <a:pPr indent="0" lvl="0" marL="0" rtl="0" algn="l">
+                        <a:spcBef>
+                          <a:spcPts val="0"/>
+                        </a:spcBef>
+                        <a:spcAft>
+                          <a:spcPts val="0"/>
+                        </a:spcAft>
+                        <a:buNone/>
+                      </a:pPr>
+                      <a:r>
+                        <a:rPr lang="en">
+                          <a:latin typeface="Roboto"/>
+                          <a:ea typeface="Roboto"/>
+                          <a:cs typeface="Roboto"/>
+                          <a:sym typeface="Roboto"/>
+                        </a:rPr>
+                        <a:t>grape @ 19.46 MHz</a:t>
+                      </a:r>
+                      <a:endParaRPr>
+                        <a:latin typeface="Roboto"/>
+                        <a:ea typeface="Roboto"/>
+                        <a:cs typeface="Roboto"/>
+                        <a:sym typeface="Roboto"/>
+                      </a:endParaRPr>
+                    </a:p>
+                  </a:txBody>
+                  <a:tcPr marT="91425" marB="91425" marR="91425" marL="91425"/>
+                </a:tc>
+                <a:tc>
+                  <a:txBody>
+                    <a:bodyPr/>
+                    <a:lstStyle/>
+                    <a:p>
+                      <a:pPr indent="0" lvl="0" marL="0" rtl="0" algn="l">
+                        <a:spcBef>
+                          <a:spcPts val="0"/>
+                        </a:spcBef>
+                        <a:spcAft>
+                          <a:spcPts val="0"/>
+                        </a:spcAft>
+                        <a:buNone/>
+                      </a:pPr>
+                      <a:r>
+                        <a:rPr lang="en">
+                          <a:latin typeface="Roboto"/>
+                          <a:ea typeface="Roboto"/>
+                          <a:cs typeface="Roboto"/>
+                          <a:sym typeface="Roboto"/>
+                        </a:rPr>
+                        <a:t>≈ 139 ms = 127.4 ms compute + 11.6 ms residual</a:t>
+                      </a:r>
+                      <a:endParaRPr>
+                        <a:latin typeface="Roboto"/>
+                        <a:ea typeface="Roboto"/>
+                        <a:cs typeface="Roboto"/>
+                        <a:sym typeface="Roboto"/>
+                      </a:endParaRPr>
+                    </a:p>
+                  </a:txBody>
+                  <a:tcPr marT="91425" marB="91425" marR="91425" marL="91425"/>
+                </a:tc>
+                <a:tc>
+                  <a:txBody>
+                    <a:bodyPr/>
+                    <a:lstStyle/>
+                    <a:p>
+                      <a:pPr indent="0" lvl="0" marL="0" rtl="0" algn="l">
+                        <a:spcBef>
+                          <a:spcPts val="0"/>
+                        </a:spcBef>
+                        <a:spcAft>
+                          <a:spcPts val="0"/>
+                        </a:spcAft>
+                        <a:buNone/>
+                      </a:pPr>
+                      <a:r>
+                        <a:rPr lang="en">
+                          <a:latin typeface="Roboto"/>
+                          <a:ea typeface="Roboto"/>
+                          <a:cs typeface="Roboto"/>
+                          <a:sym typeface="Roboto"/>
+                        </a:rPr>
+                        <a:t>≈ 1.66x</a:t>
+                      </a:r>
+                      <a:endParaRPr>
+                        <a:latin typeface="Roboto"/>
+                        <a:ea typeface="Roboto"/>
+                        <a:cs typeface="Roboto"/>
+                        <a:sym typeface="Roboto"/>
+                      </a:endParaRPr>
+                    </a:p>
+                  </a:txBody>
+                  <a:tcPr marT="91425" marB="91425" marR="91425" marL="91425"/>
+                </a:tc>
+                <a:tc>
+                  <a:txBody>
+                    <a:bodyPr/>
+                    <a:lstStyle/>
+                    <a:p>
+                      <a:pPr indent="0" lvl="0" marL="0" rtl="0" algn="l">
+                        <a:spcBef>
+                          <a:spcPts val="0"/>
+                        </a:spcBef>
+                        <a:spcAft>
+                          <a:spcPts val="0"/>
+                        </a:spcAft>
+                        <a:buNone/>
+                      </a:pPr>
+                      <a:r>
+                        <a:rPr lang="en">
+                          <a:latin typeface="Roboto"/>
+                          <a:ea typeface="Roboto"/>
+                          <a:cs typeface="Roboto"/>
+                          <a:sym typeface="Roboto"/>
+                        </a:rPr>
+                        <a:t>projected</a:t>
+                      </a:r>
+                      <a:endParaRPr>
+                        <a:latin typeface="Roboto"/>
+                        <a:ea typeface="Roboto"/>
+                        <a:cs typeface="Roboto"/>
+                        <a:sym typeface="Roboto"/>
+                      </a:endParaRPr>
+                    </a:p>
+                  </a:txBody>
+                  <a:tcPr marT="91425" marB="91425" marR="91425" marL="91425"/>
+                </a:tc>
+              </a:tr>
+              <a:tr h="228600">
+                <a:tc>
+                  <a:txBody>
+                    <a:bodyPr/>
+                    <a:lstStyle/>
+                    <a:p>
+                      <a:pPr indent="0" lvl="0" marL="0" rtl="0" algn="l">
+                        <a:spcBef>
+                          <a:spcPts val="0"/>
+                        </a:spcBef>
+                        <a:spcAft>
+                          <a:spcPts val="0"/>
+                        </a:spcAft>
+                        <a:buNone/>
+                      </a:pPr>
+                      <a:r>
+                        <a:rPr lang="en">
+                          <a:latin typeface="Roboto"/>
+                          <a:ea typeface="Roboto"/>
+                          <a:cs typeface="Roboto"/>
+                          <a:sym typeface="Roboto"/>
+                        </a:rPr>
+                        <a:t>Native Rust</a:t>
+                      </a:r>
+                      <a:endParaRPr>
+                        <a:latin typeface="Roboto"/>
+                        <a:ea typeface="Roboto"/>
+                        <a:cs typeface="Roboto"/>
+                        <a:sym typeface="Roboto"/>
+                      </a:endParaRPr>
+                    </a:p>
+                  </a:txBody>
+                  <a:tcPr marT="91425" marB="91425" marR="91425" marL="91425"/>
+                </a:tc>
+                <a:tc>
+                  <a:txBody>
+                    <a:bodyPr/>
+                    <a:lstStyle/>
+                    <a:p>
+                      <a:pPr indent="0" lvl="0" marL="0" rtl="0" algn="l">
+                        <a:spcBef>
+                          <a:spcPts val="0"/>
+                        </a:spcBef>
+                        <a:spcAft>
+                          <a:spcPts val="0"/>
+                        </a:spcAft>
+                        <a:buNone/>
+                      </a:pPr>
+                      <a:r>
+                        <a:rPr lang="en">
+                          <a:latin typeface="Roboto"/>
+                          <a:ea typeface="Roboto"/>
+                          <a:cs typeface="Roboto"/>
+                          <a:sym typeface="Roboto"/>
+                        </a:rPr>
+                        <a:t>9.530 ms</a:t>
+                      </a:r>
+                      <a:endParaRPr>
+                        <a:latin typeface="Roboto"/>
+                        <a:ea typeface="Roboto"/>
+                        <a:cs typeface="Roboto"/>
+                        <a:sym typeface="Roboto"/>
+                      </a:endParaRPr>
+                    </a:p>
+                  </a:txBody>
+                  <a:tcPr marT="91425" marB="91425" marR="91425" marL="91425"/>
+                </a:tc>
+                <a:tc>
+                  <a:txBody>
+                    <a:bodyPr/>
+                    <a:lstStyle/>
+                    <a:p>
+                      <a:pPr indent="0" lvl="0" marL="0" rtl="0" algn="l">
+                        <a:spcBef>
+                          <a:spcPts val="0"/>
+                        </a:spcBef>
+                        <a:spcAft>
+                          <a:spcPts val="0"/>
+                        </a:spcAft>
+                        <a:buNone/>
+                      </a:pPr>
+                      <a:r>
+                        <a:rPr lang="en">
+                          <a:latin typeface="Roboto"/>
+                          <a:ea typeface="Roboto"/>
+                          <a:cs typeface="Roboto"/>
+                          <a:sym typeface="Roboto"/>
+                        </a:rPr>
+                        <a:t>24.26x</a:t>
+                      </a:r>
+                      <a:endParaRPr>
+                        <a:latin typeface="Roboto"/>
+                        <a:ea typeface="Roboto"/>
+                        <a:cs typeface="Roboto"/>
+                        <a:sym typeface="Roboto"/>
+                      </a:endParaRPr>
+                    </a:p>
+                  </a:txBody>
+                  <a:tcPr marT="91425" marB="91425" marR="91425" marL="91425"/>
+                </a:tc>
+                <a:tc>
+                  <a:txBody>
+                    <a:bodyPr/>
+                    <a:lstStyle/>
+                    <a:p>
+                      <a:pPr indent="0" lvl="0" marL="0" rtl="0" algn="l">
+                        <a:spcBef>
+                          <a:spcPts val="0"/>
+                        </a:spcBef>
+                        <a:spcAft>
+                          <a:spcPts val="0"/>
+                        </a:spcAft>
+                        <a:buNone/>
+                      </a:pPr>
+                      <a:r>
+                        <a:rPr lang="en">
+                          <a:latin typeface="Roboto"/>
+                          <a:ea typeface="Roboto"/>
+                          <a:cs typeface="Roboto"/>
+                          <a:sym typeface="Roboto"/>
+                        </a:rPr>
+                        <a:t>measured, course VM</a:t>
+                      </a:r>
+                      <a:endParaRPr>
+                        <a:latin typeface="Roboto"/>
+                        <a:ea typeface="Roboto"/>
+                        <a:cs typeface="Roboto"/>
+                        <a:sym typeface="Roboto"/>
+                      </a:endParaRPr>
+                    </a:p>
+                  </a:txBody>
+                  <a:tcPr marT="91425" marB="91425" marR="91425" marL="91425"/>
+                </a:tc>
+              </a:tr>
+            </a:tbl>
+          </a:graphicData>
+        </a:graphic>
+      </p:graphicFrame>
+    </p:spTree>
+  </p:cSld>
+  <p:clrMapOvr>
+    <a:masterClrMapping/>
+  </p:clrMapOvr>
+</p:sld>
+</file>
+
+<file path=ppt/slides/slide13.xml><?xml version="1.0" encoding="utf-8"?>
+<p:sld xmlns:a="http://schemas.openxmlformats.org/drawingml/2006/main" xmlns:r="http://schemas.openxmlformats.org/officeDocument/2006/relationships" xmlns:mc="http://schemas.openxmlformats.org/markup-compatibility/2006" xmlns:mv="urn:schemas-microsoft-com:mac:vml" xmlns:p="http://schemas.openxmlformats.org/presentationml/2006/main" xmlns:c="http://schemas.openxmlformats.org/drawingml/2006/chart" xmlns:dgm="http://schemas.openxmlformats.org/drawingml/2006/diagram" xmlns:o="urn:schemas-microsoft-com:office:office" xmlns:v="urn:schemas-microsoft-com:vml" xmlns:pvml="urn:schemas-microsoft-com:office:powerpoint" xmlns:com="http://schemas.openxmlformats.org/drawingml/2006/compatibility" xmlns:p14="http://schemas.microsoft.com/office/powerpoint/2010/main" xmlns:p15="http://schemas.microsoft.com/office/powerpoint/2012/main" xmlns:ahyp="http://schemas.microsoft.com/office/drawing/2018/hyperlinkcolor">
+  <p:cSld>
+    <p:spTree>
+      <p:nvGrpSpPr>
+        <p:cNvPr id="131" name="Shape 131"/>
+        <p:cNvGrpSpPr/>
+        <p:nvPr/>
+      </p:nvGrpSpPr>
+      <p:grpSpPr>
+        <a:xfrm>
+          <a:off x="0" y="0"/>
+          <a:ext cx="0" cy="0"/>
+          <a:chOff x="0" y="0"/>
+          <a:chExt cx="0" cy="0"/>
+        </a:xfrm>
+      </p:grpSpPr>
+      <p:sp>
+        <p:nvSpPr>
+          <p:cNvPr id="132" name="Google Shape;132;p22"/>
+          <p:cNvSpPr txBox="1"/>
+          <p:nvPr>
+            <p:ph type="title"/>
+          </p:nvPr>
+        </p:nvSpPr>
+        <p:spPr>
+          <a:xfrm>
+            <a:off x="365760" y="228600"/>
+            <a:ext cx="8412600" cy="1097400"/>
+          </a:xfrm>
+          <a:prstGeom prst="rect">
+            <a:avLst/>
+          </a:prstGeom>
+        </p:spPr>
+        <p:txBody>
+          <a:bodyPr anchorCtr="0" anchor="t" bIns="91425" lIns="91425" spcFirstLastPara="1" rIns="91425" wrap="square" tIns="91425">
+            <a:noAutofit/>
+          </a:bodyPr>
+          <a:lstStyle/>
+          <a:p>
+            <a:pPr indent="0" lvl="0" marL="0" rtl="0" algn="l">
+              <a:spcBef>
+                <a:spcPts val="0"/>
+              </a:spcBef>
+              <a:spcAft>
+                <a:spcPts val="0"/>
+              </a:spcAft>
+              <a:buNone/>
+            </a:pPr>
+            <a:r>
+              <a:rPr lang="en"/>
+              <a:t>What would beat Rust: the clock it takes, a wider unit mix, and a Rust host around the same hardware</a:t>
+            </a:r>
+            <a:endParaRPr/>
+          </a:p>
+        </p:txBody>
+      </p:sp>
+      <p:sp>
+        <p:nvSpPr>
+          <p:cNvPr id="133" name="Google Shape;133;p22"/>
+          <p:cNvSpPr txBox="1"/>
+          <p:nvPr>
+            <p:ph idx="12" type="sldNum"/>
+          </p:nvPr>
+        </p:nvSpPr>
+        <p:spPr>
+          <a:xfrm>
+            <a:off x="7863840" y="4773168"/>
+            <a:ext cx="914400" cy="365700"/>
+          </a:xfrm>
+          <a:prstGeom prst="rect">
+            <a:avLst/>
+          </a:prstGeom>
+        </p:spPr>
+        <p:txBody>
+          <a:bodyPr anchorCtr="0" anchor="ctr" bIns="91425" lIns="91425" spcFirstLastPara="1" rIns="91425" wrap="square" tIns="91425">
+            <a:normAutofit/>
+          </a:bodyPr>
+          <a:lstStyle/>
+          <a:p>
+            <a:pPr indent="0" lvl="0" marL="0" rtl="0" algn="r">
+              <a:spcBef>
+                <a:spcPts val="0"/>
+              </a:spcBef>
+              <a:spcAft>
+                <a:spcPts val="0"/>
+              </a:spcAft>
+              <a:buNone/>
+            </a:pPr>
+            <a:fld id="{00000000-1234-1234-1234-123412341234}" type="slidenum">
+              <a:rPr lang="en"/>
+              <a:t>‹#›</a:t>
+            </a:fld>
+            <a:endParaRPr/>
+          </a:p>
+        </p:txBody>
+      </p:sp>
+      <p:graphicFrame>
+        <p:nvGraphicFramePr>
+          <p:cNvPr id="134" name="Google Shape;134;p22"/>
+          <p:cNvGraphicFramePr/>
+          <p:nvPr/>
+        </p:nvGraphicFramePr>
+        <p:xfrm>
+          <a:off x="365760" y="1463040"/>
+          <a:ext cx="3000000" cy="3000000"/>
+        </p:xfrm>
+        <a:graphic>
+          <a:graphicData uri="http://schemas.openxmlformats.org/drawingml/2006/table">
+            <a:tbl>
+              <a:tblPr>
+                <a:noFill/>
+                <a:tableStyleId>{82F3850C-69AE-44F1-A2F3-003B56526B79}</a:tableStyleId>
+              </a:tblPr>
+              <a:tblGrid>
+                <a:gridCol w="2600325"/>
+                <a:gridCol w="2705100"/>
+                <a:gridCol w="1047750"/>
+                <a:gridCol w="2066925"/>
+              </a:tblGrid>
+              <a:tr h="485775">
+                <a:tc>
+                  <a:txBody>
+                    <a:bodyPr/>
+                    <a:lstStyle/>
+                    <a:p>
+                      <a:pPr indent="0" lvl="0" marL="0" rtl="0" algn="l">
+                        <a:spcBef>
+                          <a:spcPts val="0"/>
+                        </a:spcBef>
+                        <a:spcAft>
+                          <a:spcPts val="0"/>
+                        </a:spcAft>
+                        <a:buNone/>
+                      </a:pPr>
+                      <a:r>
+                        <a:rPr b="1" lang="en" sz="1600">
+                          <a:solidFill>
+                            <a:srgbClr val="FFFFFF"/>
+                          </a:solidFill>
+                          <a:latin typeface="Roboto"/>
+                          <a:ea typeface="Roboto"/>
+                          <a:cs typeface="Roboto"/>
+                          <a:sym typeface="Roboto"/>
+                        </a:rPr>
+                        <a:t>Projection (not a measurement)</a:t>
+                      </a:r>
+                      <a:endParaRPr b="1" sz="1600">
+                        <a:solidFill>
+                          <a:srgbClr val="FFFFFF"/>
+                        </a:solidFill>
+                        <a:latin typeface="Roboto"/>
+                        <a:ea typeface="Roboto"/>
+                        <a:cs typeface="Roboto"/>
+                        <a:sym typeface="Roboto"/>
+                      </a:endParaRPr>
+                    </a:p>
+                  </a:txBody>
+                  <a:tcPr marT="91425" marB="91425" marR="91425" marL="91425">
+                    <a:solidFill>
+                      <a:srgbClr val="1F4E79"/>
+                    </a:solidFill>
+                  </a:tcPr>
+                </a:tc>
+                <a:tc>
+                  <a:txBody>
+                    <a:bodyPr/>
+                    <a:lstStyle/>
+                    <a:p>
+                      <a:pPr indent="0" lvl="0" marL="0" rtl="0" algn="l">
+                        <a:spcBef>
+                          <a:spcPts val="0"/>
+                        </a:spcBef>
+                        <a:spcAft>
+                          <a:spcPts val="0"/>
+                        </a:spcAft>
+                        <a:buNone/>
+                      </a:pPr>
+                      <a:r>
+                        <a:rPr b="1" lang="en" sz="1600">
+                          <a:solidFill>
+                            <a:srgbClr val="FFFFFF"/>
+                          </a:solidFill>
+                          <a:latin typeface="Roboto"/>
+                          <a:ea typeface="Roboto"/>
+                          <a:cs typeface="Roboto"/>
+                          <a:sym typeface="Roboto"/>
+                        </a:rPr>
+                        <a:t>Compute time</a:t>
+                      </a:r>
+                      <a:endParaRPr b="1" sz="1600">
+                        <a:solidFill>
+                          <a:srgbClr val="FFFFFF"/>
+                        </a:solidFill>
+                        <a:latin typeface="Roboto"/>
+                        <a:ea typeface="Roboto"/>
+                        <a:cs typeface="Roboto"/>
+                        <a:sym typeface="Roboto"/>
+                      </a:endParaRPr>
+                    </a:p>
+                  </a:txBody>
+                  <a:tcPr marT="91425" marB="91425" marR="91425" marL="91425">
+                    <a:solidFill>
+                      <a:srgbClr val="1F4E79"/>
+                    </a:solidFill>
+                  </a:tcPr>
+                </a:tc>
+                <a:tc>
+                  <a:txBody>
+                    <a:bodyPr/>
+                    <a:lstStyle/>
+                    <a:p>
+                      <a:pPr indent="0" lvl="0" marL="0" rtl="0" algn="l">
+                        <a:spcBef>
+                          <a:spcPts val="0"/>
+                        </a:spcBef>
+                        <a:spcAft>
+                          <a:spcPts val="0"/>
+                        </a:spcAft>
+                        <a:buNone/>
+                      </a:pPr>
+                      <a:r>
+                        <a:rPr b="1" lang="en" sz="1600">
+                          <a:solidFill>
+                            <a:srgbClr val="FFFFFF"/>
+                          </a:solidFill>
+                          <a:latin typeface="Roboto"/>
+                          <a:ea typeface="Roboto"/>
+                          <a:cs typeface="Roboto"/>
+                          <a:sym typeface="Roboto"/>
+                        </a:rPr>
+                        <a:t>vs Rust 9.530 ms</a:t>
+                      </a:r>
+                      <a:endParaRPr b="1" sz="1600">
+                        <a:solidFill>
+                          <a:srgbClr val="FFFFFF"/>
+                        </a:solidFill>
+                        <a:latin typeface="Roboto"/>
+                        <a:ea typeface="Roboto"/>
+                        <a:cs typeface="Roboto"/>
+                        <a:sym typeface="Roboto"/>
+                      </a:endParaRPr>
+                    </a:p>
+                  </a:txBody>
+                  <a:tcPr marT="91425" marB="91425" marR="91425" marL="91425">
+                    <a:solidFill>
+                      <a:srgbClr val="1F4E79"/>
+                    </a:solidFill>
+                  </a:tcPr>
+                </a:tc>
+                <a:tc>
+                  <a:txBody>
+                    <a:bodyPr/>
+                    <a:lstStyle/>
+                    <a:p>
+                      <a:pPr indent="0" lvl="0" marL="0" rtl="0" algn="l">
+                        <a:spcBef>
+                          <a:spcPts val="0"/>
+                        </a:spcBef>
+                        <a:spcAft>
+                          <a:spcPts val="0"/>
+                        </a:spcAft>
+                        <a:buNone/>
+                      </a:pPr>
+                      <a:r>
+                        <a:rPr b="1" lang="en" sz="1600">
+                          <a:solidFill>
+                            <a:srgbClr val="FFFFFF"/>
+                          </a:solidFill>
+                          <a:latin typeface="Roboto"/>
+                          <a:ea typeface="Roboto"/>
+                          <a:cs typeface="Roboto"/>
+                          <a:sym typeface="Roboto"/>
+                        </a:rPr>
+                        <a:t>What it assumes</a:t>
+                      </a:r>
+                      <a:endParaRPr b="1" sz="1600">
+                        <a:solidFill>
+                          <a:srgbClr val="FFFFFF"/>
+                        </a:solidFill>
+                        <a:latin typeface="Roboto"/>
+                        <a:ea typeface="Roboto"/>
+                        <a:cs typeface="Roboto"/>
+                        <a:sym typeface="Roboto"/>
+                      </a:endParaRPr>
+                    </a:p>
+                  </a:txBody>
+                  <a:tcPr marT="91425" marB="91425" marR="91425" marL="91425">
+                    <a:solidFill>
+                      <a:srgbClr val="1F4E79"/>
+                    </a:solidFill>
+                  </a:tcPr>
+                </a:tc>
+              </a:tr>
+              <a:tr h="428625">
+                <a:tc>
+                  <a:txBody>
+                    <a:bodyPr/>
+                    <a:lstStyle/>
+                    <a:p>
+                      <a:pPr indent="0" lvl="0" marL="0" rtl="0" algn="l">
+                        <a:spcBef>
+                          <a:spcPts val="0"/>
+                        </a:spcBef>
+                        <a:spcAft>
+                          <a:spcPts val="0"/>
+                        </a:spcAft>
+                        <a:buNone/>
+                      </a:pPr>
+                      <a:r>
+                        <a:rPr lang="en">
+                          <a:latin typeface="Roboto"/>
+                          <a:ea typeface="Roboto"/>
+                          <a:cs typeface="Roboto"/>
+                          <a:sym typeface="Roboto"/>
+                        </a:rPr>
+                        <a:t>Clock at which grape compute alone matches Rust</a:t>
+                      </a:r>
+                      <a:endParaRPr>
+                        <a:latin typeface="Roboto"/>
+                        <a:ea typeface="Roboto"/>
+                        <a:cs typeface="Roboto"/>
+                        <a:sym typeface="Roboto"/>
+                      </a:endParaRPr>
+                    </a:p>
+                  </a:txBody>
+                  <a:tcPr marT="91425" marB="91425" marR="91425" marL="91425"/>
+                </a:tc>
+                <a:tc>
+                  <a:txBody>
+                    <a:bodyPr/>
+                    <a:lstStyle/>
+                    <a:p>
+                      <a:pPr indent="0" lvl="0" marL="0" rtl="0" algn="l">
+                        <a:spcBef>
+                          <a:spcPts val="0"/>
+                        </a:spcBef>
+                        <a:spcAft>
+                          <a:spcPts val="0"/>
+                        </a:spcAft>
+                        <a:buNone/>
+                      </a:pPr>
+                      <a:r>
+                        <a:rPr lang="en">
+                          <a:latin typeface="Roboto"/>
+                          <a:ea typeface="Roboto"/>
+                          <a:cs typeface="Roboto"/>
+                          <a:sym typeface="Roboto"/>
+                        </a:rPr>
+                        <a:t>2.48 Mcycles / 9.530 ms ≈ 260 MHz</a:t>
+                      </a:r>
+                      <a:endParaRPr>
+                        <a:latin typeface="Roboto"/>
+                        <a:ea typeface="Roboto"/>
+                        <a:cs typeface="Roboto"/>
+                        <a:sym typeface="Roboto"/>
+                      </a:endParaRPr>
+                    </a:p>
+                  </a:txBody>
+                  <a:tcPr marT="91425" marB="91425" marR="91425" marL="91425"/>
+                </a:tc>
+                <a:tc>
+                  <a:txBody>
+                    <a:bodyPr/>
+                    <a:lstStyle/>
+                    <a:p>
+                      <a:pPr indent="0" lvl="0" marL="0" rtl="0" algn="l">
+                        <a:spcBef>
+                          <a:spcPts val="0"/>
+                        </a:spcBef>
+                        <a:spcAft>
+                          <a:spcPts val="0"/>
+                        </a:spcAft>
+                        <a:buNone/>
+                      </a:pPr>
+                      <a:r>
+                        <a:rPr lang="en">
+                          <a:latin typeface="Roboto"/>
+                          <a:ea typeface="Roboto"/>
+                          <a:cs typeface="Roboto"/>
+                          <a:sym typeface="Roboto"/>
+                        </a:rPr>
+                        <a:t>parity</a:t>
+                      </a:r>
+                      <a:endParaRPr>
+                        <a:latin typeface="Roboto"/>
+                        <a:ea typeface="Roboto"/>
+                        <a:cs typeface="Roboto"/>
+                        <a:sym typeface="Roboto"/>
+                      </a:endParaRPr>
+                    </a:p>
+                  </a:txBody>
+                  <a:tcPr marT="91425" marB="91425" marR="91425" marL="91425"/>
+                </a:tc>
+                <a:tc>
+                  <a:txBody>
+                    <a:bodyPr/>
+                    <a:lstStyle/>
+                    <a:p>
+                      <a:pPr indent="0" lvl="0" marL="0" rtl="0" algn="l">
+                        <a:spcBef>
+                          <a:spcPts val="0"/>
+                        </a:spcBef>
+                        <a:spcAft>
+                          <a:spcPts val="0"/>
+                        </a:spcAft>
+                        <a:buNone/>
+                      </a:pPr>
+                      <a:r>
+                        <a:rPr lang="en">
+                          <a:latin typeface="Roboto"/>
+                          <a:ea typeface="Roboto"/>
+                          <a:cs typeface="Roboto"/>
+                          <a:sym typeface="Roboto"/>
+                        </a:rPr>
+                        <a:t>13.4x the post-CTS clock; zero residual</a:t>
+                      </a:r>
+                      <a:endParaRPr>
+                        <a:latin typeface="Roboto"/>
+                        <a:ea typeface="Roboto"/>
+                        <a:cs typeface="Roboto"/>
+                        <a:sym typeface="Roboto"/>
+                      </a:endParaRPr>
+                    </a:p>
+                  </a:txBody>
+                  <a:tcPr marT="91425" marB="91425" marR="91425" marL="91425"/>
+                </a:tc>
+              </a:tr>
+              <a:tr h="428625">
+                <a:tc>
+                  <a:txBody>
+                    <a:bodyPr/>
+                    <a:lstStyle/>
+                    <a:p>
+                      <a:pPr indent="0" lvl="0" marL="0" rtl="0" algn="l">
+                        <a:spcBef>
+                          <a:spcPts val="0"/>
+                        </a:spcBef>
+                        <a:spcAft>
+                          <a:spcPts val="0"/>
+                        </a:spcAft>
+                        <a:buNone/>
+                      </a:pPr>
+                      <a:r>
+                        <a:rPr lang="en">
+                          <a:latin typeface="Roboto"/>
+                          <a:ea typeface="Roboto"/>
+                          <a:cs typeface="Roboto"/>
+                          <a:sym typeface="Roboto"/>
+                        </a:rPr>
+                        <a:t>grape at the 50 MHz target</a:t>
+                      </a:r>
+                      <a:endParaRPr>
+                        <a:latin typeface="Roboto"/>
+                        <a:ea typeface="Roboto"/>
+                        <a:cs typeface="Roboto"/>
+                        <a:sym typeface="Roboto"/>
+                      </a:endParaRPr>
+                    </a:p>
+                  </a:txBody>
+                  <a:tcPr marT="91425" marB="91425" marR="91425" marL="91425"/>
+                </a:tc>
+                <a:tc>
+                  <a:txBody>
+                    <a:bodyPr/>
+                    <a:lstStyle/>
+                    <a:p>
+                      <a:pPr indent="0" lvl="0" marL="0" rtl="0" algn="l">
+                        <a:spcBef>
+                          <a:spcPts val="0"/>
+                        </a:spcBef>
+                        <a:spcAft>
+                          <a:spcPts val="0"/>
+                        </a:spcAft>
+                        <a:buNone/>
+                      </a:pPr>
+                      <a:r>
+                        <a:rPr lang="en">
+                          <a:latin typeface="Roboto"/>
+                          <a:ea typeface="Roboto"/>
+                          <a:cs typeface="Roboto"/>
+                          <a:sym typeface="Roboto"/>
+                        </a:rPr>
+                        <a:t>49.6 ms (+11.6 ms residual = 61.16 ms, 3.78x vs original)</a:t>
+                      </a:r>
+                      <a:endParaRPr>
+                        <a:latin typeface="Roboto"/>
+                        <a:ea typeface="Roboto"/>
+                        <a:cs typeface="Roboto"/>
+                        <a:sym typeface="Roboto"/>
+                      </a:endParaRPr>
+                    </a:p>
+                  </a:txBody>
+                  <a:tcPr marT="91425" marB="91425" marR="91425" marL="91425"/>
+                </a:tc>
+                <a:tc>
+                  <a:txBody>
+                    <a:bodyPr/>
+                    <a:lstStyle/>
+                    <a:p>
+                      <a:pPr indent="0" lvl="0" marL="0" rtl="0" algn="l">
+                        <a:spcBef>
+                          <a:spcPts val="0"/>
+                        </a:spcBef>
+                        <a:spcAft>
+                          <a:spcPts val="0"/>
+                        </a:spcAft>
+                        <a:buNone/>
+                      </a:pPr>
+                      <a:r>
+                        <a:rPr lang="en">
+                          <a:latin typeface="Roboto"/>
+                          <a:ea typeface="Roboto"/>
+                          <a:cs typeface="Roboto"/>
+                          <a:sym typeface="Roboto"/>
+                        </a:rPr>
+                        <a:t>6.42x slower</a:t>
+                      </a:r>
+                      <a:endParaRPr>
+                        <a:latin typeface="Roboto"/>
+                        <a:ea typeface="Roboto"/>
+                        <a:cs typeface="Roboto"/>
+                        <a:sym typeface="Roboto"/>
+                      </a:endParaRPr>
+                    </a:p>
+                  </a:txBody>
+                  <a:tcPr marT="91425" marB="91425" marR="91425" marL="91425"/>
+                </a:tc>
+                <a:tc>
+                  <a:txBody>
+                    <a:bodyPr/>
+                    <a:lstStyle/>
+                    <a:p>
+                      <a:pPr indent="0" lvl="0" marL="0" rtl="0" algn="l">
+                        <a:spcBef>
+                          <a:spcPts val="0"/>
+                        </a:spcBef>
+                        <a:spcAft>
+                          <a:spcPts val="0"/>
+                        </a:spcAft>
+                        <a:buNone/>
+                      </a:pPr>
+                      <a:r>
+                        <a:rPr lang="en">
+                          <a:latin typeface="Roboto"/>
+                          <a:ea typeface="Roboto"/>
+                          <a:cs typeface="Roboto"/>
+                          <a:sym typeface="Roboto"/>
+                        </a:rPr>
+                        <a:t>timing closure we did not reach</a:t>
+                      </a:r>
+                      <a:endParaRPr>
+                        <a:latin typeface="Roboto"/>
+                        <a:ea typeface="Roboto"/>
+                        <a:cs typeface="Roboto"/>
+                        <a:sym typeface="Roboto"/>
+                      </a:endParaRPr>
+                    </a:p>
+                  </a:txBody>
+                  <a:tcPr marT="91425" marB="91425" marR="91425" marL="91425"/>
+                </a:tc>
+              </a:tr>
+              <a:tr h="428625">
+                <a:tc>
+                  <a:txBody>
+                    <a:bodyPr/>
+                    <a:lstStyle/>
+                    <a:p>
+                      <a:pPr indent="0" lvl="0" marL="0" rtl="0" algn="l">
+                        <a:spcBef>
+                          <a:spcPts val="0"/>
+                        </a:spcBef>
+                        <a:spcAft>
+                          <a:spcPts val="0"/>
+                        </a:spcAft>
+                        <a:buNone/>
+                      </a:pPr>
+                      <a:r>
+                        <a:rPr lang="en">
+                          <a:latin typeface="Roboto"/>
+                          <a:ea typeface="Roboto"/>
+                          <a:cs typeface="Roboto"/>
+                          <a:sym typeface="Roboto"/>
+                        </a:rPr>
+                        <a:t>3 add + 4 mul, schedule model</a:t>
+                      </a:r>
+                      <a:endParaRPr>
+                        <a:latin typeface="Roboto"/>
+                        <a:ea typeface="Roboto"/>
+                        <a:cs typeface="Roboto"/>
+                        <a:sym typeface="Roboto"/>
+                      </a:endParaRPr>
+                    </a:p>
+                  </a:txBody>
+                  <a:tcPr marT="91425" marB="91425" marR="91425" marL="91425"/>
+                </a:tc>
+                <a:tc>
+                  <a:txBody>
+                    <a:bodyPr/>
+                    <a:lstStyle/>
+                    <a:p>
+                      <a:pPr indent="0" lvl="0" marL="0" rtl="0" algn="l">
+                        <a:spcBef>
+                          <a:spcPts val="0"/>
+                        </a:spcBef>
+                        <a:spcAft>
+                          <a:spcPts val="0"/>
+                        </a:spcAft>
+                        <a:buNone/>
+                      </a:pPr>
+                      <a:r>
+                        <a:rPr lang="en">
+                          <a:latin typeface="Roboto"/>
+                          <a:ea typeface="Roboto"/>
+                          <a:cs typeface="Roboto"/>
+                          <a:sym typeface="Roboto"/>
+                        </a:rPr>
+                        <a:t>117 cycles/step → 120.2 ms at 19.46 MHz</a:t>
+                      </a:r>
+                      <a:endParaRPr>
+                        <a:latin typeface="Roboto"/>
+                        <a:ea typeface="Roboto"/>
+                        <a:cs typeface="Roboto"/>
+                        <a:sym typeface="Roboto"/>
+                      </a:endParaRPr>
+                    </a:p>
+                  </a:txBody>
+                  <a:tcPr marT="91425" marB="91425" marR="91425" marL="91425"/>
+                </a:tc>
+                <a:tc>
+                  <a:txBody>
+                    <a:bodyPr/>
+                    <a:lstStyle/>
+                    <a:p>
+                      <a:pPr indent="0" lvl="0" marL="0" rtl="0" algn="l">
+                        <a:spcBef>
+                          <a:spcPts val="0"/>
+                        </a:spcBef>
+                        <a:spcAft>
+                          <a:spcPts val="0"/>
+                        </a:spcAft>
+                        <a:buNone/>
+                      </a:pPr>
+                      <a:r>
+                        <a:rPr lang="en">
+                          <a:latin typeface="Roboto"/>
+                          <a:ea typeface="Roboto"/>
+                          <a:cs typeface="Roboto"/>
+                          <a:sym typeface="Roboto"/>
+                        </a:rPr>
+                        <a:t>12.6x slower</a:t>
+                      </a:r>
+                      <a:endParaRPr>
+                        <a:latin typeface="Roboto"/>
+                        <a:ea typeface="Roboto"/>
+                        <a:cs typeface="Roboto"/>
+                        <a:sym typeface="Roboto"/>
+                      </a:endParaRPr>
+                    </a:p>
+                  </a:txBody>
+                  <a:tcPr marT="91425" marB="91425" marR="91425" marL="91425"/>
+                </a:tc>
+                <a:tc>
+                  <a:txBody>
+                    <a:bodyPr/>
+                    <a:lstStyle/>
+                    <a:p>
+                      <a:pPr indent="0" lvl="0" marL="0" rtl="0" algn="l">
+                        <a:spcBef>
+                          <a:spcPts val="0"/>
+                        </a:spcBef>
+                        <a:spcAft>
+                          <a:spcPts val="0"/>
+                        </a:spcAft>
+                        <a:buNone/>
+                      </a:pPr>
+                      <a:r>
+                        <a:rPr lang="en">
+                          <a:latin typeface="Roboto"/>
+                          <a:ea typeface="Roboto"/>
+                          <a:cs typeface="Roboto"/>
+                          <a:sym typeface="Roboto"/>
+                        </a:rPr>
+                        <a:t>model only; needs 245 MHz for parity</a:t>
+                      </a:r>
+                      <a:endParaRPr>
+                        <a:latin typeface="Roboto"/>
+                        <a:ea typeface="Roboto"/>
+                        <a:cs typeface="Roboto"/>
+                        <a:sym typeface="Roboto"/>
+                      </a:endParaRPr>
+                    </a:p>
+                  </a:txBody>
+                  <a:tcPr marT="91425" marB="91425" marR="91425" marL="91425"/>
+                </a:tc>
+              </a:tr>
+              <a:tr h="428625">
+                <a:tc>
+                  <a:txBody>
+                    <a:bodyPr/>
+                    <a:lstStyle/>
+                    <a:p>
+                      <a:pPr indent="0" lvl="0" marL="0" rtl="0" algn="l">
+                        <a:spcBef>
+                          <a:spcPts val="0"/>
+                        </a:spcBef>
+                        <a:spcAft>
+                          <a:spcPts val="0"/>
+                        </a:spcAft>
+                        <a:buNone/>
+                      </a:pPr>
+                      <a:r>
+                        <a:rPr lang="en">
+                          <a:latin typeface="Roboto"/>
+                          <a:ea typeface="Roboto"/>
+                          <a:cs typeface="Roboto"/>
+                          <a:sym typeface="Roboto"/>
+                        </a:rPr>
+                        <a:t>Rust host + same hardware at 19.46 MHz</a:t>
+                      </a:r>
+                      <a:endParaRPr>
+                        <a:latin typeface="Roboto"/>
+                        <a:ea typeface="Roboto"/>
+                        <a:cs typeface="Roboto"/>
+                        <a:sym typeface="Roboto"/>
+                      </a:endParaRPr>
+                    </a:p>
+                  </a:txBody>
+                  <a:tcPr marT="91425" marB="91425" marR="91425" marL="91425"/>
+                </a:tc>
+                <a:tc>
+                  <a:txBody>
+                    <a:bodyPr/>
+                    <a:lstStyle/>
+                    <a:p>
+                      <a:pPr indent="0" lvl="0" marL="0" rtl="0" algn="l">
+                        <a:spcBef>
+                          <a:spcPts val="0"/>
+                        </a:spcBef>
+                        <a:spcAft>
+                          <a:spcPts val="0"/>
+                        </a:spcAft>
+                        <a:buNone/>
+                      </a:pPr>
+                      <a:r>
+                        <a:rPr lang="en">
+                          <a:latin typeface="Roboto"/>
+                          <a:ea typeface="Roboto"/>
+                          <a:cs typeface="Roboto"/>
+                          <a:sym typeface="Roboto"/>
+                        </a:rPr>
+                        <a:t>127.4 + 0.48 ms = 127.9 ms</a:t>
+                      </a:r>
+                      <a:endParaRPr>
+                        <a:latin typeface="Roboto"/>
+                        <a:ea typeface="Roboto"/>
+                        <a:cs typeface="Roboto"/>
+                        <a:sym typeface="Roboto"/>
+                      </a:endParaRPr>
+                    </a:p>
+                  </a:txBody>
+                  <a:tcPr marT="91425" marB="91425" marR="91425" marL="91425"/>
+                </a:tc>
+                <a:tc>
+                  <a:txBody>
+                    <a:bodyPr/>
+                    <a:lstStyle/>
+                    <a:p>
+                      <a:pPr indent="0" lvl="0" marL="0" rtl="0" algn="l">
+                        <a:spcBef>
+                          <a:spcPts val="0"/>
+                        </a:spcBef>
+                        <a:spcAft>
+                          <a:spcPts val="0"/>
+                        </a:spcAft>
+                        <a:buNone/>
+                      </a:pPr>
+                      <a:r>
+                        <a:rPr lang="en">
+                          <a:latin typeface="Roboto"/>
+                          <a:ea typeface="Roboto"/>
+                          <a:cs typeface="Roboto"/>
+                          <a:sym typeface="Roboto"/>
+                        </a:rPr>
+                        <a:t>13.4x slower</a:t>
+                      </a:r>
+                      <a:endParaRPr>
+                        <a:latin typeface="Roboto"/>
+                        <a:ea typeface="Roboto"/>
+                        <a:cs typeface="Roboto"/>
+                        <a:sym typeface="Roboto"/>
+                      </a:endParaRPr>
+                    </a:p>
+                  </a:txBody>
+                  <a:tcPr marT="91425" marB="91425" marR="91425" marL="91425"/>
+                </a:tc>
+                <a:tc>
+                  <a:txBody>
+                    <a:bodyPr/>
+                    <a:lstStyle/>
+                    <a:p>
+                      <a:pPr indent="0" lvl="0" marL="0" rtl="0" algn="l">
+                        <a:spcBef>
+                          <a:spcPts val="0"/>
+                        </a:spcBef>
+                        <a:spcAft>
+                          <a:spcPts val="0"/>
+                        </a:spcAft>
+                        <a:buNone/>
+                      </a:pPr>
+                      <a:r>
+                        <a:rPr lang="en">
+                          <a:latin typeface="Roboto"/>
+                          <a:ea typeface="Roboto"/>
+                          <a:cs typeface="Roboto"/>
+                          <a:sym typeface="Roboto"/>
+                        </a:rPr>
+                        <a:t>residual scales to 5% of the Rust run</a:t>
+                      </a:r>
+                      <a:endParaRPr>
+                        <a:latin typeface="Roboto"/>
+                        <a:ea typeface="Roboto"/>
+                        <a:cs typeface="Roboto"/>
+                        <a:sym typeface="Roboto"/>
+                      </a:endParaRPr>
+                    </a:p>
+                  </a:txBody>
+                  <a:tcPr marT="91425" marB="91425" marR="91425" marL="91425"/>
+                </a:tc>
+              </a:tr>
+              <a:tr h="428625">
+                <a:tc>
+                  <a:txBody>
+                    <a:bodyPr/>
+                    <a:lstStyle/>
+                    <a:p>
+                      <a:pPr indent="0" lvl="0" marL="0" rtl="0" algn="l">
+                        <a:spcBef>
+                          <a:spcPts val="0"/>
+                        </a:spcBef>
+                        <a:spcAft>
+                          <a:spcPts val="0"/>
+                        </a:spcAft>
+                        <a:buNone/>
+                      </a:pPr>
+                      <a:r>
+                        <a:rPr lang="en">
+                          <a:latin typeface="Roboto"/>
+                          <a:ea typeface="Roboto"/>
+                          <a:cs typeface="Roboto"/>
+                          <a:sym typeface="Roboto"/>
+                        </a:rPr>
+                        <a:t>N = 100 with 24 add + 24 mul + 2 sqrt + 2 rcp</a:t>
+                      </a:r>
+                      <a:endParaRPr>
+                        <a:latin typeface="Roboto"/>
+                        <a:ea typeface="Roboto"/>
+                        <a:cs typeface="Roboto"/>
+                        <a:sym typeface="Roboto"/>
+                      </a:endParaRPr>
+                    </a:p>
+                  </a:txBody>
+                  <a:tcPr marT="91425" marB="91425" marR="91425" marL="91425"/>
+                </a:tc>
+                <a:tc>
+                  <a:txBody>
+                    <a:bodyPr/>
+                    <a:lstStyle/>
+                    <a:p>
+                      <a:pPr indent="0" lvl="0" marL="0" rtl="0" algn="l">
+                        <a:spcBef>
+                          <a:spcPts val="0"/>
+                        </a:spcBef>
+                        <a:spcAft>
+                          <a:spcPts val="0"/>
+                        </a:spcAft>
+                        <a:buNone/>
+                      </a:pPr>
+                      <a:r>
+                        <a:rPr lang="en">
+                          <a:latin typeface="Roboto"/>
+                          <a:ea typeface="Roboto"/>
+                          <a:cs typeface="Roboto"/>
+                          <a:sym typeface="Roboto"/>
+                        </a:rPr>
+                        <a:t>0.029 µs/pair at 19.46 MHz</a:t>
+                      </a:r>
+                      <a:endParaRPr>
+                        <a:latin typeface="Roboto"/>
+                        <a:ea typeface="Roboto"/>
+                        <a:cs typeface="Roboto"/>
+                        <a:sym typeface="Roboto"/>
+                      </a:endParaRPr>
+                    </a:p>
+                  </a:txBody>
+                  <a:tcPr marT="91425" marB="91425" marR="91425" marL="91425"/>
+                </a:tc>
+                <a:tc>
+                  <a:txBody>
+                    <a:bodyPr/>
+                    <a:lstStyle/>
+                    <a:p>
+                      <a:pPr indent="0" lvl="0" marL="0" rtl="0" algn="l">
+                        <a:spcBef>
+                          <a:spcPts val="0"/>
+                        </a:spcBef>
+                        <a:spcAft>
+                          <a:spcPts val="0"/>
+                        </a:spcAft>
+                        <a:buNone/>
+                      </a:pPr>
+                      <a:r>
+                        <a:rPr lang="en">
+                          <a:latin typeface="Roboto"/>
+                          <a:ea typeface="Roboto"/>
+                          <a:cs typeface="Roboto"/>
+                          <a:sym typeface="Roboto"/>
+                        </a:rPr>
+                        <a:t>1.6x faster</a:t>
+                      </a:r>
+                      <a:endParaRPr>
+                        <a:latin typeface="Roboto"/>
+                        <a:ea typeface="Roboto"/>
+                        <a:cs typeface="Roboto"/>
+                        <a:sym typeface="Roboto"/>
+                      </a:endParaRPr>
+                    </a:p>
+                  </a:txBody>
+                  <a:tcPr marT="91425" marB="91425" marR="91425" marL="91425"/>
+                </a:tc>
+                <a:tc>
+                  <a:txBody>
+                    <a:bodyPr/>
+                    <a:lstStyle/>
+                    <a:p>
+                      <a:pPr indent="0" lvl="0" marL="0" rtl="0" algn="l">
+                        <a:spcBef>
+                          <a:spcPts val="0"/>
+                        </a:spcBef>
+                        <a:spcAft>
+                          <a:spcPts val="0"/>
+                        </a:spcAft>
+                        <a:buNone/>
+                      </a:pPr>
+                      <a:r>
+                        <a:rPr lang="en">
+                          <a:latin typeface="Roboto"/>
+                          <a:ea typeface="Roboto"/>
+                          <a:cs typeface="Roboto"/>
+                          <a:sym typeface="Roboto"/>
+                        </a:rPr>
+                        <a:t>clock survives 8x wider issue; SRAM state</a:t>
+                      </a:r>
+                      <a:endParaRPr>
+                        <a:latin typeface="Roboto"/>
+                        <a:ea typeface="Roboto"/>
+                        <a:cs typeface="Roboto"/>
+                        <a:sym typeface="Roboto"/>
+                      </a:endParaRPr>
+                    </a:p>
+                  </a:txBody>
+                  <a:tcPr marT="91425" marB="91425" marR="91425" marL="91425"/>
+                </a:tc>
+              </a:tr>
+            </a:tbl>
+          </a:graphicData>
+        </a:graphic>
+      </p:graphicFrame>
+    </p:spTree>
+  </p:cSld>
+  <p:clrMapOvr>
+    <a:masterClrMapping/>
+  </p:clrMapOvr>
+</p:sld>
+</file>
+
 <file path=ppt/slides/slide2.xml><?xml version="1.0" encoding="utf-8"?>
 <p:sld xmlns:a="http://schemas.openxmlformats.org/drawingml/2006/main" xmlns:r="http://schemas.openxmlformats.org/officeDocument/2006/relationships" xmlns:mc="http://schemas.openxmlformats.org/markup-compatibility/2006" xmlns:mv="urn:schemas-microsoft-com:mac:vml" xmlns:p="http://schemas.openxmlformats.org/presentationml/2006/main" xmlns:c="http://schemas.openxmlformats.org/drawingml/2006/chart" xmlns:dgm="http://schemas.openxmlformats.org/drawingml/2006/diagram" xmlns:o="urn:schemas-microsoft-com:office:office" xmlns:v="urn:schemas-microsoft-com:vml" xmlns:pvml="urn:schemas-microsoft-com:office:powerpoint" xmlns:com="http://schemas.openxmlformats.org/drawingml/2006/compatibility" xmlns:p14="http://schemas.microsoft.com/office/powerpoint/2010/main" xmlns:p15="http://schemas.microsoft.com/office/powerpoint/2012/main" xmlns:ahyp="http://schemas.microsoft.com/office/drawing/2018/hyperlinkcolor">
   <p:cSld>
@@ -6110,7 +10200,7 @@
         <p:spPr>
           <a:xfrm>
             <a:off x="365760" y="228600"/>
-            <a:ext cx="8412600" cy="1005900"/>
+            <a:ext cx="8412600" cy="1097400"/>
           </a:xfrm>
           <a:prstGeom prst="rect">
             <a:avLst/>
@@ -6194,7 +10284,7 @@
             <a:tbl>
               <a:tblPr>
                 <a:noFill/>
-                <a:tableStyleId>{AF7225B2-891F-4798-87D7-A03E2F8B8764}</a:tableStyleId>
+                <a:tableStyleId>{86497FD9-E7ED-435D-BB61-336411573E9E}</a:tableStyleId>
               </a:tblPr>
               <a:tblGrid>
                 <a:gridCol w="2804150"/>
@@ -6675,7 +10765,7 @@
         <p:spPr>
           <a:xfrm>
             <a:off x="365760" y="228600"/>
-            <a:ext cx="8412600" cy="1005900"/>
+            <a:ext cx="8412600" cy="1097400"/>
           </a:xfrm>
           <a:prstGeom prst="rect">
             <a:avLst/>
@@ -6760,7 +10850,7 @@
         </p:blipFill>
         <p:spPr>
           <a:xfrm>
-            <a:off x="365760" y="1371600"/>
+            <a:off x="365760" y="1463040"/>
             <a:ext cx="8412481" cy="2305385"/>
           </a:xfrm>
           <a:prstGeom prst="rect">
@@ -6808,7 +10898,7 @@
         <p:spPr>
           <a:xfrm>
             <a:off x="365760" y="228600"/>
-            <a:ext cx="8412600" cy="1005900"/>
+            <a:ext cx="8412600" cy="1097400"/>
           </a:xfrm>
           <a:prstGeom prst="rect">
             <a:avLst/>
@@ -6893,7 +10983,7 @@
         </p:blipFill>
         <p:spPr>
           <a:xfrm>
-            <a:off x="365760" y="1389888"/>
+            <a:off x="365760" y="1463040"/>
             <a:ext cx="8412480" cy="2496776"/>
           </a:xfrm>
           <a:prstGeom prst="rect">
@@ -6941,7 +11031,7 @@
         <p:spPr>
           <a:xfrm>
             <a:off x="365760" y="228600"/>
-            <a:ext cx="8412600" cy="1005900"/>
+            <a:ext cx="8412600" cy="1097400"/>
           </a:xfrm>
           <a:prstGeom prst="rect">
             <a:avLst/>
@@ -7026,8 +11116,2204 @@
         </p:blipFill>
         <p:spPr>
           <a:xfrm>
-            <a:off x="365760" y="1371600"/>
+            <a:off x="365760" y="1463040"/>
             <a:ext cx="8412480" cy="2079196"/>
+          </a:xfrm>
+          <a:prstGeom prst="rect">
+            <a:avLst/>
+          </a:prstGeom>
+          <a:noFill/>
+          <a:ln>
+            <a:noFill/>
+          </a:ln>
+        </p:spPr>
+      </p:pic>
+    </p:spTree>
+  </p:cSld>
+  <p:clrMapOvr>
+    <a:masterClrMapping/>
+  </p:clrMapOvr>
+</p:sld>
+</file>
+
+<file path=ppt/slides/slide6.xml><?xml version="1.0" encoding="utf-8"?>
+<p:sld xmlns:a="http://schemas.openxmlformats.org/drawingml/2006/main" xmlns:r="http://schemas.openxmlformats.org/officeDocument/2006/relationships" xmlns:mc="http://schemas.openxmlformats.org/markup-compatibility/2006" xmlns:mv="urn:schemas-microsoft-com:mac:vml" xmlns:p="http://schemas.openxmlformats.org/presentationml/2006/main" xmlns:c="http://schemas.openxmlformats.org/drawingml/2006/chart" xmlns:dgm="http://schemas.openxmlformats.org/drawingml/2006/diagram" xmlns:o="urn:schemas-microsoft-com:office:office" xmlns:v="urn:schemas-microsoft-com:vml" xmlns:pvml="urn:schemas-microsoft-com:office:powerpoint" xmlns:com="http://schemas.openxmlformats.org/drawingml/2006/compatibility" xmlns:p14="http://schemas.microsoft.com/office/powerpoint/2010/main" xmlns:p15="http://schemas.microsoft.com/office/powerpoint/2012/main" xmlns:ahyp="http://schemas.microsoft.com/office/drawing/2018/hyperlinkcolor">
+  <p:cSld>
+    <p:spTree>
+      <p:nvGrpSpPr>
+        <p:cNvPr id="82" name="Shape 82"/>
+        <p:cNvGrpSpPr/>
+        <p:nvPr/>
+      </p:nvGrpSpPr>
+      <p:grpSpPr>
+        <a:xfrm>
+          <a:off x="0" y="0"/>
+          <a:ext cx="0" cy="0"/>
+          <a:chOff x="0" y="0"/>
+          <a:chExt cx="0" cy="0"/>
+        </a:xfrm>
+      </p:grpSpPr>
+      <p:sp>
+        <p:nvSpPr>
+          <p:cNvPr id="83" name="Google Shape;83;p15"/>
+          <p:cNvSpPr txBox="1"/>
+          <p:nvPr>
+            <p:ph type="title"/>
+          </p:nvPr>
+        </p:nvSpPr>
+        <p:spPr>
+          <a:xfrm>
+            <a:off x="365760" y="228600"/>
+            <a:ext cx="8412600" cy="1097400"/>
+          </a:xfrm>
+          <a:prstGeom prst="rect">
+            <a:avLst/>
+          </a:prstGeom>
+        </p:spPr>
+        <p:txBody>
+          <a:bodyPr anchorCtr="0" anchor="t" bIns="91425" lIns="91425" spcFirstLastPara="1" rIns="91425" wrap="square" tIns="91425">
+            <a:noAutofit/>
+          </a:bodyPr>
+          <a:lstStyle/>
+          <a:p>
+            <a:pPr indent="0" lvl="0" marL="0" rtl="0" algn="l">
+              <a:spcBef>
+                <a:spcPts val="0"/>
+              </a:spcBef>
+              <a:spcAft>
+                <a:spcPts val="0"/>
+              </a:spcAft>
+              <a:buNone/>
+            </a:pPr>
+            <a:r>
+              <a:rPr lang="en"/>
+              <a:t>Struct-of-arrays and NumPy lose at N = 5; only leaving Python wins: the Rust tier runs in 9.530 ms</a:t>
+            </a:r>
+            <a:endParaRPr/>
+          </a:p>
+        </p:txBody>
+      </p:sp>
+      <p:sp>
+        <p:nvSpPr>
+          <p:cNvPr id="84" name="Google Shape;84;p15"/>
+          <p:cNvSpPr txBox="1"/>
+          <p:nvPr>
+            <p:ph idx="12" type="sldNum"/>
+          </p:nvPr>
+        </p:nvSpPr>
+        <p:spPr>
+          <a:xfrm>
+            <a:off x="7863840" y="4773168"/>
+            <a:ext cx="914400" cy="365700"/>
+          </a:xfrm>
+          <a:prstGeom prst="rect">
+            <a:avLst/>
+          </a:prstGeom>
+        </p:spPr>
+        <p:txBody>
+          <a:bodyPr anchorCtr="0" anchor="ctr" bIns="91425" lIns="91425" spcFirstLastPara="1" rIns="91425" wrap="square" tIns="91425">
+            <a:normAutofit/>
+          </a:bodyPr>
+          <a:lstStyle/>
+          <a:p>
+            <a:pPr indent="0" lvl="0" marL="0" rtl="0" algn="r">
+              <a:spcBef>
+                <a:spcPts val="0"/>
+              </a:spcBef>
+              <a:spcAft>
+                <a:spcPts val="0"/>
+              </a:spcAft>
+              <a:buNone/>
+            </a:pPr>
+            <a:fld id="{00000000-1234-1234-1234-123412341234}" type="slidenum">
+              <a:rPr lang="en"/>
+              <a:t>‹#›</a:t>
+            </a:fld>
+            <a:endParaRPr/>
+          </a:p>
+        </p:txBody>
+      </p:sp>
+      <p:graphicFrame>
+        <p:nvGraphicFramePr>
+          <p:cNvPr id="85" name="Google Shape;85;p15"/>
+          <p:cNvGraphicFramePr/>
+          <p:nvPr/>
+        </p:nvGraphicFramePr>
+        <p:xfrm>
+          <a:off x="365760" y="1463040"/>
+          <a:ext cx="3000000" cy="3000000"/>
+        </p:xfrm>
+        <a:graphic>
+          <a:graphicData uri="http://schemas.openxmlformats.org/drawingml/2006/table">
+            <a:tbl>
+              <a:tblPr>
+                <a:noFill/>
+                <a:tableStyleId>{82F3850C-69AE-44F1-A2F3-003B56526B79}</a:tableStyleId>
+              </a:tblPr>
+              <a:tblGrid>
+                <a:gridCol w="1885950"/>
+                <a:gridCol w="1866900"/>
+                <a:gridCol w="2838450"/>
+                <a:gridCol w="1819275"/>
+              </a:tblGrid>
+              <a:tr h="257175">
+                <a:tc>
+                  <a:txBody>
+                    <a:bodyPr/>
+                    <a:lstStyle/>
+                    <a:p>
+                      <a:pPr indent="0" lvl="0" marL="0" rtl="0" algn="l">
+                        <a:spcBef>
+                          <a:spcPts val="0"/>
+                        </a:spcBef>
+                        <a:spcAft>
+                          <a:spcPts val="0"/>
+                        </a:spcAft>
+                        <a:buNone/>
+                      </a:pPr>
+                      <a:r>
+                        <a:rPr b="1" lang="en" sz="1600">
+                          <a:solidFill>
+                            <a:srgbClr val="FFFFFF"/>
+                          </a:solidFill>
+                          <a:latin typeface="Roboto"/>
+                          <a:ea typeface="Roboto"/>
+                          <a:cs typeface="Roboto"/>
+                          <a:sym typeface="Roboto"/>
+                        </a:rPr>
+                        <a:t>Variant</a:t>
+                      </a:r>
+                      <a:endParaRPr b="1" sz="1600">
+                        <a:solidFill>
+                          <a:srgbClr val="FFFFFF"/>
+                        </a:solidFill>
+                        <a:latin typeface="Roboto"/>
+                        <a:ea typeface="Roboto"/>
+                        <a:cs typeface="Roboto"/>
+                        <a:sym typeface="Roboto"/>
+                      </a:endParaRPr>
+                    </a:p>
+                  </a:txBody>
+                  <a:tcPr marT="91425" marB="91425" marR="91425" marL="91425">
+                    <a:solidFill>
+                      <a:srgbClr val="1F4E79"/>
+                    </a:solidFill>
+                  </a:tcPr>
+                </a:tc>
+                <a:tc>
+                  <a:txBody>
+                    <a:bodyPr/>
+                    <a:lstStyle/>
+                    <a:p>
+                      <a:pPr indent="0" lvl="0" marL="0" rtl="0" algn="l">
+                        <a:spcBef>
+                          <a:spcPts val="0"/>
+                        </a:spcBef>
+                        <a:spcAft>
+                          <a:spcPts val="0"/>
+                        </a:spcAft>
+                        <a:buNone/>
+                      </a:pPr>
+                      <a:r>
+                        <a:rPr b="1" lang="en" sz="1600">
+                          <a:solidFill>
+                            <a:srgbClr val="FFFFFF"/>
+                          </a:solidFill>
+                          <a:latin typeface="Roboto"/>
+                          <a:ea typeface="Roboto"/>
+                          <a:cs typeface="Roboto"/>
+                          <a:sym typeface="Roboto"/>
+                        </a:rPr>
+                        <a:t>Result</a:t>
+                      </a:r>
+                      <a:endParaRPr b="1" sz="1600">
+                        <a:solidFill>
+                          <a:srgbClr val="FFFFFF"/>
+                        </a:solidFill>
+                        <a:latin typeface="Roboto"/>
+                        <a:ea typeface="Roboto"/>
+                        <a:cs typeface="Roboto"/>
+                        <a:sym typeface="Roboto"/>
+                      </a:endParaRPr>
+                    </a:p>
+                  </a:txBody>
+                  <a:tcPr marT="91425" marB="91425" marR="91425" marL="91425">
+                    <a:solidFill>
+                      <a:srgbClr val="1F4E79"/>
+                    </a:solidFill>
+                  </a:tcPr>
+                </a:tc>
+                <a:tc>
+                  <a:txBody>
+                    <a:bodyPr/>
+                    <a:lstStyle/>
+                    <a:p>
+                      <a:pPr indent="0" lvl="0" marL="0" rtl="0" algn="l">
+                        <a:spcBef>
+                          <a:spcPts val="0"/>
+                        </a:spcBef>
+                        <a:spcAft>
+                          <a:spcPts val="0"/>
+                        </a:spcAft>
+                        <a:buNone/>
+                      </a:pPr>
+                      <a:r>
+                        <a:rPr b="1" lang="en" sz="1600">
+                          <a:solidFill>
+                            <a:srgbClr val="FFFFFF"/>
+                          </a:solidFill>
+                          <a:latin typeface="Roboto"/>
+                          <a:ea typeface="Roboto"/>
+                          <a:cs typeface="Roboto"/>
+                          <a:sym typeface="Roboto"/>
+                        </a:rPr>
+                        <a:t>Denominator</a:t>
+                      </a:r>
+                      <a:endParaRPr b="1" sz="1600">
+                        <a:solidFill>
+                          <a:srgbClr val="FFFFFF"/>
+                        </a:solidFill>
+                        <a:latin typeface="Roboto"/>
+                        <a:ea typeface="Roboto"/>
+                        <a:cs typeface="Roboto"/>
+                        <a:sym typeface="Roboto"/>
+                      </a:endParaRPr>
+                    </a:p>
+                  </a:txBody>
+                  <a:tcPr marT="91425" marB="91425" marR="91425" marL="91425">
+                    <a:solidFill>
+                      <a:srgbClr val="1F4E79"/>
+                    </a:solidFill>
+                  </a:tcPr>
+                </a:tc>
+                <a:tc>
+                  <a:txBody>
+                    <a:bodyPr/>
+                    <a:lstStyle/>
+                    <a:p>
+                      <a:pPr indent="0" lvl="0" marL="0" rtl="0" algn="l">
+                        <a:spcBef>
+                          <a:spcPts val="0"/>
+                        </a:spcBef>
+                        <a:spcAft>
+                          <a:spcPts val="0"/>
+                        </a:spcAft>
+                        <a:buNone/>
+                      </a:pPr>
+                      <a:r>
+                        <a:rPr b="1" lang="en" sz="1600">
+                          <a:solidFill>
+                            <a:srgbClr val="FFFFFF"/>
+                          </a:solidFill>
+                          <a:latin typeface="Roboto"/>
+                          <a:ea typeface="Roboto"/>
+                          <a:cs typeface="Roboto"/>
+                          <a:sym typeface="Roboto"/>
+                        </a:rPr>
+                        <a:t>Evidence</a:t>
+                      </a:r>
+                      <a:endParaRPr b="1" sz="1600">
+                        <a:solidFill>
+                          <a:srgbClr val="FFFFFF"/>
+                        </a:solidFill>
+                        <a:latin typeface="Roboto"/>
+                        <a:ea typeface="Roboto"/>
+                        <a:cs typeface="Roboto"/>
+                        <a:sym typeface="Roboto"/>
+                      </a:endParaRPr>
+                    </a:p>
+                  </a:txBody>
+                  <a:tcPr marT="91425" marB="91425" marR="91425" marL="91425">
+                    <a:solidFill>
+                      <a:srgbClr val="1F4E79"/>
+                    </a:solidFill>
+                  </a:tcPr>
+                </a:tc>
+              </a:tr>
+              <a:tr h="428625">
+                <a:tc>
+                  <a:txBody>
+                    <a:bodyPr/>
+                    <a:lstStyle/>
+                    <a:p>
+                      <a:pPr indent="0" lvl="0" marL="0" rtl="0" algn="l">
+                        <a:spcBef>
+                          <a:spcPts val="0"/>
+                        </a:spcBef>
+                        <a:spcAft>
+                          <a:spcPts val="0"/>
+                        </a:spcAft>
+                        <a:buNone/>
+                      </a:pPr>
+                      <a:r>
+                        <a:rPr lang="en">
+                          <a:latin typeface="Roboto"/>
+                          <a:ea typeface="Roboto"/>
+                          <a:cs typeface="Roboto"/>
+                          <a:sym typeface="Roboto"/>
+                        </a:rPr>
+                        <a:t>Struct-of-arrays (development)</a:t>
+                      </a:r>
+                      <a:endParaRPr>
+                        <a:latin typeface="Roboto"/>
+                        <a:ea typeface="Roboto"/>
+                        <a:cs typeface="Roboto"/>
+                        <a:sym typeface="Roboto"/>
+                      </a:endParaRPr>
+                    </a:p>
+                  </a:txBody>
+                  <a:tcPr marT="91425" marB="91425" marR="91425" marL="91425"/>
+                </a:tc>
+                <a:tc>
+                  <a:txBody>
+                    <a:bodyPr/>
+                    <a:lstStyle/>
+                    <a:p>
+                      <a:pPr indent="0" lvl="0" marL="0" rtl="0" algn="l">
+                        <a:spcBef>
+                          <a:spcPts val="0"/>
+                        </a:spcBef>
+                        <a:spcAft>
+                          <a:spcPts val="0"/>
+                        </a:spcAft>
+                        <a:buNone/>
+                      </a:pPr>
+                      <a:r>
+                        <a:rPr lang="en">
+                          <a:latin typeface="Roboto"/>
+                          <a:ea typeface="Roboto"/>
+                          <a:cs typeface="Roboto"/>
+                          <a:sym typeface="Roboto"/>
+                        </a:rPr>
+                        <a:t>0.88x</a:t>
+                      </a:r>
+                      <a:endParaRPr>
+                        <a:latin typeface="Roboto"/>
+                        <a:ea typeface="Roboto"/>
+                        <a:cs typeface="Roboto"/>
+                        <a:sym typeface="Roboto"/>
+                      </a:endParaRPr>
+                    </a:p>
+                  </a:txBody>
+                  <a:tcPr marT="91425" marB="91425" marR="91425" marL="91425"/>
+                </a:tc>
+                <a:tc>
+                  <a:txBody>
+                    <a:bodyPr/>
+                    <a:lstStyle/>
+                    <a:p>
+                      <a:pPr indent="0" lvl="0" marL="0" rtl="0" algn="l">
+                        <a:spcBef>
+                          <a:spcPts val="0"/>
+                        </a:spcBef>
+                        <a:spcAft>
+                          <a:spcPts val="0"/>
+                        </a:spcAft>
+                        <a:buNone/>
+                      </a:pPr>
+                      <a:r>
+                        <a:rPr lang="en">
+                          <a:latin typeface="Roboto"/>
+                          <a:ea typeface="Roboto"/>
+                          <a:cs typeface="Roboto"/>
+                          <a:sym typeface="Roboto"/>
+                        </a:rPr>
+                        <a:t>original’s speed</a:t>
+                      </a:r>
+                      <a:endParaRPr>
+                        <a:latin typeface="Roboto"/>
+                        <a:ea typeface="Roboto"/>
+                        <a:cs typeface="Roboto"/>
+                        <a:sym typeface="Roboto"/>
+                      </a:endParaRPr>
+                    </a:p>
+                  </a:txBody>
+                  <a:tcPr marT="91425" marB="91425" marR="91425" marL="91425"/>
+                </a:tc>
+                <a:tc>
+                  <a:txBody>
+                    <a:bodyPr/>
+                    <a:lstStyle/>
+                    <a:p>
+                      <a:pPr indent="0" lvl="0" marL="0" rtl="0" algn="l">
+                        <a:spcBef>
+                          <a:spcPts val="0"/>
+                        </a:spcBef>
+                        <a:spcAft>
+                          <a:spcPts val="0"/>
+                        </a:spcAft>
+                        <a:buNone/>
+                      </a:pPr>
+                      <a:r>
+                        <a:rPr lang="en">
+                          <a:latin typeface="Roboto"/>
+                          <a:ea typeface="Roboto"/>
+                          <a:cs typeface="Roboto"/>
+                          <a:sym typeface="Roboto"/>
+                        </a:rPr>
+                        <a:t>development host, not the VM</a:t>
+                      </a:r>
+                      <a:endParaRPr>
+                        <a:latin typeface="Roboto"/>
+                        <a:ea typeface="Roboto"/>
+                        <a:cs typeface="Roboto"/>
+                        <a:sym typeface="Roboto"/>
+                      </a:endParaRPr>
+                    </a:p>
+                  </a:txBody>
+                  <a:tcPr marT="91425" marB="91425" marR="91425" marL="91425"/>
+                </a:tc>
+              </a:tr>
+              <a:tr h="428625">
+                <a:tc>
+                  <a:txBody>
+                    <a:bodyPr/>
+                    <a:lstStyle/>
+                    <a:p>
+                      <a:pPr indent="0" lvl="0" marL="0" rtl="0" algn="l">
+                        <a:spcBef>
+                          <a:spcPts val="0"/>
+                        </a:spcBef>
+                        <a:spcAft>
+                          <a:spcPts val="0"/>
+                        </a:spcAft>
+                        <a:buNone/>
+                      </a:pPr>
+                      <a:r>
+                        <a:rPr lang="en">
+                          <a:latin typeface="Roboto"/>
+                          <a:ea typeface="Roboto"/>
+                          <a:cs typeface="Roboto"/>
+                          <a:sym typeface="Roboto"/>
+                        </a:rPr>
+                        <a:t>NumPy (development)</a:t>
+                      </a:r>
+                      <a:endParaRPr>
+                        <a:latin typeface="Roboto"/>
+                        <a:ea typeface="Roboto"/>
+                        <a:cs typeface="Roboto"/>
+                        <a:sym typeface="Roboto"/>
+                      </a:endParaRPr>
+                    </a:p>
+                  </a:txBody>
+                  <a:tcPr marT="91425" marB="91425" marR="91425" marL="91425"/>
+                </a:tc>
+                <a:tc>
+                  <a:txBody>
+                    <a:bodyPr/>
+                    <a:lstStyle/>
+                    <a:p>
+                      <a:pPr indent="0" lvl="0" marL="0" rtl="0" algn="l">
+                        <a:spcBef>
+                          <a:spcPts val="0"/>
+                        </a:spcBef>
+                        <a:spcAft>
+                          <a:spcPts val="0"/>
+                        </a:spcAft>
+                        <a:buNone/>
+                      </a:pPr>
+                      <a:r>
+                        <a:rPr lang="en">
+                          <a:latin typeface="Roboto"/>
+                          <a:ea typeface="Roboto"/>
+                          <a:cs typeface="Roboto"/>
+                          <a:sym typeface="Roboto"/>
+                        </a:rPr>
+                        <a:t>0.35–0.46x</a:t>
+                      </a:r>
+                      <a:endParaRPr>
+                        <a:latin typeface="Roboto"/>
+                        <a:ea typeface="Roboto"/>
+                        <a:cs typeface="Roboto"/>
+                        <a:sym typeface="Roboto"/>
+                      </a:endParaRPr>
+                    </a:p>
+                  </a:txBody>
+                  <a:tcPr marT="91425" marB="91425" marR="91425" marL="91425"/>
+                </a:tc>
+                <a:tc>
+                  <a:txBody>
+                    <a:bodyPr/>
+                    <a:lstStyle/>
+                    <a:p>
+                      <a:pPr indent="0" lvl="0" marL="0" rtl="0" algn="l">
+                        <a:spcBef>
+                          <a:spcPts val="0"/>
+                        </a:spcBef>
+                        <a:spcAft>
+                          <a:spcPts val="0"/>
+                        </a:spcAft>
+                        <a:buNone/>
+                      </a:pPr>
+                      <a:r>
+                        <a:rPr lang="en">
+                          <a:latin typeface="Roboto"/>
+                          <a:ea typeface="Roboto"/>
+                          <a:cs typeface="Roboto"/>
+                          <a:sym typeface="Roboto"/>
+                        </a:rPr>
+                        <a:t>original’s speed</a:t>
+                      </a:r>
+                      <a:endParaRPr>
+                        <a:latin typeface="Roboto"/>
+                        <a:ea typeface="Roboto"/>
+                        <a:cs typeface="Roboto"/>
+                        <a:sym typeface="Roboto"/>
+                      </a:endParaRPr>
+                    </a:p>
+                  </a:txBody>
+                  <a:tcPr marT="91425" marB="91425" marR="91425" marL="91425"/>
+                </a:tc>
+                <a:tc>
+                  <a:txBody>
+                    <a:bodyPr/>
+                    <a:lstStyle/>
+                    <a:p>
+                      <a:pPr indent="0" lvl="0" marL="0" rtl="0" algn="l">
+                        <a:spcBef>
+                          <a:spcPts val="0"/>
+                        </a:spcBef>
+                        <a:spcAft>
+                          <a:spcPts val="0"/>
+                        </a:spcAft>
+                        <a:buNone/>
+                      </a:pPr>
+                      <a:r>
+                        <a:rPr lang="en">
+                          <a:latin typeface="Roboto"/>
+                          <a:ea typeface="Roboto"/>
+                          <a:cs typeface="Roboto"/>
+                          <a:sym typeface="Roboto"/>
+                        </a:rPr>
+                        <a:t>development host, not the VM</a:t>
+                      </a:r>
+                      <a:endParaRPr>
+                        <a:latin typeface="Roboto"/>
+                        <a:ea typeface="Roboto"/>
+                        <a:cs typeface="Roboto"/>
+                        <a:sym typeface="Roboto"/>
+                      </a:endParaRPr>
+                    </a:p>
+                  </a:txBody>
+                  <a:tcPr marT="91425" marB="91425" marR="91425" marL="91425"/>
+                </a:tc>
+              </a:tr>
+              <a:tr h="428625">
+                <a:tc>
+                  <a:txBody>
+                    <a:bodyPr/>
+                    <a:lstStyle/>
+                    <a:p>
+                      <a:pPr indent="0" lvl="0" marL="0" rtl="0" algn="l">
+                        <a:spcBef>
+                          <a:spcPts val="0"/>
+                        </a:spcBef>
+                        <a:spcAft>
+                          <a:spcPts val="0"/>
+                        </a:spcAft>
+                        <a:buNone/>
+                      </a:pPr>
+                      <a:r>
+                        <a:rPr lang="en">
+                          <a:latin typeface="Roboto"/>
+                          <a:ea typeface="Roboto"/>
+                          <a:cs typeface="Roboto"/>
+                          <a:sym typeface="Roboto"/>
+                        </a:rPr>
+                        <a:t>Barnes-Hut at N = 5</a:t>
+                      </a:r>
+                      <a:endParaRPr>
+                        <a:latin typeface="Roboto"/>
+                        <a:ea typeface="Roboto"/>
+                        <a:cs typeface="Roboto"/>
+                        <a:sym typeface="Roboto"/>
+                      </a:endParaRPr>
+                    </a:p>
+                  </a:txBody>
+                  <a:tcPr marT="91425" marB="91425" marR="91425" marL="91425"/>
+                </a:tc>
+                <a:tc>
+                  <a:txBody>
+                    <a:bodyPr/>
+                    <a:lstStyle/>
+                    <a:p>
+                      <a:pPr indent="0" lvl="0" marL="0" rtl="0" algn="l">
+                        <a:spcBef>
+                          <a:spcPts val="0"/>
+                        </a:spcBef>
+                        <a:spcAft>
+                          <a:spcPts val="0"/>
+                        </a:spcAft>
+                        <a:buNone/>
+                      </a:pPr>
+                      <a:r>
+                        <a:rPr lang="en">
+                          <a:latin typeface="Roboto"/>
+                          <a:ea typeface="Roboto"/>
+                          <a:cs typeface="Roboto"/>
+                          <a:sym typeface="Roboto"/>
+                        </a:rPr>
+                        <a:t>3.92x slower (0.077 vs 0.020 ms)</a:t>
+                      </a:r>
+                      <a:endParaRPr>
+                        <a:latin typeface="Roboto"/>
+                        <a:ea typeface="Roboto"/>
+                        <a:cs typeface="Roboto"/>
+                        <a:sym typeface="Roboto"/>
+                      </a:endParaRPr>
+                    </a:p>
+                  </a:txBody>
+                  <a:tcPr marT="91425" marB="91425" marR="91425" marL="91425"/>
+                </a:tc>
+                <a:tc>
+                  <a:txBody>
+                    <a:bodyPr/>
+                    <a:lstStyle/>
+                    <a:p>
+                      <a:pPr indent="0" lvl="0" marL="0" rtl="0" algn="l">
+                        <a:spcBef>
+                          <a:spcPts val="0"/>
+                        </a:spcBef>
+                        <a:spcAft>
+                          <a:spcPts val="0"/>
+                        </a:spcAft>
+                        <a:buNone/>
+                      </a:pPr>
+                      <a:r>
+                        <a:rPr lang="en">
+                          <a:latin typeface="Roboto"/>
+                          <a:ea typeface="Roboto"/>
+                          <a:cs typeface="Roboto"/>
+                          <a:sym typeface="Roboto"/>
+                        </a:rPr>
+                        <a:t>direct summation</a:t>
+                      </a:r>
+                      <a:endParaRPr>
+                        <a:latin typeface="Roboto"/>
+                        <a:ea typeface="Roboto"/>
+                        <a:cs typeface="Roboto"/>
+                        <a:sym typeface="Roboto"/>
+                      </a:endParaRPr>
+                    </a:p>
+                  </a:txBody>
+                  <a:tcPr marT="91425" marB="91425" marR="91425" marL="91425"/>
+                </a:tc>
+                <a:tc>
+                  <a:txBody>
+                    <a:bodyPr/>
+                    <a:lstStyle/>
+                    <a:p>
+                      <a:pPr indent="0" lvl="0" marL="0" rtl="0" algn="l">
+                        <a:spcBef>
+                          <a:spcPts val="0"/>
+                        </a:spcBef>
+                        <a:spcAft>
+                          <a:spcPts val="0"/>
+                        </a:spcAft>
+                        <a:buNone/>
+                      </a:pPr>
+                      <a:r>
+                        <a:rPr lang="en">
+                          <a:latin typeface="Roboto"/>
+                          <a:ea typeface="Roboto"/>
+                          <a:cs typeface="Roboto"/>
+                          <a:sym typeface="Roboto"/>
+                        </a:rPr>
+                        <a:t>VM force sweep</a:t>
+                      </a:r>
+                      <a:endParaRPr>
+                        <a:latin typeface="Roboto"/>
+                        <a:ea typeface="Roboto"/>
+                        <a:cs typeface="Roboto"/>
+                        <a:sym typeface="Roboto"/>
+                      </a:endParaRPr>
+                    </a:p>
+                  </a:txBody>
+                  <a:tcPr marT="91425" marB="91425" marR="91425" marL="91425"/>
+                </a:tc>
+              </a:tr>
+              <a:tr h="428625">
+                <a:tc>
+                  <a:txBody>
+                    <a:bodyPr/>
+                    <a:lstStyle/>
+                    <a:p>
+                      <a:pPr indent="0" lvl="0" marL="0" rtl="0" algn="l">
+                        <a:spcBef>
+                          <a:spcPts val="0"/>
+                        </a:spcBef>
+                        <a:spcAft>
+                          <a:spcPts val="0"/>
+                        </a:spcAft>
+                        <a:buNone/>
+                      </a:pPr>
+                      <a:r>
+                        <a:rPr lang="en">
+                          <a:latin typeface="Roboto"/>
+                          <a:ea typeface="Roboto"/>
+                          <a:cs typeface="Roboto"/>
+                          <a:sym typeface="Roboto"/>
+                        </a:rPr>
+                        <a:t>Native Rust, 9.530 ms</a:t>
+                      </a:r>
+                      <a:endParaRPr>
+                        <a:latin typeface="Roboto"/>
+                        <a:ea typeface="Roboto"/>
+                        <a:cs typeface="Roboto"/>
+                        <a:sym typeface="Roboto"/>
+                      </a:endParaRPr>
+                    </a:p>
+                  </a:txBody>
+                  <a:tcPr marT="91425" marB="91425" marR="91425" marL="91425"/>
+                </a:tc>
+                <a:tc>
+                  <a:txBody>
+                    <a:bodyPr/>
+                    <a:lstStyle/>
+                    <a:p>
+                      <a:pPr indent="0" lvl="0" marL="0" rtl="0" algn="l">
+                        <a:spcBef>
+                          <a:spcPts val="0"/>
+                        </a:spcBef>
+                        <a:spcAft>
+                          <a:spcPts val="0"/>
+                        </a:spcAft>
+                        <a:buNone/>
+                      </a:pPr>
+                      <a:r>
+                        <a:rPr lang="en">
+                          <a:latin typeface="Roboto"/>
+                          <a:ea typeface="Roboto"/>
+                          <a:cs typeface="Roboto"/>
+                          <a:sym typeface="Roboto"/>
+                        </a:rPr>
+                        <a:t>15.25x</a:t>
+                      </a:r>
+                      <a:endParaRPr>
+                        <a:latin typeface="Roboto"/>
+                        <a:ea typeface="Roboto"/>
+                        <a:cs typeface="Roboto"/>
+                        <a:sym typeface="Roboto"/>
+                      </a:endParaRPr>
+                    </a:p>
+                  </a:txBody>
+                  <a:tcPr marT="91425" marB="91425" marR="91425" marL="91425"/>
+                </a:tc>
+                <a:tc>
+                  <a:txBody>
+                    <a:bodyPr/>
+                    <a:lstStyle/>
+                    <a:p>
+                      <a:pPr indent="0" lvl="0" marL="0" rtl="0" algn="l">
+                        <a:spcBef>
+                          <a:spcPts val="0"/>
+                        </a:spcBef>
+                        <a:spcAft>
+                          <a:spcPts val="0"/>
+                        </a:spcAft>
+                        <a:buNone/>
+                      </a:pPr>
+                      <a:r>
+                        <a:rPr lang="en">
+                          <a:latin typeface="Roboto"/>
+                          <a:ea typeface="Roboto"/>
+                          <a:cs typeface="Roboto"/>
+                          <a:sym typeface="Roboto"/>
+                        </a:rPr>
+                        <a:t>optimized Python under direct pyperf, 145.30 ms</a:t>
+                      </a:r>
+                      <a:endParaRPr>
+                        <a:latin typeface="Roboto"/>
+                        <a:ea typeface="Roboto"/>
+                        <a:cs typeface="Roboto"/>
+                        <a:sym typeface="Roboto"/>
+                      </a:endParaRPr>
+                    </a:p>
+                  </a:txBody>
+                  <a:tcPr marT="91425" marB="91425" marR="91425" marL="91425"/>
+                </a:tc>
+                <a:tc>
+                  <a:txBody>
+                    <a:bodyPr/>
+                    <a:lstStyle/>
+                    <a:p>
+                      <a:pPr indent="0" lvl="0" marL="0" rtl="0" algn="l">
+                        <a:spcBef>
+                          <a:spcPts val="0"/>
+                        </a:spcBef>
+                        <a:spcAft>
+                          <a:spcPts val="0"/>
+                        </a:spcAft>
+                        <a:buNone/>
+                      </a:pPr>
+                      <a:r>
+                        <a:rPr lang="en">
+                          <a:latin typeface="Roboto"/>
+                          <a:ea typeface="Roboto"/>
+                          <a:cs typeface="Roboto"/>
+                          <a:sym typeface="Roboto"/>
+                        </a:rPr>
+                        <a:t>VM canonical run</a:t>
+                      </a:r>
+                      <a:endParaRPr>
+                        <a:latin typeface="Roboto"/>
+                        <a:ea typeface="Roboto"/>
+                        <a:cs typeface="Roboto"/>
+                        <a:sym typeface="Roboto"/>
+                      </a:endParaRPr>
+                    </a:p>
+                  </a:txBody>
+                  <a:tcPr marT="91425" marB="91425" marR="91425" marL="91425"/>
+                </a:tc>
+              </a:tr>
+              <a:tr h="428625">
+                <a:tc>
+                  <a:txBody>
+                    <a:bodyPr/>
+                    <a:lstStyle/>
+                    <a:p>
+                      <a:pPr indent="0" lvl="0" marL="0" rtl="0" algn="l">
+                        <a:spcBef>
+                          <a:spcPts val="0"/>
+                        </a:spcBef>
+                        <a:spcAft>
+                          <a:spcPts val="0"/>
+                        </a:spcAft>
+                        <a:buNone/>
+                      </a:pPr>
+                      <a:r>
+                        <a:rPr lang="en">
+                          <a:latin typeface="Roboto"/>
+                          <a:ea typeface="Roboto"/>
+                          <a:cs typeface="Roboto"/>
+                          <a:sym typeface="Roboto"/>
+                        </a:rPr>
+                        <a:t>Native Rust, 9.530 ms</a:t>
+                      </a:r>
+                      <a:endParaRPr>
+                        <a:latin typeface="Roboto"/>
+                        <a:ea typeface="Roboto"/>
+                        <a:cs typeface="Roboto"/>
+                        <a:sym typeface="Roboto"/>
+                      </a:endParaRPr>
+                    </a:p>
+                  </a:txBody>
+                  <a:tcPr marT="91425" marB="91425" marR="91425" marL="91425"/>
+                </a:tc>
+                <a:tc>
+                  <a:txBody>
+                    <a:bodyPr/>
+                    <a:lstStyle/>
+                    <a:p>
+                      <a:pPr indent="0" lvl="0" marL="0" rtl="0" algn="l">
+                        <a:spcBef>
+                          <a:spcPts val="0"/>
+                        </a:spcBef>
+                        <a:spcAft>
+                          <a:spcPts val="0"/>
+                        </a:spcAft>
+                        <a:buNone/>
+                      </a:pPr>
+                      <a:r>
+                        <a:rPr lang="en">
+                          <a:latin typeface="Roboto"/>
+                          <a:ea typeface="Roboto"/>
+                          <a:cs typeface="Roboto"/>
+                          <a:sym typeface="Roboto"/>
+                        </a:rPr>
+                        <a:t>24.26x</a:t>
+                      </a:r>
+                      <a:endParaRPr>
+                        <a:latin typeface="Roboto"/>
+                        <a:ea typeface="Roboto"/>
+                        <a:cs typeface="Roboto"/>
+                        <a:sym typeface="Roboto"/>
+                      </a:endParaRPr>
+                    </a:p>
+                  </a:txBody>
+                  <a:tcPr marT="91425" marB="91425" marR="91425" marL="91425"/>
+                </a:tc>
+                <a:tc>
+                  <a:txBody>
+                    <a:bodyPr/>
+                    <a:lstStyle/>
+                    <a:p>
+                      <a:pPr indent="0" lvl="0" marL="0" rtl="0" algn="l">
+                        <a:spcBef>
+                          <a:spcPts val="0"/>
+                        </a:spcBef>
+                        <a:spcAft>
+                          <a:spcPts val="0"/>
+                        </a:spcAft>
+                        <a:buNone/>
+                      </a:pPr>
+                      <a:r>
+                        <a:rPr lang="en">
+                          <a:latin typeface="Roboto"/>
+                          <a:ea typeface="Roboto"/>
+                          <a:cs typeface="Roboto"/>
+                          <a:sym typeface="Roboto"/>
+                        </a:rPr>
+                        <a:t>original under pyperformance, 231.20 ms</a:t>
+                      </a:r>
+                      <a:endParaRPr>
+                        <a:latin typeface="Roboto"/>
+                        <a:ea typeface="Roboto"/>
+                        <a:cs typeface="Roboto"/>
+                        <a:sym typeface="Roboto"/>
+                      </a:endParaRPr>
+                    </a:p>
+                  </a:txBody>
+                  <a:tcPr marT="91425" marB="91425" marR="91425" marL="91425"/>
+                </a:tc>
+                <a:tc>
+                  <a:txBody>
+                    <a:bodyPr/>
+                    <a:lstStyle/>
+                    <a:p>
+                      <a:pPr indent="0" lvl="0" marL="0" rtl="0" algn="l">
+                        <a:spcBef>
+                          <a:spcPts val="0"/>
+                        </a:spcBef>
+                        <a:spcAft>
+                          <a:spcPts val="0"/>
+                        </a:spcAft>
+                        <a:buNone/>
+                      </a:pPr>
+                      <a:r>
+                        <a:rPr lang="en">
+                          <a:latin typeface="Roboto"/>
+                          <a:ea typeface="Roboto"/>
+                          <a:cs typeface="Roboto"/>
+                          <a:sym typeface="Roboto"/>
+                        </a:rPr>
+                        <a:t>VM canonical run</a:t>
+                      </a:r>
+                      <a:endParaRPr>
+                        <a:latin typeface="Roboto"/>
+                        <a:ea typeface="Roboto"/>
+                        <a:cs typeface="Roboto"/>
+                        <a:sym typeface="Roboto"/>
+                      </a:endParaRPr>
+                    </a:p>
+                  </a:txBody>
+                  <a:tcPr marT="91425" marB="91425" marR="91425" marL="91425"/>
+                </a:tc>
+              </a:tr>
+            </a:tbl>
+          </a:graphicData>
+        </a:graphic>
+      </p:graphicFrame>
+    </p:spTree>
+  </p:cSld>
+  <p:clrMapOvr>
+    <a:masterClrMapping/>
+  </p:clrMapOvr>
+</p:sld>
+</file>
+
+<file path=ppt/slides/slide7.xml><?xml version="1.0" encoding="utf-8"?>
+<p:sld xmlns:a="http://schemas.openxmlformats.org/drawingml/2006/main" xmlns:r="http://schemas.openxmlformats.org/officeDocument/2006/relationships" xmlns:mc="http://schemas.openxmlformats.org/markup-compatibility/2006" xmlns:mv="urn:schemas-microsoft-com:mac:vml" xmlns:p="http://schemas.openxmlformats.org/presentationml/2006/main" xmlns:c="http://schemas.openxmlformats.org/drawingml/2006/chart" xmlns:dgm="http://schemas.openxmlformats.org/drawingml/2006/diagram" xmlns:o="urn:schemas-microsoft-com:office:office" xmlns:v="urn:schemas-microsoft-com:vml" xmlns:pvml="urn:schemas-microsoft-com:office:powerpoint" xmlns:com="http://schemas.openxmlformats.org/drawingml/2006/compatibility" xmlns:p14="http://schemas.microsoft.com/office/powerpoint/2010/main" xmlns:p15="http://schemas.microsoft.com/office/powerpoint/2012/main" xmlns:ahyp="http://schemas.microsoft.com/office/drawing/2018/hyperlinkcolor">
+  <p:cSld>
+    <p:spTree>
+      <p:nvGrpSpPr>
+        <p:cNvPr id="89" name="Shape 89"/>
+        <p:cNvGrpSpPr/>
+        <p:nvPr/>
+      </p:nvGrpSpPr>
+      <p:grpSpPr>
+        <a:xfrm>
+          <a:off x="0" y="0"/>
+          <a:ext cx="0" cy="0"/>
+          <a:chOff x="0" y="0"/>
+          <a:chExt cx="0" cy="0"/>
+        </a:xfrm>
+      </p:grpSpPr>
+      <p:sp>
+        <p:nvSpPr>
+          <p:cNvPr id="90" name="Google Shape;90;p16"/>
+          <p:cNvSpPr txBox="1"/>
+          <p:nvPr>
+            <p:ph type="title"/>
+          </p:nvPr>
+        </p:nvSpPr>
+        <p:spPr>
+          <a:xfrm>
+            <a:off x="365760" y="228600"/>
+            <a:ext cx="8412600" cy="1097400"/>
+          </a:xfrm>
+          <a:prstGeom prst="rect">
+            <a:avLst/>
+          </a:prstGeom>
+        </p:spPr>
+        <p:txBody>
+          <a:bodyPr anchorCtr="0" anchor="t" bIns="91425" lIns="91425" spcFirstLastPara="1" rIns="91425" wrap="square" tIns="91425">
+            <a:noAutofit/>
+          </a:bodyPr>
+          <a:lstStyle/>
+          <a:p>
+            <a:pPr indent="0" lvl="0" marL="0" rtl="0" algn="l">
+              <a:spcBef>
+                <a:spcPts val="0"/>
+              </a:spcBef>
+              <a:spcAft>
+                <a:spcPts val="0"/>
+              </a:spcAft>
+              <a:buNone/>
+            </a:pPr>
+            <a:r>
+              <a:rPr lang="en"/>
+              <a:t>Native runs 26.7x fewer instructions while IPC drops from 3.28 to 1.83: the win is instruction count, not the pipeline</a:t>
+            </a:r>
+            <a:endParaRPr/>
+          </a:p>
+        </p:txBody>
+      </p:sp>
+      <p:sp>
+        <p:nvSpPr>
+          <p:cNvPr id="91" name="Google Shape;91;p16"/>
+          <p:cNvSpPr txBox="1"/>
+          <p:nvPr>
+            <p:ph idx="12" type="sldNum"/>
+          </p:nvPr>
+        </p:nvSpPr>
+        <p:spPr>
+          <a:xfrm>
+            <a:off x="7863840" y="4773168"/>
+            <a:ext cx="914400" cy="365700"/>
+          </a:xfrm>
+          <a:prstGeom prst="rect">
+            <a:avLst/>
+          </a:prstGeom>
+        </p:spPr>
+        <p:txBody>
+          <a:bodyPr anchorCtr="0" anchor="ctr" bIns="91425" lIns="91425" spcFirstLastPara="1" rIns="91425" wrap="square" tIns="91425">
+            <a:normAutofit/>
+          </a:bodyPr>
+          <a:lstStyle/>
+          <a:p>
+            <a:pPr indent="0" lvl="0" marL="0" rtl="0" algn="r">
+              <a:spcBef>
+                <a:spcPts val="0"/>
+              </a:spcBef>
+              <a:spcAft>
+                <a:spcPts val="0"/>
+              </a:spcAft>
+              <a:buNone/>
+            </a:pPr>
+            <a:fld id="{00000000-1234-1234-1234-123412341234}" type="slidenum">
+              <a:rPr lang="en"/>
+              <a:t>‹#›</a:t>
+            </a:fld>
+            <a:endParaRPr/>
+          </a:p>
+        </p:txBody>
+      </p:sp>
+      <p:graphicFrame>
+        <p:nvGraphicFramePr>
+          <p:cNvPr id="92" name="Google Shape;92;p16"/>
+          <p:cNvGraphicFramePr/>
+          <p:nvPr/>
+        </p:nvGraphicFramePr>
+        <p:xfrm>
+          <a:off x="365760" y="1463040"/>
+          <a:ext cx="3000000" cy="3000000"/>
+        </p:xfrm>
+        <a:graphic>
+          <a:graphicData uri="http://schemas.openxmlformats.org/drawingml/2006/table">
+            <a:tbl>
+              <a:tblPr>
+                <a:noFill/>
+                <a:tableStyleId>{82F3850C-69AE-44F1-A2F3-003B56526B79}</a:tableStyleId>
+              </a:tblPr>
+              <a:tblGrid>
+                <a:gridCol w="1971675"/>
+                <a:gridCol w="2838450"/>
+                <a:gridCol w="1838325"/>
+                <a:gridCol w="1752600"/>
+              </a:tblGrid>
+              <a:tr h="257175">
+                <a:tc>
+                  <a:txBody>
+                    <a:bodyPr/>
+                    <a:lstStyle/>
+                    <a:p>
+                      <a:pPr indent="0" lvl="0" marL="0" rtl="0" algn="l">
+                        <a:spcBef>
+                          <a:spcPts val="0"/>
+                        </a:spcBef>
+                        <a:spcAft>
+                          <a:spcPts val="0"/>
+                        </a:spcAft>
+                        <a:buNone/>
+                      </a:pPr>
+                      <a:r>
+                        <a:rPr b="1" lang="en" sz="1600">
+                          <a:solidFill>
+                            <a:srgbClr val="FFFFFF"/>
+                          </a:solidFill>
+                          <a:latin typeface="Roboto"/>
+                          <a:ea typeface="Roboto"/>
+                          <a:cs typeface="Roboto"/>
+                          <a:sym typeface="Roboto"/>
+                        </a:rPr>
+                        <a:t>Per iteration</a:t>
+                      </a:r>
+                      <a:endParaRPr b="1" sz="1600">
+                        <a:solidFill>
+                          <a:srgbClr val="FFFFFF"/>
+                        </a:solidFill>
+                        <a:latin typeface="Roboto"/>
+                        <a:ea typeface="Roboto"/>
+                        <a:cs typeface="Roboto"/>
+                        <a:sym typeface="Roboto"/>
+                      </a:endParaRPr>
+                    </a:p>
+                  </a:txBody>
+                  <a:tcPr marT="91425" marB="91425" marR="91425" marL="91425">
+                    <a:solidFill>
+                      <a:srgbClr val="1F4E79"/>
+                    </a:solidFill>
+                  </a:tcPr>
+                </a:tc>
+                <a:tc>
+                  <a:txBody>
+                    <a:bodyPr/>
+                    <a:lstStyle/>
+                    <a:p>
+                      <a:pPr indent="0" lvl="0" marL="0" rtl="0" algn="l">
+                        <a:spcBef>
+                          <a:spcPts val="0"/>
+                        </a:spcBef>
+                        <a:spcAft>
+                          <a:spcPts val="0"/>
+                        </a:spcAft>
+                        <a:buNone/>
+                      </a:pPr>
+                      <a:r>
+                        <a:rPr b="1" lang="en" sz="1600">
+                          <a:solidFill>
+                            <a:srgbClr val="FFFFFF"/>
+                          </a:solidFill>
+                          <a:latin typeface="Roboto"/>
+                          <a:ea typeface="Roboto"/>
+                          <a:cs typeface="Roboto"/>
+                          <a:sym typeface="Roboto"/>
+                        </a:rPr>
+                        <a:t>Optimized Python</a:t>
+                      </a:r>
+                      <a:endParaRPr b="1" sz="1600">
+                        <a:solidFill>
+                          <a:srgbClr val="FFFFFF"/>
+                        </a:solidFill>
+                        <a:latin typeface="Roboto"/>
+                        <a:ea typeface="Roboto"/>
+                        <a:cs typeface="Roboto"/>
+                        <a:sym typeface="Roboto"/>
+                      </a:endParaRPr>
+                    </a:p>
+                  </a:txBody>
+                  <a:tcPr marT="91425" marB="91425" marR="91425" marL="91425">
+                    <a:solidFill>
+                      <a:srgbClr val="1F4E79"/>
+                    </a:solidFill>
+                  </a:tcPr>
+                </a:tc>
+                <a:tc>
+                  <a:txBody>
+                    <a:bodyPr/>
+                    <a:lstStyle/>
+                    <a:p>
+                      <a:pPr indent="0" lvl="0" marL="0" rtl="0" algn="l">
+                        <a:spcBef>
+                          <a:spcPts val="0"/>
+                        </a:spcBef>
+                        <a:spcAft>
+                          <a:spcPts val="0"/>
+                        </a:spcAft>
+                        <a:buNone/>
+                      </a:pPr>
+                      <a:r>
+                        <a:rPr b="1" lang="en" sz="1600">
+                          <a:solidFill>
+                            <a:srgbClr val="FFFFFF"/>
+                          </a:solidFill>
+                          <a:latin typeface="Roboto"/>
+                          <a:ea typeface="Roboto"/>
+                          <a:cs typeface="Roboto"/>
+                          <a:sym typeface="Roboto"/>
+                        </a:rPr>
+                        <a:t>Native Rust</a:t>
+                      </a:r>
+                      <a:endParaRPr b="1" sz="1600">
+                        <a:solidFill>
+                          <a:srgbClr val="FFFFFF"/>
+                        </a:solidFill>
+                        <a:latin typeface="Roboto"/>
+                        <a:ea typeface="Roboto"/>
+                        <a:cs typeface="Roboto"/>
+                        <a:sym typeface="Roboto"/>
+                      </a:endParaRPr>
+                    </a:p>
+                  </a:txBody>
+                  <a:tcPr marT="91425" marB="91425" marR="91425" marL="91425">
+                    <a:solidFill>
+                      <a:srgbClr val="1F4E79"/>
+                    </a:solidFill>
+                  </a:tcPr>
+                </a:tc>
+                <a:tc>
+                  <a:txBody>
+                    <a:bodyPr/>
+                    <a:lstStyle/>
+                    <a:p>
+                      <a:pPr indent="0" lvl="0" marL="0" rtl="0" algn="l">
+                        <a:spcBef>
+                          <a:spcPts val="0"/>
+                        </a:spcBef>
+                        <a:spcAft>
+                          <a:spcPts val="0"/>
+                        </a:spcAft>
+                        <a:buNone/>
+                      </a:pPr>
+                      <a:r>
+                        <a:rPr b="1" lang="en" sz="1600">
+                          <a:solidFill>
+                            <a:srgbClr val="FFFFFF"/>
+                          </a:solidFill>
+                          <a:latin typeface="Roboto"/>
+                          <a:ea typeface="Roboto"/>
+                          <a:cs typeface="Roboto"/>
+                          <a:sym typeface="Roboto"/>
+                        </a:rPr>
+                        <a:t>Ratio</a:t>
+                      </a:r>
+                      <a:endParaRPr b="1" sz="1600">
+                        <a:solidFill>
+                          <a:srgbClr val="FFFFFF"/>
+                        </a:solidFill>
+                        <a:latin typeface="Roboto"/>
+                        <a:ea typeface="Roboto"/>
+                        <a:cs typeface="Roboto"/>
+                        <a:sym typeface="Roboto"/>
+                      </a:endParaRPr>
+                    </a:p>
+                  </a:txBody>
+                  <a:tcPr marT="91425" marB="91425" marR="91425" marL="91425">
+                    <a:solidFill>
+                      <a:srgbClr val="1F4E79"/>
+                    </a:solidFill>
+                  </a:tcPr>
+                </a:tc>
+              </a:tr>
+              <a:tr h="257175">
+                <a:tc>
+                  <a:txBody>
+                    <a:bodyPr/>
+                    <a:lstStyle/>
+                    <a:p>
+                      <a:pPr indent="0" lvl="0" marL="0" rtl="0" algn="l">
+                        <a:spcBef>
+                          <a:spcPts val="0"/>
+                        </a:spcBef>
+                        <a:spcAft>
+                          <a:spcPts val="0"/>
+                        </a:spcAft>
+                        <a:buNone/>
+                      </a:pPr>
+                      <a:r>
+                        <a:rPr lang="en" sz="1600">
+                          <a:latin typeface="Roboto"/>
+                          <a:ea typeface="Roboto"/>
+                          <a:cs typeface="Roboto"/>
+                          <a:sym typeface="Roboto"/>
+                        </a:rPr>
+                        <a:t>Elapsed time</a:t>
+                      </a:r>
+                      <a:endParaRPr sz="1600">
+                        <a:latin typeface="Roboto"/>
+                        <a:ea typeface="Roboto"/>
+                        <a:cs typeface="Roboto"/>
+                        <a:sym typeface="Roboto"/>
+                      </a:endParaRPr>
+                    </a:p>
+                  </a:txBody>
+                  <a:tcPr marT="91425" marB="91425" marR="91425" marL="91425"/>
+                </a:tc>
+                <a:tc>
+                  <a:txBody>
+                    <a:bodyPr/>
+                    <a:lstStyle/>
+                    <a:p>
+                      <a:pPr indent="0" lvl="0" marL="0" rtl="0" algn="l">
+                        <a:spcBef>
+                          <a:spcPts val="0"/>
+                        </a:spcBef>
+                        <a:spcAft>
+                          <a:spcPts val="0"/>
+                        </a:spcAft>
+                        <a:buNone/>
+                      </a:pPr>
+                      <a:r>
+                        <a:rPr lang="en" sz="1600">
+                          <a:latin typeface="Roboto"/>
+                          <a:ea typeface="Roboto"/>
+                          <a:cs typeface="Roboto"/>
+                          <a:sym typeface="Roboto"/>
+                        </a:rPr>
+                        <a:t>141.08 ms</a:t>
+                      </a:r>
+                      <a:endParaRPr sz="1600">
+                        <a:latin typeface="Roboto"/>
+                        <a:ea typeface="Roboto"/>
+                        <a:cs typeface="Roboto"/>
+                        <a:sym typeface="Roboto"/>
+                      </a:endParaRPr>
+                    </a:p>
+                  </a:txBody>
+                  <a:tcPr marT="91425" marB="91425" marR="91425" marL="91425"/>
+                </a:tc>
+                <a:tc>
+                  <a:txBody>
+                    <a:bodyPr/>
+                    <a:lstStyle/>
+                    <a:p>
+                      <a:pPr indent="0" lvl="0" marL="0" rtl="0" algn="l">
+                        <a:spcBef>
+                          <a:spcPts val="0"/>
+                        </a:spcBef>
+                        <a:spcAft>
+                          <a:spcPts val="0"/>
+                        </a:spcAft>
+                        <a:buNone/>
+                      </a:pPr>
+                      <a:r>
+                        <a:rPr lang="en" sz="1600">
+                          <a:latin typeface="Roboto"/>
+                          <a:ea typeface="Roboto"/>
+                          <a:cs typeface="Roboto"/>
+                          <a:sym typeface="Roboto"/>
+                        </a:rPr>
+                        <a:t>9.462 ms</a:t>
+                      </a:r>
+                      <a:endParaRPr sz="1600">
+                        <a:latin typeface="Roboto"/>
+                        <a:ea typeface="Roboto"/>
+                        <a:cs typeface="Roboto"/>
+                        <a:sym typeface="Roboto"/>
+                      </a:endParaRPr>
+                    </a:p>
+                  </a:txBody>
+                  <a:tcPr marT="91425" marB="91425" marR="91425" marL="91425"/>
+                </a:tc>
+                <a:tc>
+                  <a:txBody>
+                    <a:bodyPr/>
+                    <a:lstStyle/>
+                    <a:p>
+                      <a:pPr indent="0" lvl="0" marL="0" rtl="0" algn="l">
+                        <a:spcBef>
+                          <a:spcPts val="0"/>
+                        </a:spcBef>
+                        <a:spcAft>
+                          <a:spcPts val="0"/>
+                        </a:spcAft>
+                        <a:buNone/>
+                      </a:pPr>
+                      <a:r>
+                        <a:t/>
+                      </a:r>
+                      <a:endParaRPr/>
+                    </a:p>
+                  </a:txBody>
+                  <a:tcPr marT="91425" marB="91425" marR="91425" marL="91425"/>
+                </a:tc>
+              </a:tr>
+              <a:tr h="257175">
+                <a:tc>
+                  <a:txBody>
+                    <a:bodyPr/>
+                    <a:lstStyle/>
+                    <a:p>
+                      <a:pPr indent="0" lvl="0" marL="0" rtl="0" algn="l">
+                        <a:spcBef>
+                          <a:spcPts val="0"/>
+                        </a:spcBef>
+                        <a:spcAft>
+                          <a:spcPts val="0"/>
+                        </a:spcAft>
+                        <a:buNone/>
+                      </a:pPr>
+                      <a:r>
+                        <a:rPr lang="en" sz="1600">
+                          <a:latin typeface="Roboto"/>
+                          <a:ea typeface="Roboto"/>
+                          <a:cs typeface="Roboto"/>
+                          <a:sym typeface="Roboto"/>
+                        </a:rPr>
+                        <a:t>Instructions</a:t>
+                      </a:r>
+                      <a:endParaRPr sz="1600">
+                        <a:latin typeface="Roboto"/>
+                        <a:ea typeface="Roboto"/>
+                        <a:cs typeface="Roboto"/>
+                        <a:sym typeface="Roboto"/>
+                      </a:endParaRPr>
+                    </a:p>
+                  </a:txBody>
+                  <a:tcPr marT="91425" marB="91425" marR="91425" marL="91425"/>
+                </a:tc>
+                <a:tc>
+                  <a:txBody>
+                    <a:bodyPr/>
+                    <a:lstStyle/>
+                    <a:p>
+                      <a:pPr indent="0" lvl="0" marL="0" rtl="0" algn="l">
+                        <a:spcBef>
+                          <a:spcPts val="0"/>
+                        </a:spcBef>
+                        <a:spcAft>
+                          <a:spcPts val="0"/>
+                        </a:spcAft>
+                        <a:buNone/>
+                      </a:pPr>
+                      <a:r>
+                        <a:rPr lang="en" sz="1600">
+                          <a:latin typeface="Roboto"/>
+                          <a:ea typeface="Roboto"/>
+                          <a:cs typeface="Roboto"/>
+                          <a:sym typeface="Roboto"/>
+                        </a:rPr>
+                        <a:t>1,103.62 M</a:t>
+                      </a:r>
+                      <a:endParaRPr sz="1600">
+                        <a:latin typeface="Roboto"/>
+                        <a:ea typeface="Roboto"/>
+                        <a:cs typeface="Roboto"/>
+                        <a:sym typeface="Roboto"/>
+                      </a:endParaRPr>
+                    </a:p>
+                  </a:txBody>
+                  <a:tcPr marT="91425" marB="91425" marR="91425" marL="91425"/>
+                </a:tc>
+                <a:tc>
+                  <a:txBody>
+                    <a:bodyPr/>
+                    <a:lstStyle/>
+                    <a:p>
+                      <a:pPr indent="0" lvl="0" marL="0" rtl="0" algn="l">
+                        <a:spcBef>
+                          <a:spcPts val="0"/>
+                        </a:spcBef>
+                        <a:spcAft>
+                          <a:spcPts val="0"/>
+                        </a:spcAft>
+                        <a:buNone/>
+                      </a:pPr>
+                      <a:r>
+                        <a:rPr lang="en" sz="1600">
+                          <a:latin typeface="Roboto"/>
+                          <a:ea typeface="Roboto"/>
+                          <a:cs typeface="Roboto"/>
+                          <a:sym typeface="Roboto"/>
+                        </a:rPr>
+                        <a:t>41.32 M</a:t>
+                      </a:r>
+                      <a:endParaRPr sz="1600">
+                        <a:latin typeface="Roboto"/>
+                        <a:ea typeface="Roboto"/>
+                        <a:cs typeface="Roboto"/>
+                        <a:sym typeface="Roboto"/>
+                      </a:endParaRPr>
+                    </a:p>
+                  </a:txBody>
+                  <a:tcPr marT="91425" marB="91425" marR="91425" marL="91425"/>
+                </a:tc>
+                <a:tc>
+                  <a:txBody>
+                    <a:bodyPr/>
+                    <a:lstStyle/>
+                    <a:p>
+                      <a:pPr indent="0" lvl="0" marL="0" rtl="0" algn="l">
+                        <a:spcBef>
+                          <a:spcPts val="0"/>
+                        </a:spcBef>
+                        <a:spcAft>
+                          <a:spcPts val="0"/>
+                        </a:spcAft>
+                        <a:buNone/>
+                      </a:pPr>
+                      <a:r>
+                        <a:rPr lang="en" sz="1600">
+                          <a:latin typeface="Roboto"/>
+                          <a:ea typeface="Roboto"/>
+                          <a:cs typeface="Roboto"/>
+                          <a:sym typeface="Roboto"/>
+                        </a:rPr>
+                        <a:t>26.7x fewer</a:t>
+                      </a:r>
+                      <a:endParaRPr sz="1600">
+                        <a:latin typeface="Roboto"/>
+                        <a:ea typeface="Roboto"/>
+                        <a:cs typeface="Roboto"/>
+                        <a:sym typeface="Roboto"/>
+                      </a:endParaRPr>
+                    </a:p>
+                  </a:txBody>
+                  <a:tcPr marT="91425" marB="91425" marR="91425" marL="91425"/>
+                </a:tc>
+              </a:tr>
+              <a:tr h="257175">
+                <a:tc>
+                  <a:txBody>
+                    <a:bodyPr/>
+                    <a:lstStyle/>
+                    <a:p>
+                      <a:pPr indent="0" lvl="0" marL="0" rtl="0" algn="l">
+                        <a:spcBef>
+                          <a:spcPts val="0"/>
+                        </a:spcBef>
+                        <a:spcAft>
+                          <a:spcPts val="0"/>
+                        </a:spcAft>
+                        <a:buNone/>
+                      </a:pPr>
+                      <a:r>
+                        <a:rPr lang="en" sz="1600">
+                          <a:latin typeface="Roboto"/>
+                          <a:ea typeface="Roboto"/>
+                          <a:cs typeface="Roboto"/>
+                          <a:sym typeface="Roboto"/>
+                        </a:rPr>
+                        <a:t>Cycles</a:t>
+                      </a:r>
+                      <a:endParaRPr sz="1600">
+                        <a:latin typeface="Roboto"/>
+                        <a:ea typeface="Roboto"/>
+                        <a:cs typeface="Roboto"/>
+                        <a:sym typeface="Roboto"/>
+                      </a:endParaRPr>
+                    </a:p>
+                  </a:txBody>
+                  <a:tcPr marT="91425" marB="91425" marR="91425" marL="91425"/>
+                </a:tc>
+                <a:tc>
+                  <a:txBody>
+                    <a:bodyPr/>
+                    <a:lstStyle/>
+                    <a:p>
+                      <a:pPr indent="0" lvl="0" marL="0" rtl="0" algn="l">
+                        <a:spcBef>
+                          <a:spcPts val="0"/>
+                        </a:spcBef>
+                        <a:spcAft>
+                          <a:spcPts val="0"/>
+                        </a:spcAft>
+                        <a:buNone/>
+                      </a:pPr>
+                      <a:r>
+                        <a:rPr lang="en" sz="1600">
+                          <a:latin typeface="Roboto"/>
+                          <a:ea typeface="Roboto"/>
+                          <a:cs typeface="Roboto"/>
+                          <a:sym typeface="Roboto"/>
+                        </a:rPr>
+                        <a:t>336.24 M</a:t>
+                      </a:r>
+                      <a:endParaRPr sz="1600">
+                        <a:latin typeface="Roboto"/>
+                        <a:ea typeface="Roboto"/>
+                        <a:cs typeface="Roboto"/>
+                        <a:sym typeface="Roboto"/>
+                      </a:endParaRPr>
+                    </a:p>
+                  </a:txBody>
+                  <a:tcPr marT="91425" marB="91425" marR="91425" marL="91425"/>
+                </a:tc>
+                <a:tc>
+                  <a:txBody>
+                    <a:bodyPr/>
+                    <a:lstStyle/>
+                    <a:p>
+                      <a:pPr indent="0" lvl="0" marL="0" rtl="0" algn="l">
+                        <a:spcBef>
+                          <a:spcPts val="0"/>
+                        </a:spcBef>
+                        <a:spcAft>
+                          <a:spcPts val="0"/>
+                        </a:spcAft>
+                        <a:buNone/>
+                      </a:pPr>
+                      <a:r>
+                        <a:rPr lang="en" sz="1600">
+                          <a:latin typeface="Roboto"/>
+                          <a:ea typeface="Roboto"/>
+                          <a:cs typeface="Roboto"/>
+                          <a:sym typeface="Roboto"/>
+                        </a:rPr>
+                        <a:t>22.55 M</a:t>
+                      </a:r>
+                      <a:endParaRPr sz="1600">
+                        <a:latin typeface="Roboto"/>
+                        <a:ea typeface="Roboto"/>
+                        <a:cs typeface="Roboto"/>
+                        <a:sym typeface="Roboto"/>
+                      </a:endParaRPr>
+                    </a:p>
+                  </a:txBody>
+                  <a:tcPr marT="91425" marB="91425" marR="91425" marL="91425"/>
+                </a:tc>
+                <a:tc>
+                  <a:txBody>
+                    <a:bodyPr/>
+                    <a:lstStyle/>
+                    <a:p>
+                      <a:pPr indent="0" lvl="0" marL="0" rtl="0" algn="l">
+                        <a:spcBef>
+                          <a:spcPts val="0"/>
+                        </a:spcBef>
+                        <a:spcAft>
+                          <a:spcPts val="0"/>
+                        </a:spcAft>
+                        <a:buNone/>
+                      </a:pPr>
+                      <a:r>
+                        <a:rPr lang="en" sz="1600">
+                          <a:latin typeface="Roboto"/>
+                          <a:ea typeface="Roboto"/>
+                          <a:cs typeface="Roboto"/>
+                          <a:sym typeface="Roboto"/>
+                        </a:rPr>
+                        <a:t>14.9x fewer</a:t>
+                      </a:r>
+                      <a:endParaRPr sz="1600">
+                        <a:latin typeface="Roboto"/>
+                        <a:ea typeface="Roboto"/>
+                        <a:cs typeface="Roboto"/>
+                        <a:sym typeface="Roboto"/>
+                      </a:endParaRPr>
+                    </a:p>
+                  </a:txBody>
+                  <a:tcPr marT="91425" marB="91425" marR="91425" marL="91425"/>
+                </a:tc>
+              </a:tr>
+              <a:tr h="257175">
+                <a:tc>
+                  <a:txBody>
+                    <a:bodyPr/>
+                    <a:lstStyle/>
+                    <a:p>
+                      <a:pPr indent="0" lvl="0" marL="0" rtl="0" algn="l">
+                        <a:spcBef>
+                          <a:spcPts val="0"/>
+                        </a:spcBef>
+                        <a:spcAft>
+                          <a:spcPts val="0"/>
+                        </a:spcAft>
+                        <a:buNone/>
+                      </a:pPr>
+                      <a:r>
+                        <a:rPr lang="en" sz="1600">
+                          <a:latin typeface="Roboto"/>
+                          <a:ea typeface="Roboto"/>
+                          <a:cs typeface="Roboto"/>
+                          <a:sym typeface="Roboto"/>
+                        </a:rPr>
+                        <a:t>IPC</a:t>
+                      </a:r>
+                      <a:endParaRPr sz="1600">
+                        <a:latin typeface="Roboto"/>
+                        <a:ea typeface="Roboto"/>
+                        <a:cs typeface="Roboto"/>
+                        <a:sym typeface="Roboto"/>
+                      </a:endParaRPr>
+                    </a:p>
+                  </a:txBody>
+                  <a:tcPr marT="91425" marB="91425" marR="91425" marL="91425"/>
+                </a:tc>
+                <a:tc>
+                  <a:txBody>
+                    <a:bodyPr/>
+                    <a:lstStyle/>
+                    <a:p>
+                      <a:pPr indent="0" lvl="0" marL="0" rtl="0" algn="l">
+                        <a:spcBef>
+                          <a:spcPts val="0"/>
+                        </a:spcBef>
+                        <a:spcAft>
+                          <a:spcPts val="0"/>
+                        </a:spcAft>
+                        <a:buNone/>
+                      </a:pPr>
+                      <a:r>
+                        <a:rPr lang="en" sz="1600">
+                          <a:latin typeface="Roboto"/>
+                          <a:ea typeface="Roboto"/>
+                          <a:cs typeface="Roboto"/>
+                          <a:sym typeface="Roboto"/>
+                        </a:rPr>
+                        <a:t>3.28</a:t>
+                      </a:r>
+                      <a:endParaRPr sz="1600">
+                        <a:latin typeface="Roboto"/>
+                        <a:ea typeface="Roboto"/>
+                        <a:cs typeface="Roboto"/>
+                        <a:sym typeface="Roboto"/>
+                      </a:endParaRPr>
+                    </a:p>
+                  </a:txBody>
+                  <a:tcPr marT="91425" marB="91425" marR="91425" marL="91425"/>
+                </a:tc>
+                <a:tc>
+                  <a:txBody>
+                    <a:bodyPr/>
+                    <a:lstStyle/>
+                    <a:p>
+                      <a:pPr indent="0" lvl="0" marL="0" rtl="0" algn="l">
+                        <a:spcBef>
+                          <a:spcPts val="0"/>
+                        </a:spcBef>
+                        <a:spcAft>
+                          <a:spcPts val="0"/>
+                        </a:spcAft>
+                        <a:buNone/>
+                      </a:pPr>
+                      <a:r>
+                        <a:rPr lang="en" sz="1600">
+                          <a:latin typeface="Roboto"/>
+                          <a:ea typeface="Roboto"/>
+                          <a:cs typeface="Roboto"/>
+                          <a:sym typeface="Roboto"/>
+                        </a:rPr>
+                        <a:t>1.83</a:t>
+                      </a:r>
+                      <a:endParaRPr sz="1600">
+                        <a:latin typeface="Roboto"/>
+                        <a:ea typeface="Roboto"/>
+                        <a:cs typeface="Roboto"/>
+                        <a:sym typeface="Roboto"/>
+                      </a:endParaRPr>
+                    </a:p>
+                  </a:txBody>
+                  <a:tcPr marT="91425" marB="91425" marR="91425" marL="91425"/>
+                </a:tc>
+                <a:tc>
+                  <a:txBody>
+                    <a:bodyPr/>
+                    <a:lstStyle/>
+                    <a:p>
+                      <a:pPr indent="0" lvl="0" marL="0" rtl="0" algn="l">
+                        <a:spcBef>
+                          <a:spcPts val="0"/>
+                        </a:spcBef>
+                        <a:spcAft>
+                          <a:spcPts val="0"/>
+                        </a:spcAft>
+                        <a:buNone/>
+                      </a:pPr>
+                      <a:r>
+                        <a:rPr lang="en" sz="1600">
+                          <a:latin typeface="Roboto"/>
+                          <a:ea typeface="Roboto"/>
+                          <a:cs typeface="Roboto"/>
+                          <a:sym typeface="Roboto"/>
+                        </a:rPr>
+                        <a:t>lower</a:t>
+                      </a:r>
+                      <a:endParaRPr sz="1600">
+                        <a:latin typeface="Roboto"/>
+                        <a:ea typeface="Roboto"/>
+                        <a:cs typeface="Roboto"/>
+                        <a:sym typeface="Roboto"/>
+                      </a:endParaRPr>
+                    </a:p>
+                  </a:txBody>
+                  <a:tcPr marT="91425" marB="91425" marR="91425" marL="91425"/>
+                </a:tc>
+              </a:tr>
+              <a:tr h="257175">
+                <a:tc>
+                  <a:txBody>
+                    <a:bodyPr/>
+                    <a:lstStyle/>
+                    <a:p>
+                      <a:pPr indent="0" lvl="0" marL="0" rtl="0" algn="l">
+                        <a:spcBef>
+                          <a:spcPts val="0"/>
+                        </a:spcBef>
+                        <a:spcAft>
+                          <a:spcPts val="0"/>
+                        </a:spcAft>
+                        <a:buNone/>
+                      </a:pPr>
+                      <a:r>
+                        <a:rPr lang="en" sz="1600">
+                          <a:latin typeface="Roboto"/>
+                          <a:ea typeface="Roboto"/>
+                          <a:cs typeface="Roboto"/>
+                          <a:sym typeface="Roboto"/>
+                        </a:rPr>
+                        <a:t>Branches</a:t>
+                      </a:r>
+                      <a:endParaRPr sz="1600">
+                        <a:latin typeface="Roboto"/>
+                        <a:ea typeface="Roboto"/>
+                        <a:cs typeface="Roboto"/>
+                        <a:sym typeface="Roboto"/>
+                      </a:endParaRPr>
+                    </a:p>
+                  </a:txBody>
+                  <a:tcPr marT="91425" marB="91425" marR="91425" marL="91425"/>
+                </a:tc>
+                <a:tc>
+                  <a:txBody>
+                    <a:bodyPr/>
+                    <a:lstStyle/>
+                    <a:p>
+                      <a:pPr indent="0" lvl="0" marL="0" rtl="0" algn="l">
+                        <a:spcBef>
+                          <a:spcPts val="0"/>
+                        </a:spcBef>
+                        <a:spcAft>
+                          <a:spcPts val="0"/>
+                        </a:spcAft>
+                        <a:buNone/>
+                      </a:pPr>
+                      <a:r>
+                        <a:rPr lang="en" sz="1600">
+                          <a:latin typeface="Roboto"/>
+                          <a:ea typeface="Roboto"/>
+                          <a:cs typeface="Roboto"/>
+                          <a:sym typeface="Roboto"/>
+                        </a:rPr>
+                        <a:t>185.97 M</a:t>
+                      </a:r>
+                      <a:endParaRPr sz="1600">
+                        <a:latin typeface="Roboto"/>
+                        <a:ea typeface="Roboto"/>
+                        <a:cs typeface="Roboto"/>
+                        <a:sym typeface="Roboto"/>
+                      </a:endParaRPr>
+                    </a:p>
+                  </a:txBody>
+                  <a:tcPr marT="91425" marB="91425" marR="91425" marL="91425"/>
+                </a:tc>
+                <a:tc>
+                  <a:txBody>
+                    <a:bodyPr/>
+                    <a:lstStyle/>
+                    <a:p>
+                      <a:pPr indent="0" lvl="0" marL="0" rtl="0" algn="l">
+                        <a:spcBef>
+                          <a:spcPts val="0"/>
+                        </a:spcBef>
+                        <a:spcAft>
+                          <a:spcPts val="0"/>
+                        </a:spcAft>
+                        <a:buNone/>
+                      </a:pPr>
+                      <a:r>
+                        <a:rPr lang="en" sz="1600">
+                          <a:latin typeface="Roboto"/>
+                          <a:ea typeface="Roboto"/>
+                          <a:cs typeface="Roboto"/>
+                          <a:sym typeface="Roboto"/>
+                        </a:rPr>
+                        <a:t>3.92 M</a:t>
+                      </a:r>
+                      <a:endParaRPr sz="1600">
+                        <a:latin typeface="Roboto"/>
+                        <a:ea typeface="Roboto"/>
+                        <a:cs typeface="Roboto"/>
+                        <a:sym typeface="Roboto"/>
+                      </a:endParaRPr>
+                    </a:p>
+                  </a:txBody>
+                  <a:tcPr marT="91425" marB="91425" marR="91425" marL="91425"/>
+                </a:tc>
+                <a:tc>
+                  <a:txBody>
+                    <a:bodyPr/>
+                    <a:lstStyle/>
+                    <a:p>
+                      <a:pPr indent="0" lvl="0" marL="0" rtl="0" algn="l">
+                        <a:spcBef>
+                          <a:spcPts val="0"/>
+                        </a:spcBef>
+                        <a:spcAft>
+                          <a:spcPts val="0"/>
+                        </a:spcAft>
+                        <a:buNone/>
+                      </a:pPr>
+                      <a:r>
+                        <a:t/>
+                      </a:r>
+                      <a:endParaRPr/>
+                    </a:p>
+                  </a:txBody>
+                  <a:tcPr marT="91425" marB="91425" marR="91425" marL="91425"/>
+                </a:tc>
+              </a:tr>
+            </a:tbl>
+          </a:graphicData>
+        </a:graphic>
+      </p:graphicFrame>
+    </p:spTree>
+  </p:cSld>
+  <p:clrMapOvr>
+    <a:masterClrMapping/>
+  </p:clrMapOvr>
+</p:sld>
+</file>
+
+<file path=ppt/slides/slide8.xml><?xml version="1.0" encoding="utf-8"?>
+<p:sld xmlns:a="http://schemas.openxmlformats.org/drawingml/2006/main" xmlns:r="http://schemas.openxmlformats.org/officeDocument/2006/relationships" xmlns:mc="http://schemas.openxmlformats.org/markup-compatibility/2006" xmlns:mv="urn:schemas-microsoft-com:mac:vml" xmlns:p="http://schemas.openxmlformats.org/presentationml/2006/main" xmlns:c="http://schemas.openxmlformats.org/drawingml/2006/chart" xmlns:dgm="http://schemas.openxmlformats.org/drawingml/2006/diagram" xmlns:o="urn:schemas-microsoft-com:office:office" xmlns:v="urn:schemas-microsoft-com:vml" xmlns:pvml="urn:schemas-microsoft-com:office:powerpoint" xmlns:com="http://schemas.openxmlformats.org/drawingml/2006/compatibility" xmlns:p14="http://schemas.microsoft.com/office/powerpoint/2010/main" xmlns:p15="http://schemas.microsoft.com/office/powerpoint/2012/main" xmlns:ahyp="http://schemas.microsoft.com/office/drawing/2018/hyperlinkcolor">
+  <p:cSld>
+    <p:spTree>
+      <p:nvGrpSpPr>
+        <p:cNvPr id="96" name="Shape 96"/>
+        <p:cNvGrpSpPr/>
+        <p:nvPr/>
+      </p:nvGrpSpPr>
+      <p:grpSpPr>
+        <a:xfrm>
+          <a:off x="0" y="0"/>
+          <a:ext cx="0" cy="0"/>
+          <a:chOff x="0" y="0"/>
+          <a:chExt cx="0" cy="0"/>
+        </a:xfrm>
+      </p:grpSpPr>
+      <p:sp>
+        <p:nvSpPr>
+          <p:cNvPr id="97" name="Google Shape;97;p17"/>
+          <p:cNvSpPr txBox="1"/>
+          <p:nvPr>
+            <p:ph type="title"/>
+          </p:nvPr>
+        </p:nvSpPr>
+        <p:spPr>
+          <a:xfrm>
+            <a:off x="365760" y="228600"/>
+            <a:ext cx="8412600" cy="1097400"/>
+          </a:xfrm>
+          <a:prstGeom prst="rect">
+            <a:avLst/>
+          </a:prstGeom>
+        </p:spPr>
+        <p:txBody>
+          <a:bodyPr anchorCtr="0" anchor="t" bIns="91425" lIns="91425" spcFirstLastPara="1" rIns="91425" wrap="square" tIns="91425">
+            <a:noAutofit/>
+          </a:bodyPr>
+          <a:lstStyle/>
+          <a:p>
+            <a:pPr indent="0" lvl="0" marL="0" rtl="0" algn="l">
+              <a:spcBef>
+                <a:spcPts val="0"/>
+              </a:spcBef>
+              <a:spcAft>
+                <a:spcPts val="0"/>
+              </a:spcAft>
+              <a:buNone/>
+            </a:pPr>
+            <a:r>
+              <a:rPr lang="en"/>
+              <a:t>advance() is 95% of the remaining time, so the whole step goes on-chip after one doorbell</a:t>
+            </a:r>
+            <a:endParaRPr/>
+          </a:p>
+        </p:txBody>
+      </p:sp>
+      <p:sp>
+        <p:nvSpPr>
+          <p:cNvPr id="98" name="Google Shape;98;p17"/>
+          <p:cNvSpPr txBox="1"/>
+          <p:nvPr>
+            <p:ph idx="12" type="sldNum"/>
+          </p:nvPr>
+        </p:nvSpPr>
+        <p:spPr>
+          <a:xfrm>
+            <a:off x="7863840" y="4773168"/>
+            <a:ext cx="914400" cy="365700"/>
+          </a:xfrm>
+          <a:prstGeom prst="rect">
+            <a:avLst/>
+          </a:prstGeom>
+        </p:spPr>
+        <p:txBody>
+          <a:bodyPr anchorCtr="0" anchor="ctr" bIns="91425" lIns="91425" spcFirstLastPara="1" rIns="91425" wrap="square" tIns="91425">
+            <a:normAutofit/>
+          </a:bodyPr>
+          <a:lstStyle/>
+          <a:p>
+            <a:pPr indent="0" lvl="0" marL="0" rtl="0" algn="r">
+              <a:spcBef>
+                <a:spcPts val="0"/>
+              </a:spcBef>
+              <a:spcAft>
+                <a:spcPts val="0"/>
+              </a:spcAft>
+              <a:buNone/>
+            </a:pPr>
+            <a:fld id="{00000000-1234-1234-1234-123412341234}" type="slidenum">
+              <a:rPr lang="en"/>
+              <a:t>‹#›</a:t>
+            </a:fld>
+            <a:endParaRPr/>
+          </a:p>
+        </p:txBody>
+      </p:sp>
+      <p:pic>
+        <p:nvPicPr>
+          <p:cNvPr id="99" name="Google Shape;99;p17" title="grape_report.png"/>
+          <p:cNvPicPr preferRelativeResize="0"/>
+          <p:nvPr/>
+        </p:nvPicPr>
+        <p:blipFill>
+          <a:blip r:embed="rId3">
+            <a:alphaModFix/>
+          </a:blip>
+          <a:stretch>
+            <a:fillRect/>
+          </a:stretch>
+        </p:blipFill>
+        <p:spPr>
+          <a:xfrm>
+            <a:off x="365760" y="1463040"/>
+            <a:ext cx="8412481" cy="2548973"/>
+          </a:xfrm>
+          <a:prstGeom prst="rect">
+            <a:avLst/>
+          </a:prstGeom>
+          <a:noFill/>
+          <a:ln>
+            <a:noFill/>
+          </a:ln>
+        </p:spPr>
+      </p:pic>
+    </p:spTree>
+  </p:cSld>
+  <p:clrMapOvr>
+    <a:masterClrMapping/>
+  </p:clrMapOvr>
+</p:sld>
+</file>
+
+<file path=ppt/slides/slide9.xml><?xml version="1.0" encoding="utf-8"?>
+<p:sld xmlns:a="http://schemas.openxmlformats.org/drawingml/2006/main" xmlns:r="http://schemas.openxmlformats.org/officeDocument/2006/relationships" xmlns:mc="http://schemas.openxmlformats.org/markup-compatibility/2006" xmlns:mv="urn:schemas-microsoft-com:mac:vml" xmlns:p="http://schemas.openxmlformats.org/presentationml/2006/main" xmlns:c="http://schemas.openxmlformats.org/drawingml/2006/chart" xmlns:dgm="http://schemas.openxmlformats.org/drawingml/2006/diagram" xmlns:o="urn:schemas-microsoft-com:office:office" xmlns:v="urn:schemas-microsoft-com:vml" xmlns:pvml="urn:schemas-microsoft-com:office:powerpoint" xmlns:com="http://schemas.openxmlformats.org/drawingml/2006/compatibility" xmlns:p14="http://schemas.microsoft.com/office/powerpoint/2010/main" xmlns:p15="http://schemas.microsoft.com/office/powerpoint/2012/main" xmlns:ahyp="http://schemas.microsoft.com/office/drawing/2018/hyperlinkcolor">
+  <p:cSld>
+    <p:spTree>
+      <p:nvGrpSpPr>
+        <p:cNvPr id="103" name="Shape 103"/>
+        <p:cNvGrpSpPr/>
+        <p:nvPr/>
+      </p:nvGrpSpPr>
+      <p:grpSpPr>
+        <a:xfrm>
+          <a:off x="0" y="0"/>
+          <a:ext cx="0" cy="0"/>
+          <a:chOff x="0" y="0"/>
+          <a:chExt cx="0" cy="0"/>
+        </a:xfrm>
+      </p:grpSpPr>
+      <p:sp>
+        <p:nvSpPr>
+          <p:cNvPr id="104" name="Google Shape;104;p18"/>
+          <p:cNvSpPr txBox="1"/>
+          <p:nvPr>
+            <p:ph type="title"/>
+          </p:nvPr>
+        </p:nvSpPr>
+        <p:spPr>
+          <a:xfrm>
+            <a:off x="365760" y="228600"/>
+            <a:ext cx="8412600" cy="1097400"/>
+          </a:xfrm>
+          <a:prstGeom prst="rect">
+            <a:avLst/>
+          </a:prstGeom>
+        </p:spPr>
+        <p:txBody>
+          <a:bodyPr anchorCtr="0" anchor="t" bIns="91425" lIns="91425" spcFirstLastPara="1" rIns="91425" wrap="square" tIns="91425">
+            <a:noAutofit/>
+          </a:bodyPr>
+          <a:lstStyle/>
+          <a:p>
+            <a:pPr indent="0" lvl="0" marL="0" rtl="0" algn="l">
+              <a:spcBef>
+                <a:spcPts val="0"/>
+              </a:spcBef>
+              <a:spcAft>
+                <a:spcPts val="0"/>
+              </a:spcAft>
+              <a:buNone/>
+            </a:pPr>
+            <a:r>
+              <a:rPr lang="en"/>
+              <a:t>grape_pipeline computes full IEEE FP64 in the benchmark's own operation order, with 3 adders and 3 multipliers chosen by a cycle model</a:t>
+            </a:r>
+            <a:endParaRPr/>
+          </a:p>
+        </p:txBody>
+      </p:sp>
+      <p:sp>
+        <p:nvSpPr>
+          <p:cNvPr id="105" name="Google Shape;105;p18"/>
+          <p:cNvSpPr txBox="1"/>
+          <p:nvPr>
+            <p:ph idx="12" type="sldNum"/>
+          </p:nvPr>
+        </p:nvSpPr>
+        <p:spPr>
+          <a:xfrm>
+            <a:off x="7863840" y="4773168"/>
+            <a:ext cx="914400" cy="365700"/>
+          </a:xfrm>
+          <a:prstGeom prst="rect">
+            <a:avLst/>
+          </a:prstGeom>
+        </p:spPr>
+        <p:txBody>
+          <a:bodyPr anchorCtr="0" anchor="ctr" bIns="91425" lIns="91425" spcFirstLastPara="1" rIns="91425" wrap="square" tIns="91425">
+            <a:normAutofit/>
+          </a:bodyPr>
+          <a:lstStyle/>
+          <a:p>
+            <a:pPr indent="0" lvl="0" marL="0" rtl="0" algn="r">
+              <a:spcBef>
+                <a:spcPts val="0"/>
+              </a:spcBef>
+              <a:spcAft>
+                <a:spcPts val="0"/>
+              </a:spcAft>
+              <a:buNone/>
+            </a:pPr>
+            <a:fld id="{00000000-1234-1234-1234-123412341234}" type="slidenum">
+              <a:rPr lang="en"/>
+              <a:t>‹#›</a:t>
+            </a:fld>
+            <a:endParaRPr/>
+          </a:p>
+        </p:txBody>
+      </p:sp>
+      <p:pic>
+        <p:nvPicPr>
+          <p:cNvPr id="106" name="Google Shape;106;p18" title="grape_block_diagram.png"/>
+          <p:cNvPicPr preferRelativeResize="0"/>
+          <p:nvPr/>
+        </p:nvPicPr>
+        <p:blipFill>
+          <a:blip r:embed="rId3">
+            <a:alphaModFix/>
+          </a:blip>
+          <a:stretch>
+            <a:fillRect/>
+          </a:stretch>
+        </p:blipFill>
+        <p:spPr>
+          <a:xfrm>
+            <a:off x="365760" y="1463040"/>
+            <a:ext cx="8412481" cy="2670767"/>
           </a:xfrm>
           <a:prstGeom prst="rect">
             <a:avLst/>
